--- a/Presentation/BrainTumour_YOLO_MedSAM2.pptx
+++ b/Presentation/BrainTumour_YOLO_MedSAM2.pptx
@@ -1261,27 +1261,47 @@
           <a:lstStyle/>
           <a:p>
             <a:r>
-              <a:t>כל סריקה כוללת כמה רצפים של MRI, וכל רצף מראה את הגידול אחרת: T1C עם חומר ניגוד מדגיש את החלק הפעיל, T2 ו-FLAIR מדגישים נוזלים ובצקת.</a:t>
-            </a:r>
-          </a:p>
-          <a:p>
-            <a:r>
-              <a:t>המומחים סימנו ארבעה חלקים: ליבה מתה (NETC), בצקת (SNFH), גידול פעיל (ET) וחלל ניתוח (RC). כ-85% מהסריקות הן אחרי ניתוח.</a:t>
-            </a:r>
-          </a:p>
-          <a:p>
-            <a:r>
-              <a:t>אנחנו מסמנים את הגידול כולו, כלומר את כל החלקים יחד.</a:t>
-            </a:r>
-          </a:p>
-          <a:p>
-            <a:r>
-              <a:t>המדד שלנו הוא 3D Dice: כמה המסכה של המודל חופפת למסכה של המומחה בנפח כולו. 0 = אין חפיפה, 1 = מושלם. מחשבים לכל מטופל ואז ממצעים.</a:t>
-            </a:r>
-          </a:p>
-          <a:p>
-            <a:r>
-              <a:t>שלושה רצפים (T1C, T2, FLAIR) נכנסים כתמונה צבעונית אחת: אדום, ירוק וכחול.</a:t>
+              <a:t>כאן רואים מטופל אחד, BraTS-GLI-00046-101, בפרוסה 115, בהגדלה על אזור הגידול. בפרוסה הזאת יש את כל ארבעת חלקי הגידול.</a:t>
+            </a:r>
+          </a:p>
+          <a:p>
+            <a:r>
+              <a:t>T1 בלי חומר ניגוד: הטבעת של הגידול הפעיל (המסומנת בסגול) כמעט לא בהירה. זו תמונת ה"לפני" שמשווים אליה. המודלים שלנו לא משתמשים בה.</a:t>
+            </a:r>
+          </a:p>
+          <a:p>
+            <a:r>
+              <a:t>T1C, אחרי הזרקת חומר ניגוד: אותה טבעת נדלקת בבהירות. זה הגידול הפעיל (ET). בפנים נשארת ליבה כהה, הרקמה המתה (NETC, באדום).</a:t>
+            </a:r>
+          </a:p>
+          <a:p>
+            <a:r>
+              <a:t>T2: בצקת ונוזלים בהירים. הקו הירוק מסמן את הבצקת (SNFH).</a:t>
+            </a:r>
+          </a:p>
+          <a:p>
+            <a:r>
+              <a:t>FLAIR: כמו T2, אבל הנוזל הרגיל של המוח (בחדרים) כהה, ולכן הבצקת בולטת יותר.</a:t>
+            </a:r>
+          </a:p>
+          <a:p>
+            <a:r>
+              <a:t>בצד ימין: הסימון של המומחה, כולל חלל הניתוח (RC) בצהוב.</a:t>
+            </a:r>
+          </a:p>
+          <a:p>
+            <a:r>
+              <a:t>אנחנו מסמנים את הגידול כולו, כלומר את כל החלקים יחד. המודלים שלנו מקבלים את T1C, T2 ו-FLAIR כתמונה צבעונית אחת.</a:t>
+            </a:r>
+          </a:p>
+          <a:p>
+            <a:r>
+              <a:t>המדד: 3D Dice, החפיפה בין המסכה של המודל לזו של המומחה בכל הנפח. 0 = אין חפיפה, 1 = מושלם.</a:t>
+            </a:r>
+          </a:p>
+          <a:p>
+            <a:r>
+              <a:t>מסר: אף רצף לבד לא מראה את כל הגידול, ולכן משלבים כמה רצפים.</a:t>
             </a:r>
           </a:p>
         </p:txBody>
@@ -8618,7 +8638,7 @@
                 </a:solidFill>
                 <a:latin typeface="Segoe UI"/>
               </a:rPr>
-              <a:t>BACKGROUND</a:t>
+              <a:t>BACKGROUND · PATIENT BRATS-GLI-00046-101, SLICE 115, ZOOMED ON THE TUMOUR</a:t>
             </a:r>
           </a:p>
         </p:txBody>
@@ -8657,7 +8677,7 @@
                 </a:solidFill>
                 <a:latin typeface="Segoe UI"/>
               </a:rPr>
-              <a:t>MRI sequences and the BraTS 2024 data</a:t>
+              <a:t>Each MRI sequence shows a different part of the tumour</a:t>
             </a:r>
           </a:p>
         </p:txBody>
@@ -8703,7 +8723,7 @@
       </p:sp>
       <p:pic>
         <p:nvPicPr>
-          <p:cNvPr id="5" name="Picture 4" descr="mri_t1c.png"/>
+          <p:cNvPr id="5" name="Picture 4" descr="mod_t1.png"/>
           <p:cNvPicPr>
             <a:picLocks noChangeAspect="1"/>
           </p:cNvPicPr>
@@ -8717,8 +8737,8 @@
         </p:blipFill>
         <p:spPr>
           <a:xfrm>
-            <a:off x="548640" y="1483526"/>
-            <a:ext cx="1737360" cy="2062148"/>
+            <a:off x="900684" y="1325880"/>
+            <a:ext cx="1874519" cy="2829352"/>
           </a:xfrm>
           <a:prstGeom prst="rect">
             <a:avLst/>
@@ -8738,8 +8758,8 @@
         </p:nvSpPr>
         <p:spPr>
           <a:xfrm>
-            <a:off x="548640" y="3582250"/>
-            <a:ext cx="1737360" cy="320040"/>
+            <a:off x="900684" y="4210096"/>
+            <a:ext cx="1874519" cy="274320"/>
           </a:xfrm>
           <a:prstGeom prst="rect">
             <a:avLst/>
@@ -8754,7 +8774,46 @@
           <a:p>
             <a:pPr algn="ctr">
               <a:spcAft>
-                <a:spcPts val="600"/>
+                <a:spcPts val="0"/>
+              </a:spcAft>
+            </a:pPr>
+            <a:r>
+              <a:rPr sz="1300" b="1">
+                <a:solidFill>
+                  <a:srgbClr val="E8EAF2"/>
+                </a:solidFill>
+                <a:latin typeface="Segoe UI"/>
+              </a:rPr>
+              <a:t>T1 (no contrast)</a:t>
+            </a:r>
+          </a:p>
+        </p:txBody>
+      </p:sp>
+      <p:sp>
+        <p:nvSpPr>
+          <p:cNvPr id="7" name="TextBox 6"/>
+          <p:cNvSpPr txBox="1"/>
+          <p:nvPr/>
+        </p:nvSpPr>
+        <p:spPr>
+          <a:xfrm>
+            <a:off x="900684" y="4466128"/>
+            <a:ext cx="1874519" cy="548640"/>
+          </a:xfrm>
+          <a:prstGeom prst="rect">
+            <a:avLst/>
+          </a:prstGeom>
+          <a:noFill/>
+        </p:spPr>
+        <p:txBody>
+          <a:bodyPr wrap="square" anchor="t" lIns="45720" rIns="45720">
+            <a:spAutoFit/>
+          </a:bodyPr>
+          <a:lstStyle/>
+          <a:p>
+            <a:pPr algn="ctr">
+              <a:spcAft>
+                <a:spcPts val="0"/>
               </a:spcAft>
             </a:pPr>
             <a:r>
@@ -8764,14 +8823,14 @@
                 </a:solidFill>
                 <a:latin typeface="Segoe UI"/>
               </a:rPr>
-              <a:t>T1C (with contrast)</a:t>
+              <a:t>Rim (ET, violet) barely visible. Not used by our models.</a:t>
             </a:r>
           </a:p>
         </p:txBody>
       </p:sp>
       <p:pic>
         <p:nvPicPr>
-          <p:cNvPr id="7" name="Picture 6" descr="mri_t2.png"/>
+          <p:cNvPr id="8" name="Picture 7" descr="mod_t1c.png"/>
           <p:cNvPicPr>
             <a:picLocks noChangeAspect="1"/>
           </p:cNvPicPr>
@@ -8785,8 +8844,8 @@
         </p:blipFill>
         <p:spPr>
           <a:xfrm>
-            <a:off x="2423160" y="1483526"/>
-            <a:ext cx="1737360" cy="2062148"/>
+            <a:off x="3022092" y="1325880"/>
+            <a:ext cx="1874519" cy="2829352"/>
           </a:xfrm>
           <a:prstGeom prst="rect">
             <a:avLst/>
@@ -8800,14 +8859,14 @@
       </p:pic>
       <p:sp>
         <p:nvSpPr>
-          <p:cNvPr id="8" name="TextBox 7"/>
+          <p:cNvPr id="9" name="TextBox 8"/>
           <p:cNvSpPr txBox="1"/>
           <p:nvPr/>
         </p:nvSpPr>
         <p:spPr>
           <a:xfrm>
-            <a:off x="2423160" y="3582250"/>
-            <a:ext cx="1737360" cy="320040"/>
+            <a:off x="3022092" y="4210096"/>
+            <a:ext cx="1874519" cy="274320"/>
           </a:xfrm>
           <a:prstGeom prst="rect">
             <a:avLst/>
@@ -8822,7 +8881,46 @@
           <a:p>
             <a:pPr algn="ctr">
               <a:spcAft>
-                <a:spcPts val="600"/>
+                <a:spcPts val="0"/>
+              </a:spcAft>
+            </a:pPr>
+            <a:r>
+              <a:rPr sz="1300" b="1">
+                <a:solidFill>
+                  <a:srgbClr val="E8EAF2"/>
+                </a:solidFill>
+                <a:latin typeface="Segoe UI"/>
+              </a:rPr>
+              <a:t>T1C (with contrast)</a:t>
+            </a:r>
+          </a:p>
+        </p:txBody>
+      </p:sp>
+      <p:sp>
+        <p:nvSpPr>
+          <p:cNvPr id="10" name="TextBox 9"/>
+          <p:cNvSpPr txBox="1"/>
+          <p:nvPr/>
+        </p:nvSpPr>
+        <p:spPr>
+          <a:xfrm>
+            <a:off x="3022092" y="4466128"/>
+            <a:ext cx="1874519" cy="548640"/>
+          </a:xfrm>
+          <a:prstGeom prst="rect">
+            <a:avLst/>
+          </a:prstGeom>
+          <a:noFill/>
+        </p:spPr>
+        <p:txBody>
+          <a:bodyPr wrap="square" anchor="t" lIns="45720" rIns="45720">
+            <a:spAutoFit/>
+          </a:bodyPr>
+          <a:lstStyle/>
+          <a:p>
+            <a:pPr algn="ctr">
+              <a:spcAft>
+                <a:spcPts val="0"/>
               </a:spcAft>
             </a:pPr>
             <a:r>
@@ -8832,14 +8930,14 @@
                 </a:solidFill>
                 <a:latin typeface="Segoe UI"/>
               </a:rPr>
-              <a:t>T2</a:t>
+              <a:t>Rim lights up (ET, violet); dead core dark (NETC, red).</a:t>
             </a:r>
           </a:p>
         </p:txBody>
       </p:sp>
       <p:pic>
         <p:nvPicPr>
-          <p:cNvPr id="9" name="Picture 8" descr="mri_flair.png"/>
+          <p:cNvPr id="11" name="Picture 10" descr="mod_t2.png"/>
           <p:cNvPicPr>
             <a:picLocks noChangeAspect="1"/>
           </p:cNvPicPr>
@@ -8853,8 +8951,8 @@
         </p:blipFill>
         <p:spPr>
           <a:xfrm>
-            <a:off x="4297679" y="1483526"/>
-            <a:ext cx="1737360" cy="2062148"/>
+            <a:off x="5143500" y="1325880"/>
+            <a:ext cx="1874519" cy="2829352"/>
           </a:xfrm>
           <a:prstGeom prst="rect">
             <a:avLst/>
@@ -8868,14 +8966,14 @@
       </p:pic>
       <p:sp>
         <p:nvSpPr>
-          <p:cNvPr id="10" name="TextBox 9"/>
+          <p:cNvPr id="12" name="TextBox 11"/>
           <p:cNvSpPr txBox="1"/>
           <p:nvPr/>
         </p:nvSpPr>
         <p:spPr>
           <a:xfrm>
-            <a:off x="4297679" y="3582250"/>
-            <a:ext cx="1737360" cy="320040"/>
+            <a:off x="5143500" y="4210096"/>
+            <a:ext cx="1874519" cy="274320"/>
           </a:xfrm>
           <a:prstGeom prst="rect">
             <a:avLst/>
@@ -8890,7 +8988,46 @@
           <a:p>
             <a:pPr algn="ctr">
               <a:spcAft>
-                <a:spcPts val="600"/>
+                <a:spcPts val="0"/>
+              </a:spcAft>
+            </a:pPr>
+            <a:r>
+              <a:rPr sz="1300" b="1">
+                <a:solidFill>
+                  <a:srgbClr val="E8EAF2"/>
+                </a:solidFill>
+                <a:latin typeface="Segoe UI"/>
+              </a:rPr>
+              <a:t>T2</a:t>
+            </a:r>
+          </a:p>
+        </p:txBody>
+      </p:sp>
+      <p:sp>
+        <p:nvSpPr>
+          <p:cNvPr id="13" name="TextBox 12"/>
+          <p:cNvSpPr txBox="1"/>
+          <p:nvPr/>
+        </p:nvSpPr>
+        <p:spPr>
+          <a:xfrm>
+            <a:off x="5143500" y="4466128"/>
+            <a:ext cx="1874519" cy="548640"/>
+          </a:xfrm>
+          <a:prstGeom prst="rect">
+            <a:avLst/>
+          </a:prstGeom>
+          <a:noFill/>
+        </p:spPr>
+        <p:txBody>
+          <a:bodyPr wrap="square" anchor="t" lIns="45720" rIns="45720">
+            <a:spAutoFit/>
+          </a:bodyPr>
+          <a:lstStyle/>
+          <a:p>
+            <a:pPr algn="ctr">
+              <a:spcAft>
+                <a:spcPts val="0"/>
               </a:spcAft>
             </a:pPr>
             <a:r>
@@ -8900,14 +9037,14 @@
                 </a:solidFill>
                 <a:latin typeface="Segoe UI"/>
               </a:rPr>
-              <a:t>FLAIR</a:t>
+              <a:t>Swelling and fluid bright (SNFH, green).</a:t>
             </a:r>
           </a:p>
         </p:txBody>
       </p:sp>
       <p:pic>
         <p:nvPicPr>
-          <p:cNvPr id="11" name="Picture 10" descr="mri_flair_seg.png"/>
+          <p:cNvPr id="14" name="Picture 13" descr="mod_flair.png"/>
           <p:cNvPicPr>
             <a:picLocks noChangeAspect="1"/>
           </p:cNvPicPr>
@@ -8921,8 +9058,8 @@
         </p:blipFill>
         <p:spPr>
           <a:xfrm>
-            <a:off x="6172199" y="1483526"/>
-            <a:ext cx="1737360" cy="2062148"/>
+            <a:off x="7264908" y="1325880"/>
+            <a:ext cx="1874519" cy="2829352"/>
           </a:xfrm>
           <a:prstGeom prst="rect">
             <a:avLst/>
@@ -8936,14 +9073,14 @@
       </p:pic>
       <p:sp>
         <p:nvSpPr>
-          <p:cNvPr id="12" name="TextBox 11"/>
+          <p:cNvPr id="15" name="TextBox 14"/>
           <p:cNvSpPr txBox="1"/>
           <p:nvPr/>
         </p:nvSpPr>
         <p:spPr>
           <a:xfrm>
-            <a:off x="6172199" y="3582250"/>
-            <a:ext cx="1737360" cy="320040"/>
+            <a:off x="7264908" y="4210096"/>
+            <a:ext cx="1874519" cy="274320"/>
           </a:xfrm>
           <a:prstGeom prst="rect">
             <a:avLst/>
@@ -8958,31 +9095,31 @@
           <a:p>
             <a:pPr algn="ctr">
               <a:spcAft>
-                <a:spcPts val="600"/>
-              </a:spcAft>
-            </a:pPr>
-            <a:r>
-              <a:rPr sz="1100" b="0">
-                <a:solidFill>
-                  <a:srgbClr val="9AA0B8"/>
-                </a:solidFill>
-                <a:latin typeface="Segoe UI"/>
-              </a:rPr>
-              <a:t>FLAIR + expert labels</a:t>
-            </a:r>
-          </a:p>
-        </p:txBody>
-      </p:sp>
-      <p:sp>
-        <p:nvSpPr>
-          <p:cNvPr id="13" name="TextBox 12"/>
+                <a:spcPts val="0"/>
+              </a:spcAft>
+            </a:pPr>
+            <a:r>
+              <a:rPr sz="1300" b="1">
+                <a:solidFill>
+                  <a:srgbClr val="E8EAF2"/>
+                </a:solidFill>
+                <a:latin typeface="Segoe UI"/>
+              </a:rPr>
+              <a:t>FLAIR</a:t>
+            </a:r>
+          </a:p>
+        </p:txBody>
+      </p:sp>
+      <p:sp>
+        <p:nvSpPr>
+          <p:cNvPr id="16" name="TextBox 15"/>
           <p:cNvSpPr txBox="1"/>
           <p:nvPr/>
         </p:nvSpPr>
         <p:spPr>
           <a:xfrm>
-            <a:off x="548640" y="3977639"/>
-            <a:ext cx="7498079" cy="1828800"/>
+            <a:off x="7264908" y="4466128"/>
+            <a:ext cx="1874519" cy="548640"/>
           </a:xfrm>
           <a:prstGeom prst="rect">
             <a:avLst/>
@@ -8995,158 +9132,236 @@
           </a:bodyPr>
           <a:lstStyle/>
           <a:p>
+            <a:pPr algn="ctr">
+              <a:spcAft>
+                <a:spcPts val="0"/>
+              </a:spcAft>
+            </a:pPr>
+            <a:r>
+              <a:rPr sz="1100" b="0">
+                <a:solidFill>
+                  <a:srgbClr val="9AA0B8"/>
+                </a:solidFill>
+                <a:latin typeface="Segoe UI"/>
+              </a:rPr>
+              <a:t>Like T2, but brain fluid is dark: swelling stands out.</a:t>
+            </a:r>
+          </a:p>
+        </p:txBody>
+      </p:sp>
+      <p:pic>
+        <p:nvPicPr>
+          <p:cNvPr id="17" name="Picture 16" descr="mod_labels.png"/>
+          <p:cNvPicPr>
+            <a:picLocks noChangeAspect="1"/>
+          </p:cNvPicPr>
+          <p:nvPr/>
+        </p:nvPicPr>
+        <p:blipFill>
+          <a:blip r:embed="rId6"/>
+          <a:stretch>
+            <a:fillRect/>
+          </a:stretch>
+        </p:blipFill>
+        <p:spPr>
+          <a:xfrm>
+            <a:off x="9386316" y="1325880"/>
+            <a:ext cx="1874519" cy="2829352"/>
+          </a:xfrm>
+          <a:prstGeom prst="rect">
+            <a:avLst/>
+          </a:prstGeom>
+          <a:ln w="9525">
+            <a:solidFill>
+              <a:srgbClr val="2A2F47"/>
+            </a:solidFill>
+          </a:ln>
+        </p:spPr>
+      </p:pic>
+      <p:sp>
+        <p:nvSpPr>
+          <p:cNvPr id="18" name="TextBox 17"/>
+          <p:cNvSpPr txBox="1"/>
+          <p:nvPr/>
+        </p:nvSpPr>
+        <p:spPr>
+          <a:xfrm>
+            <a:off x="9386316" y="4210096"/>
+            <a:ext cx="1874519" cy="274320"/>
+          </a:xfrm>
+          <a:prstGeom prst="rect">
+            <a:avLst/>
+          </a:prstGeom>
+          <a:noFill/>
+        </p:spPr>
+        <p:txBody>
+          <a:bodyPr wrap="square" anchor="t" lIns="45720" rIns="45720">
+            <a:spAutoFit/>
+          </a:bodyPr>
+          <a:lstStyle/>
+          <a:p>
+            <a:pPr algn="ctr">
+              <a:spcAft>
+                <a:spcPts val="0"/>
+              </a:spcAft>
+            </a:pPr>
+            <a:r>
+              <a:rPr sz="1300" b="1">
+                <a:solidFill>
+                  <a:srgbClr val="E8EAF2"/>
+                </a:solidFill>
+                <a:latin typeface="Segoe UI"/>
+              </a:rPr>
+              <a:t>Expert labels</a:t>
+            </a:r>
+          </a:p>
+        </p:txBody>
+      </p:sp>
+      <p:sp>
+        <p:nvSpPr>
+          <p:cNvPr id="19" name="TextBox 18"/>
+          <p:cNvSpPr txBox="1"/>
+          <p:nvPr/>
+        </p:nvSpPr>
+        <p:spPr>
+          <a:xfrm>
+            <a:off x="9386316" y="4466128"/>
+            <a:ext cx="1874519" cy="548640"/>
+          </a:xfrm>
+          <a:prstGeom prst="rect">
+            <a:avLst/>
+          </a:prstGeom>
+          <a:noFill/>
+        </p:spPr>
+        <p:txBody>
+          <a:bodyPr wrap="square" anchor="t" lIns="45720" rIns="45720">
+            <a:spAutoFit/>
+          </a:bodyPr>
+          <a:lstStyle/>
+          <a:p>
+            <a:pPr algn="ctr">
+              <a:spcAft>
+                <a:spcPts val="0"/>
+              </a:spcAft>
+            </a:pPr>
+            <a:r>
+              <a:rPr sz="1100" b="0">
+                <a:solidFill>
+                  <a:srgbClr val="9AA0B8"/>
+                </a:solidFill>
+                <a:latin typeface="Segoe UI"/>
+              </a:rPr>
+              <a:t>NETC red · SNFH green · ET violet · RC (cavity) yellow</a:t>
+            </a:r>
+          </a:p>
+        </p:txBody>
+      </p:sp>
+      <p:sp>
+        <p:nvSpPr>
+          <p:cNvPr id="20" name="TextBox 19"/>
+          <p:cNvSpPr txBox="1"/>
+          <p:nvPr/>
+        </p:nvSpPr>
+        <p:spPr>
+          <a:xfrm>
+            <a:off x="548640" y="4983480"/>
+            <a:ext cx="11064240" cy="731520"/>
+          </a:xfrm>
+          <a:prstGeom prst="rect">
+            <a:avLst/>
+          </a:prstGeom>
+          <a:noFill/>
+        </p:spPr>
+        <p:txBody>
+          <a:bodyPr wrap="square" anchor="t" lIns="45720" rIns="45720">
+            <a:spAutoFit/>
+          </a:bodyPr>
+          <a:lstStyle/>
+          <a:p>
             <a:pPr algn="l">
               <a:spcAft>
-                <a:spcPts val="800"/>
-              </a:spcAft>
-            </a:pPr>
-            <a:r>
-              <a:rPr sz="1600" b="0">
-                <a:solidFill>
-                  <a:srgbClr val="E8EAF2"/>
-                </a:solidFill>
-                <a:latin typeface="Segoe UI"/>
-              </a:rPr>
-              <a:t>•  Each scan: 4 MRI sequences, 182 × 218 × 182 voxels of 1 mm³ (1,000 voxels = 1 mL).</a:t>
+                <a:spcPts val="300"/>
+              </a:spcAft>
+            </a:pPr>
+            <a:r>
+              <a:rPr sz="1400" b="0">
+                <a:solidFill>
+                  <a:srgbClr val="E8EAF2"/>
+                </a:solidFill>
+                <a:latin typeface="Segoe UI"/>
+              </a:rPr>
+              <a:t>•  Target: the </a:t>
+            </a:r>
+            <a:r>
+              <a:rPr sz="1400" b="1">
+                <a:solidFill>
+                  <a:srgbClr val="E8EAF2"/>
+                </a:solidFill>
+                <a:latin typeface="Segoe UI"/>
+              </a:rPr>
+              <a:t>whole tumour</a:t>
+            </a:r>
+            <a:r>
+              <a:rPr sz="1400" b="0">
+                <a:solidFill>
+                  <a:srgbClr val="E8EAF2"/>
+                </a:solidFill>
+                <a:latin typeface="Segoe UI"/>
+              </a:rPr>
+              <a:t> (all four parts). Our models see T1C, T2 and FLAIR as one colour picture.</a:t>
             </a:r>
           </a:p>
           <a:p>
             <a:pPr algn="l">
               <a:spcAft>
-                <a:spcPts val="800"/>
-              </a:spcAft>
-            </a:pPr>
-            <a:r>
-              <a:rPr sz="1600" b="0">
-                <a:solidFill>
-                  <a:srgbClr val="E8EAF2"/>
-                </a:solidFill>
-                <a:latin typeface="Segoe UI"/>
-              </a:rPr>
-              <a:t>•  Experts label 4 parts: </a:t>
-            </a:r>
-            <a:r>
-              <a:rPr sz="1600" b="1">
-                <a:solidFill>
-                  <a:srgbClr val="E8EAF2"/>
-                </a:solidFill>
-                <a:latin typeface="Segoe UI"/>
-              </a:rPr>
-              <a:t>NETC</a:t>
-            </a:r>
-            <a:r>
-              <a:rPr sz="1600" b="0">
-                <a:solidFill>
-                  <a:srgbClr val="E8EAF2"/>
-                </a:solidFill>
-                <a:latin typeface="Segoe UI"/>
-              </a:rPr>
-              <a:t> dead core, </a:t>
-            </a:r>
-            <a:r>
-              <a:rPr sz="1600" b="1">
-                <a:solidFill>
-                  <a:srgbClr val="E8EAF2"/>
-                </a:solidFill>
-                <a:latin typeface="Segoe UI"/>
-              </a:rPr>
-              <a:t>SNFH</a:t>
-            </a:r>
-            <a:r>
-              <a:rPr sz="1600" b="0">
-                <a:solidFill>
-                  <a:srgbClr val="E8EAF2"/>
-                </a:solidFill>
-                <a:latin typeface="Segoe UI"/>
-              </a:rPr>
-              <a:t> swelling, </a:t>
-            </a:r>
-            <a:r>
-              <a:rPr sz="1600" b="1">
-                <a:solidFill>
-                  <a:srgbClr val="E8EAF2"/>
-                </a:solidFill>
-                <a:latin typeface="Segoe UI"/>
-              </a:rPr>
-              <a:t>ET</a:t>
-            </a:r>
-            <a:r>
-              <a:rPr sz="1600" b="0">
-                <a:solidFill>
-                  <a:srgbClr val="E8EAF2"/>
-                </a:solidFill>
-                <a:latin typeface="Segoe UI"/>
-              </a:rPr>
-              <a:t> enhancing tumour, </a:t>
-            </a:r>
-            <a:r>
-              <a:rPr sz="1600" b="1">
-                <a:solidFill>
-                  <a:srgbClr val="E8EAF2"/>
-                </a:solidFill>
-                <a:latin typeface="Segoe UI"/>
-              </a:rPr>
-              <a:t>RC</a:t>
-            </a:r>
-            <a:r>
-              <a:rPr sz="1600" b="0">
-                <a:solidFill>
-                  <a:srgbClr val="E8EAF2"/>
-                </a:solidFill>
-                <a:latin typeface="Segoe UI"/>
-              </a:rPr>
-              <a:t> surgery cavity.</a:t>
-            </a:r>
-          </a:p>
-          <a:p>
-            <a:pPr algn="l">
-              <a:spcAft>
-                <a:spcPts val="800"/>
-              </a:spcAft>
-            </a:pPr>
-            <a:r>
-              <a:rPr sz="1600" b="0">
-                <a:solidFill>
-                  <a:srgbClr val="E8EAF2"/>
-                </a:solidFill>
-                <a:latin typeface="Segoe UI"/>
-              </a:rPr>
-              <a:t>•  Our target: the </a:t>
-            </a:r>
-            <a:r>
-              <a:rPr sz="1600" b="1">
-                <a:solidFill>
-                  <a:srgbClr val="E8EAF2"/>
-                </a:solidFill>
-                <a:latin typeface="Segoe UI"/>
-              </a:rPr>
-              <a:t>whole tumour</a:t>
-            </a:r>
-            <a:r>
-              <a:rPr sz="1600" b="0">
-                <a:solidFill>
-                  <a:srgbClr val="E8EAF2"/>
-                </a:solidFill>
-                <a:latin typeface="Segoe UI"/>
-              </a:rPr>
-              <a:t> = all labelled parts together.</a:t>
-            </a:r>
-          </a:p>
-        </p:txBody>
-      </p:sp>
-      <p:sp>
-        <p:nvSpPr>
-          <p:cNvPr id="14" name="Rectangle 13"/>
+                <a:spcPts val="300"/>
+              </a:spcAft>
+            </a:pPr>
+            <a:r>
+              <a:rPr sz="1400" b="0">
+                <a:solidFill>
+                  <a:srgbClr val="E8EAF2"/>
+                </a:solidFill>
+                <a:latin typeface="Segoe UI"/>
+              </a:rPr>
+              <a:t>•  Score: </a:t>
+            </a:r>
+            <a:r>
+              <a:rPr sz="1400" b="1">
+                <a:solidFill>
+                  <a:srgbClr val="E8EAF2"/>
+                </a:solidFill>
+                <a:latin typeface="Segoe UI"/>
+              </a:rPr>
+              <a:t>3D Dice</a:t>
+            </a:r>
+            <a:r>
+              <a:rPr sz="1400" b="0">
+                <a:solidFill>
+                  <a:srgbClr val="E8EAF2"/>
+                </a:solidFill>
+                <a:latin typeface="Segoe UI"/>
+              </a:rPr>
+              <a:t> = 2 × overlap ÷ (model + expert), from 0 to 1, per patient.</a:t>
+            </a:r>
+          </a:p>
+        </p:txBody>
+      </p:sp>
+      <p:sp>
+        <p:nvSpPr>
+          <p:cNvPr id="21" name="Rounded Rectangle 20"/>
           <p:cNvSpPr/>
           <p:nvPr/>
         </p:nvSpPr>
         <p:spPr>
           <a:xfrm>
-            <a:off x="8229600" y="1463040"/>
-            <a:ext cx="3383280" cy="4114800"/>
-          </a:xfrm>
-          <a:prstGeom prst="rect">
-            <a:avLst/>
+            <a:off x="548640" y="5806440"/>
+            <a:ext cx="11064240" cy="566928"/>
+          </a:xfrm>
+          <a:prstGeom prst="roundRect">
+            <a:avLst>
+              <a:gd name="adj" fmla="val 15000"/>
+            </a:avLst>
           </a:prstGeom>
           <a:solidFill>
             <a:srgbClr val="1A1F33"/>
@@ -9180,156 +9395,7 @@
       </p:sp>
       <p:sp>
         <p:nvSpPr>
-          <p:cNvPr id="15" name="TextBox 14"/>
-          <p:cNvSpPr txBox="1"/>
-          <p:nvPr/>
-        </p:nvSpPr>
-        <p:spPr>
-          <a:xfrm>
-            <a:off x="8412480" y="1600200"/>
-            <a:ext cx="3108960" cy="3931920"/>
-          </a:xfrm>
-          <a:prstGeom prst="rect">
-            <a:avLst/>
-          </a:prstGeom>
-          <a:noFill/>
-        </p:spPr>
-        <p:txBody>
-          <a:bodyPr wrap="square" anchor="t" lIns="45720" rIns="45720">
-            <a:spAutoFit/>
-          </a:bodyPr>
-          <a:lstStyle/>
-          <a:p>
-            <a:pPr algn="l">
-              <a:spcAft>
-                <a:spcPts val="1000"/>
-              </a:spcAft>
-            </a:pPr>
-            <a:r>
-              <a:rPr sz="1500" b="1">
-                <a:solidFill>
-                  <a:srgbClr val="E8EAF2"/>
-                </a:solidFill>
-                <a:latin typeface="Segoe UI"/>
-              </a:rPr>
-              <a:t>How we score: 3D Dice</a:t>
-            </a:r>
-          </a:p>
-          <a:p>
-            <a:pPr algn="l">
-              <a:spcAft>
-                <a:spcPts val="1000"/>
-              </a:spcAft>
-            </a:pPr>
-            <a:r>
-              <a:rPr sz="1500" b="0">
-                <a:solidFill>
-                  <a:srgbClr val="E8EAF2"/>
-                </a:solidFill>
-                <a:latin typeface="Segoe UI"/>
-              </a:rPr>
-              <a:t>Dice = 2 × overlap ÷ (model + expert)</a:t>
-            </a:r>
-          </a:p>
-          <a:p>
-            <a:pPr algn="l">
-              <a:spcAft>
-                <a:spcPts val="1000"/>
-              </a:spcAft>
-            </a:pPr>
-            <a:r>
-              <a:rPr sz="1500" b="0">
-                <a:solidFill>
-                  <a:srgbClr val="E8EAF2"/>
-                </a:solidFill>
-                <a:latin typeface="Segoe UI"/>
-              </a:rPr>
-              <a:t>0 = no overlap, 1 = perfect</a:t>
-            </a:r>
-          </a:p>
-          <a:p>
-            <a:pPr algn="l">
-              <a:spcAft>
-                <a:spcPts val="1000"/>
-              </a:spcAft>
-            </a:pPr>
-            <a:r>
-              <a:rPr sz="1500" b="0">
-                <a:solidFill>
-                  <a:srgbClr val="E8EAF2"/>
-                </a:solidFill>
-                <a:latin typeface="Segoe UI"/>
-              </a:rPr>
-              <a:t>Computed per patient over the whole 3D volume, then averaged.</a:t>
-            </a:r>
-          </a:p>
-          <a:p>
-            <a:pPr algn="l">
-              <a:spcAft>
-                <a:spcPts val="1000"/>
-              </a:spcAft>
-            </a:pPr>
-            <a:r>
-              <a:rPr sz="1500" b="0">
-                <a:solidFill>
-                  <a:srgbClr val="E8EAF2"/>
-                </a:solidFill>
-                <a:latin typeface="Segoe UI"/>
-              </a:rPr>
-              <a:t>Each sequence shows the tumour differently, so we feed three of them (T1C, T2, FLAIR) as one colour picture.</a:t>
-            </a:r>
-          </a:p>
-        </p:txBody>
-      </p:sp>
-      <p:sp>
-        <p:nvSpPr>
-          <p:cNvPr id="16" name="Rounded Rectangle 15"/>
-          <p:cNvSpPr/>
-          <p:nvPr/>
-        </p:nvSpPr>
-        <p:spPr>
-          <a:xfrm>
-            <a:off x="548640" y="5806440"/>
-            <a:ext cx="11064240" cy="566928"/>
-          </a:xfrm>
-          <a:prstGeom prst="roundRect">
-            <a:avLst>
-              <a:gd name="adj" fmla="val 15000"/>
-            </a:avLst>
-          </a:prstGeom>
-          <a:solidFill>
-            <a:srgbClr val="1A1F33"/>
-          </a:solidFill>
-          <a:ln>
-            <a:noFill/>
-          </a:ln>
-          <a:effectLst/>
-        </p:spPr>
-        <p:style>
-          <a:lnRef idx="1">
-            <a:schemeClr val="accent1"/>
-          </a:lnRef>
-          <a:fillRef idx="3">
-            <a:schemeClr val="accent1"/>
-          </a:fillRef>
-          <a:effectRef idx="2">
-            <a:schemeClr val="accent1"/>
-          </a:effectRef>
-          <a:fontRef idx="minor">
-            <a:schemeClr val="lt1"/>
-          </a:fontRef>
-        </p:style>
-        <p:txBody>
-          <a:bodyPr rtlCol="0" anchor="ctr"/>
-          <a:lstStyle/>
-          <a:p>
-            <a:pPr algn="ctr"/>
-          </a:p>
-        </p:txBody>
-      </p:sp>
-      <p:sp>
-        <p:nvSpPr>
-          <p:cNvPr id="17" name="TextBox 16"/>
+          <p:cNvPr id="22" name="TextBox 21"/>
           <p:cNvSpPr txBox="1"/>
           <p:nvPr/>
         </p:nvSpPr>
@@ -9370,7 +9436,7 @@
                 </a:solidFill>
                 <a:latin typeface="Segoe UI"/>
               </a:rPr>
-              <a:t> Different MRI sequences show different tumour parts; we score the whole-tumour outline with 3D Dice.</a:t>
+              <a:t> No single sequence shows the whole tumour, so the models look at several sequences together.</a:t>
             </a:r>
           </a:p>
         </p:txBody>

--- a/Presentation/BrainTumour_YOLO_MedSAM2.pptx
+++ b/Presentation/BrainTumour_YOLO_MedSAM2.pptx
@@ -22,6 +22,7 @@
     <p:sldId id="281" r:id="rId12"/>
     <p:sldId id="267" r:id="rId13"/>
     <p:sldId id="268" r:id="rId14"/>
+    <p:sldId id="284" r:id="rId26"/>
     <p:sldId id="270" r:id="rId15"/>
     <p:sldId id="282" r:id="rId24"/>
     <p:sldId id="277" r:id="rId16"/>
@@ -2180,6 +2181,72 @@
 </p:notes>
 </file>
 
+<file path=ppt/notesSlides/notesSlide17.xml><?xml version="1.0" encoding="utf-8"?>
+<p:notes xmlns:a="http://schemas.openxmlformats.org/drawingml/2006/main" xmlns:p="http://schemas.openxmlformats.org/presentationml/2006/main" xmlns:r="http://schemas.openxmlformats.org/officeDocument/2006/relationships">
+  <p:cSld>
+    <p:spTree>
+      <p:nvGrpSpPr>
+        <p:cNvPr id="1" name=""/>
+        <p:cNvGrpSpPr/>
+        <p:nvPr/>
+      </p:nvGrpSpPr>
+      <p:grpSpPr>
+        <a:xfrm>
+          <a:off x="0" y="0"/>
+          <a:ext cx="0" cy="0"/>
+          <a:chOff x="0" y="0"/>
+          <a:chExt cx="0" cy="0"/>
+        </a:xfrm>
+      </p:grpSpPr>
+      <p:sp>
+        <p:nvSpPr>
+          <p:cNvPr id="3" name="Notes Placeholder 2"/>
+          <p:cNvSpPr>
+            <a:spLocks noGrp="1"/>
+          </p:cNvSpPr>
+          <p:nvPr>
+            <p:ph type="body" sz="quarter" idx="3"/>
+          </p:nvPr>
+        </p:nvSpPr>
+        <p:spPr/>
+        <p:txBody>
+          <a:bodyPr/>
+          <a:lstStyle/>
+          <a:p>
+            <a:r>
+              <a:t>ניסוי "מה אם": מה קורה אם פרוסת ההתחלה מושלמת?</a:t>
+            </a:r>
+          </a:p>
+          <a:p>
+            <a:r>
+              <a:t>לקחנו את אותו MedSAM2 מאומן, בלי אימון מחדש, ושינינו דבר אחד בלבד: בפרוסת ההתחלה, שממנה המודל מתחיל לעקוב למעלה ולמטה, נתנו לו את סימון המומחה במקום הרמז של YOLO. כל שאר הפרוסות קיבלו את הרמז של YOLO כרגיל.</a:t>
+            </a:r>
+          </a:p>
+          <a:p>
+            <a:r>
+              <a:t>על 245 מטופלי הוולידציה ה-3D Dice עלה מ-0.8928 ל-0.8975, כלומר 0.0047+. 173 מטופלים השתפרו ורק אחד הורע.</a:t>
+            </a:r>
+          </a:p>
+          <a:p>
+            <a:r>
+              <a:t>זה פי 4 מהרעיון הטוב ביותר שבדקנו לשימוש בביטחון של YOLO. חלק מהשיפור הוא הפרוסה עצמה, והשאר הוא הזיכרון שמעביר את ההתחלה הנכונה לפרוסות השכנות.</a:t>
+            </a:r>
+          </a:p>
+          <a:p>
+            <a:r>
+              <a:t>חשוב: זה ניסוי בלבד. בזמן חיזוי אמיתי אין לנו את סימון המומחה. המסר הוא שהתחלה טובה שווה הרבה.</a:t>
+            </a:r>
+          </a:p>
+        </p:txBody>
+      </p:sp>
+    </p:spTree>
+  </p:cSld>
+  <p:clrMapOvr>
+    <a:masterClrMapping/>
+  </p:clrMapOvr>
+</p:notes>
+</file>
+
 <file path=ppt/notesSlides/notesSlide2.xml><?xml version="1.0" encoding="utf-8"?>
 <p:notes xmlns:a="http://schemas.openxmlformats.org/drawingml/2006/main" xmlns:r="http://schemas.openxmlformats.org/officeDocument/2006/relationships" xmlns:p="http://schemas.openxmlformats.org/presentationml/2006/main">
   <p:cSld>
@@ -13536,7 +13603,7 @@
                 </a:solidFill>
                 <a:latin typeface="Segoe UI"/>
               </a:rPr>
-              <a:t>15</a:t>
+              <a:t>16</a:t>
             </a:r>
             <a:endParaRPr sz="1100" b="0" dirty="0">
               <a:solidFill>
@@ -14253,7 +14320,7 @@
                 </a:solidFill>
                 <a:latin typeface="Segoe UI"/>
               </a:rPr>
-              <a:t>16</a:t>
+              <a:t>17</a:t>
             </a:r>
             <a:endParaRPr sz="1100" b="0" dirty="0">
               <a:solidFill>
@@ -15042,6 +15109,1981 @@
           </a:ln>
         </p:spPr>
       </p:pic>
+    </p:spTree>
+  </p:cSld>
+  <p:clrMapOvr>
+    <a:masterClrMapping/>
+  </p:clrMapOvr>
+</p:sld>
+</file>
+
+<file path=ppt/slides/slide18.xml><?xml version="1.0" encoding="utf-8"?>
+<p:sld xmlns:a="http://schemas.openxmlformats.org/drawingml/2006/main" xmlns:p="http://schemas.openxmlformats.org/presentationml/2006/main" xmlns:r="http://schemas.openxmlformats.org/officeDocument/2006/relationships">
+  <p:cSld>
+    <p:spTree>
+      <p:nvGrpSpPr>
+        <p:cNvPr id="1" name=""/>
+        <p:cNvGrpSpPr/>
+        <p:nvPr/>
+      </p:nvGrpSpPr>
+      <p:grpSpPr/>
+      <p:sp>
+        <p:nvSpPr>
+          <p:cNvPr id="2" name="TextBox 1"/>
+          <p:cNvSpPr txBox="1"/>
+          <p:nvPr/>
+        </p:nvSpPr>
+        <p:spPr>
+          <a:xfrm>
+            <a:off x="548640" y="256032"/>
+            <a:ext cx="8229600" cy="274320"/>
+          </a:xfrm>
+          <a:prstGeom prst="rect">
+            <a:avLst/>
+          </a:prstGeom>
+          <a:noFill/>
+        </p:spPr>
+        <p:txBody>
+          <a:bodyPr wrap="square" anchor="t" lIns="45720" rIns="45720">
+            <a:spAutoFit/>
+          </a:bodyPr>
+          <a:lstStyle/>
+          <a:p>
+            <a:pPr algn="l">
+              <a:spcAft>
+                <a:spcPts val="600"/>
+              </a:spcAft>
+            </a:pPr>
+            <a:r>
+              <a:rPr sz="1200" b="0">
+                <a:solidFill>
+                  <a:srgbClr val="FFFFFF"/>
+                </a:solidFill>
+                <a:latin typeface="Segoe UI"/>
+              </a:rPr>
+              <a:t>EXPERIMENTS · WHAT-IF TEST (VAL, 245 PATIENTS)</a:t>
+            </a:r>
+          </a:p>
+        </p:txBody>
+      </p:sp>
+      <p:sp>
+        <p:nvSpPr>
+          <p:cNvPr id="3" name="TextBox 2"/>
+          <p:cNvSpPr txBox="1"/>
+          <p:nvPr/>
+        </p:nvSpPr>
+        <p:spPr>
+          <a:xfrm>
+            <a:off x="548640" y="475488"/>
+            <a:ext cx="11064240" cy="585216"/>
+          </a:xfrm>
+          <a:prstGeom prst="rect">
+            <a:avLst/>
+          </a:prstGeom>
+          <a:noFill/>
+        </p:spPr>
+        <p:txBody>
+          <a:bodyPr wrap="square" anchor="t" lIns="45720" rIns="45720">
+            <a:spAutoFit/>
+          </a:bodyPr>
+          <a:lstStyle/>
+          <a:p>
+            <a:pPr algn="l">
+              <a:spcAft>
+                <a:spcPts val="0"/>
+              </a:spcAft>
+            </a:pPr>
+            <a:r>
+              <a:rPr sz="3200" b="0">
+                <a:solidFill>
+                  <a:srgbClr val="FFFFFF"/>
+                </a:solidFill>
+                <a:latin typeface="Segoe UI"/>
+              </a:rPr>
+              <a:t>What if the start slice were perfect?</a:t>
+            </a:r>
+          </a:p>
+        </p:txBody>
+      </p:sp>
+      <p:sp>
+        <p:nvSpPr>
+          <p:cNvPr id="4" name="TextBox 3"/>
+          <p:cNvSpPr txBox="1"/>
+          <p:nvPr/>
+        </p:nvSpPr>
+        <p:spPr>
+          <a:xfrm>
+            <a:off x="10972800" y="6446520"/>
+            <a:ext cx="914400" cy="265176"/>
+          </a:xfrm>
+          <a:prstGeom prst="rect">
+            <a:avLst/>
+          </a:prstGeom>
+          <a:noFill/>
+        </p:spPr>
+        <p:txBody>
+          <a:bodyPr wrap="square" anchor="t" lIns="45720" rIns="45720">
+            <a:spAutoFit/>
+          </a:bodyPr>
+          <a:lstStyle/>
+          <a:p>
+            <a:pPr algn="r">
+              <a:spcAft>
+                <a:spcPts val="600"/>
+              </a:spcAft>
+            </a:pPr>
+            <a:r>
+              <a:rPr sz="1100" b="0">
+                <a:solidFill>
+                  <a:srgbClr val="FFFFFF"/>
+                </a:solidFill>
+                <a:latin typeface="Segoe UI"/>
+              </a:rPr>
+              <a:t>15</a:t>
+            </a:r>
+          </a:p>
+        </p:txBody>
+      </p:sp>
+      <p:sp>
+        <p:nvSpPr>
+          <p:cNvPr id="5" name="Rounded Rectangle 4"/>
+          <p:cNvSpPr/>
+          <p:nvPr/>
+        </p:nvSpPr>
+        <p:spPr>
+          <a:xfrm>
+            <a:off x="548640" y="1325880"/>
+            <a:ext cx="11064240" cy="566928"/>
+          </a:xfrm>
+          <a:prstGeom prst="roundRect">
+            <a:avLst>
+              <a:gd name="adj" fmla="val 15000"/>
+            </a:avLst>
+          </a:prstGeom>
+          <a:solidFill>
+            <a:srgbClr val="1A1F33"/>
+          </a:solidFill>
+          <a:ln>
+            <a:noFill/>
+          </a:ln>
+          <a:effectLst/>
+        </p:spPr>
+        <p:style>
+          <a:lnRef idx="1">
+            <a:schemeClr val="accent1"/>
+          </a:lnRef>
+          <a:fillRef idx="3">
+            <a:schemeClr val="accent1"/>
+          </a:fillRef>
+          <a:effectRef idx="2">
+            <a:schemeClr val="accent1"/>
+          </a:effectRef>
+          <a:fontRef idx="minor">
+            <a:schemeClr val="lt1"/>
+          </a:fontRef>
+        </p:style>
+        <p:txBody>
+          <a:bodyPr rtlCol="0" anchor="ctr"/>
+          <a:lstStyle/>
+          <a:p>
+            <a:pPr algn="ctr"/>
+          </a:p>
+        </p:txBody>
+      </p:sp>
+      <p:sp>
+        <p:nvSpPr>
+          <p:cNvPr id="6" name="TextBox 5"/>
+          <p:cNvSpPr txBox="1"/>
+          <p:nvPr/>
+        </p:nvSpPr>
+        <p:spPr>
+          <a:xfrm>
+            <a:off x="777240" y="1325880"/>
+            <a:ext cx="10744200" cy="566928"/>
+          </a:xfrm>
+          <a:prstGeom prst="rect">
+            <a:avLst/>
+          </a:prstGeom>
+          <a:noFill/>
+        </p:spPr>
+        <p:txBody>
+          <a:bodyPr wrap="square" anchor="ctr" lIns="45720" rIns="45720">
+            <a:spAutoFit/>
+          </a:bodyPr>
+          <a:lstStyle/>
+          <a:p>
+            <a:pPr algn="l">
+              <a:spcAft>
+                <a:spcPts val="0"/>
+              </a:spcAft>
+            </a:pPr>
+            <a:r>
+              <a:rPr sz="1600" b="1">
+                <a:solidFill>
+                  <a:srgbClr val="E8EAF2"/>
+                </a:solidFill>
+                <a:latin typeface="Segoe UI"/>
+              </a:rPr>
+              <a:t>The test:</a:t>
+            </a:r>
+            <a:r>
+              <a:rPr sz="1600" b="0">
+                <a:solidFill>
+                  <a:srgbClr val="E8EAF2"/>
+                </a:solidFill>
+                <a:latin typeface="Segoe UI"/>
+              </a:rPr>
+              <a:t> same trained MedSAM2, no retraining. Start slice gets the expert mask; all other slices keep YOLO's hint.</a:t>
+            </a:r>
+          </a:p>
+        </p:txBody>
+      </p:sp>
+      <p:sp>
+        <p:nvSpPr>
+          <p:cNvPr id="7" name="Rectangle 6"/>
+          <p:cNvSpPr/>
+          <p:nvPr/>
+        </p:nvSpPr>
+        <p:spPr>
+          <a:xfrm>
+            <a:off x="548640" y="2103120"/>
+            <a:ext cx="6035040" cy="3520440"/>
+          </a:xfrm>
+          <a:prstGeom prst="rect">
+            <a:avLst/>
+          </a:prstGeom>
+          <a:solidFill>
+            <a:srgbClr val="1A1F33"/>
+          </a:solidFill>
+          <a:ln>
+            <a:noFill/>
+          </a:ln>
+          <a:effectLst/>
+        </p:spPr>
+        <p:style>
+          <a:lnRef idx="1">
+            <a:schemeClr val="accent1"/>
+          </a:lnRef>
+          <a:fillRef idx="3">
+            <a:schemeClr val="accent1"/>
+          </a:fillRef>
+          <a:effectRef idx="2">
+            <a:schemeClr val="accent1"/>
+          </a:effectRef>
+          <a:fontRef idx="minor">
+            <a:schemeClr val="lt1"/>
+          </a:fontRef>
+        </p:style>
+        <p:txBody>
+          <a:bodyPr rtlCol="0" anchor="ctr"/>
+          <a:lstStyle/>
+          <a:p>
+            <a:pPr algn="ctr"/>
+          </a:p>
+        </p:txBody>
+      </p:sp>
+      <p:sp>
+        <p:nvSpPr>
+          <p:cNvPr id="8" name="TextBox 7"/>
+          <p:cNvSpPr txBox="1"/>
+          <p:nvPr/>
+        </p:nvSpPr>
+        <p:spPr>
+          <a:xfrm>
+            <a:off x="731520" y="2212848"/>
+            <a:ext cx="5669280" cy="411480"/>
+          </a:xfrm>
+          <a:prstGeom prst="rect">
+            <a:avLst/>
+          </a:prstGeom>
+          <a:noFill/>
+        </p:spPr>
+        <p:txBody>
+          <a:bodyPr wrap="square" anchor="t" lIns="45720" rIns="45720">
+            <a:spAutoFit/>
+          </a:bodyPr>
+          <a:lstStyle/>
+          <a:p>
+            <a:pPr algn="l">
+              <a:spcAft>
+                <a:spcPts val="0"/>
+              </a:spcAft>
+            </a:pPr>
+            <a:r>
+              <a:rPr sz="1900" b="1">
+                <a:solidFill>
+                  <a:srgbClr val="E06A2E"/>
+                </a:solidFill>
+                <a:latin typeface="Segoe UI"/>
+              </a:rPr>
+              <a:t>How it runs</a:t>
+            </a:r>
+          </a:p>
+        </p:txBody>
+      </p:sp>
+      <p:sp>
+        <p:nvSpPr>
+          <p:cNvPr id="9" name="Rounded Rectangle 8"/>
+          <p:cNvSpPr/>
+          <p:nvPr/>
+        </p:nvSpPr>
+        <p:spPr>
+          <a:xfrm>
+            <a:off x="864107" y="2788920"/>
+            <a:ext cx="502920" cy="1051560"/>
+          </a:xfrm>
+          <a:prstGeom prst="roundRect">
+            <a:avLst>
+              <a:gd name="adj" fmla="val 12000"/>
+            </a:avLst>
+          </a:prstGeom>
+          <a:solidFill>
+            <a:srgbClr val="3987E5"/>
+          </a:solidFill>
+          <a:ln>
+            <a:noFill/>
+          </a:ln>
+          <a:effectLst/>
+        </p:spPr>
+        <p:style>
+          <a:lnRef idx="1">
+            <a:schemeClr val="accent1"/>
+          </a:lnRef>
+          <a:fillRef idx="3">
+            <a:schemeClr val="accent1"/>
+          </a:fillRef>
+          <a:effectRef idx="2">
+            <a:schemeClr val="accent1"/>
+          </a:effectRef>
+          <a:fontRef idx="minor">
+            <a:schemeClr val="lt1"/>
+          </a:fontRef>
+        </p:style>
+        <p:txBody>
+          <a:bodyPr rtlCol="0" anchor="ctr"/>
+          <a:lstStyle/>
+          <a:p>
+            <a:pPr algn="ctr"/>
+          </a:p>
+        </p:txBody>
+      </p:sp>
+      <p:sp>
+        <p:nvSpPr>
+          <p:cNvPr id="10" name="TextBox 9"/>
+          <p:cNvSpPr txBox="1"/>
+          <p:nvPr/>
+        </p:nvSpPr>
+        <p:spPr>
+          <a:xfrm>
+            <a:off x="864107" y="2788920"/>
+            <a:ext cx="502920" cy="1051560"/>
+          </a:xfrm>
+          <a:prstGeom prst="rect">
+            <a:avLst/>
+          </a:prstGeom>
+          <a:noFill/>
+        </p:spPr>
+        <p:txBody>
+          <a:bodyPr wrap="square" anchor="ctr" lIns="45720" rIns="45720">
+            <a:spAutoFit/>
+          </a:bodyPr>
+          <a:lstStyle/>
+          <a:p>
+            <a:pPr algn="ctr">
+              <a:spcAft>
+                <a:spcPts val="0"/>
+              </a:spcAft>
+            </a:pPr>
+            <a:r>
+              <a:rPr sz="1000" b="0">
+                <a:solidFill>
+                  <a:srgbClr val="FFFFFF"/>
+                </a:solidFill>
+                <a:latin typeface="Segoe UI"/>
+              </a:rPr>
+              <a:t>YOLO</a:t>
+            </a:r>
+          </a:p>
+        </p:txBody>
+      </p:sp>
+      <p:sp>
+        <p:nvSpPr>
+          <p:cNvPr id="11" name="Rounded Rectangle 10"/>
+          <p:cNvSpPr/>
+          <p:nvPr/>
+        </p:nvSpPr>
+        <p:spPr>
+          <a:xfrm>
+            <a:off x="1476755" y="2788920"/>
+            <a:ext cx="502920" cy="1051560"/>
+          </a:xfrm>
+          <a:prstGeom prst="roundRect">
+            <a:avLst>
+              <a:gd name="adj" fmla="val 12000"/>
+            </a:avLst>
+          </a:prstGeom>
+          <a:solidFill>
+            <a:srgbClr val="3987E5"/>
+          </a:solidFill>
+          <a:ln>
+            <a:noFill/>
+          </a:ln>
+          <a:effectLst/>
+        </p:spPr>
+        <p:style>
+          <a:lnRef idx="1">
+            <a:schemeClr val="accent1"/>
+          </a:lnRef>
+          <a:fillRef idx="3">
+            <a:schemeClr val="accent1"/>
+          </a:fillRef>
+          <a:effectRef idx="2">
+            <a:schemeClr val="accent1"/>
+          </a:effectRef>
+          <a:fontRef idx="minor">
+            <a:schemeClr val="lt1"/>
+          </a:fontRef>
+        </p:style>
+        <p:txBody>
+          <a:bodyPr rtlCol="0" anchor="ctr"/>
+          <a:lstStyle/>
+          <a:p>
+            <a:pPr algn="ctr"/>
+          </a:p>
+        </p:txBody>
+      </p:sp>
+      <p:sp>
+        <p:nvSpPr>
+          <p:cNvPr id="12" name="TextBox 11"/>
+          <p:cNvSpPr txBox="1"/>
+          <p:nvPr/>
+        </p:nvSpPr>
+        <p:spPr>
+          <a:xfrm>
+            <a:off x="1476755" y="2788920"/>
+            <a:ext cx="502920" cy="1051560"/>
+          </a:xfrm>
+          <a:prstGeom prst="rect">
+            <a:avLst/>
+          </a:prstGeom>
+          <a:noFill/>
+        </p:spPr>
+        <p:txBody>
+          <a:bodyPr wrap="square" anchor="ctr" lIns="45720" rIns="45720">
+            <a:spAutoFit/>
+          </a:bodyPr>
+          <a:lstStyle/>
+          <a:p>
+            <a:pPr algn="ctr">
+              <a:spcAft>
+                <a:spcPts val="0"/>
+              </a:spcAft>
+            </a:pPr>
+            <a:r>
+              <a:rPr sz="1000" b="0">
+                <a:solidFill>
+                  <a:srgbClr val="FFFFFF"/>
+                </a:solidFill>
+                <a:latin typeface="Segoe UI"/>
+              </a:rPr>
+              <a:t>YOLO</a:t>
+            </a:r>
+          </a:p>
+        </p:txBody>
+      </p:sp>
+      <p:sp>
+        <p:nvSpPr>
+          <p:cNvPr id="13" name="Rounded Rectangle 12"/>
+          <p:cNvSpPr/>
+          <p:nvPr/>
+        </p:nvSpPr>
+        <p:spPr>
+          <a:xfrm>
+            <a:off x="2089403" y="2788920"/>
+            <a:ext cx="502920" cy="1051560"/>
+          </a:xfrm>
+          <a:prstGeom prst="roundRect">
+            <a:avLst>
+              <a:gd name="adj" fmla="val 12000"/>
+            </a:avLst>
+          </a:prstGeom>
+          <a:solidFill>
+            <a:srgbClr val="3987E5"/>
+          </a:solidFill>
+          <a:ln>
+            <a:noFill/>
+          </a:ln>
+          <a:effectLst/>
+        </p:spPr>
+        <p:style>
+          <a:lnRef idx="1">
+            <a:schemeClr val="accent1"/>
+          </a:lnRef>
+          <a:fillRef idx="3">
+            <a:schemeClr val="accent1"/>
+          </a:fillRef>
+          <a:effectRef idx="2">
+            <a:schemeClr val="accent1"/>
+          </a:effectRef>
+          <a:fontRef idx="minor">
+            <a:schemeClr val="lt1"/>
+          </a:fontRef>
+        </p:style>
+        <p:txBody>
+          <a:bodyPr rtlCol="0" anchor="ctr"/>
+          <a:lstStyle/>
+          <a:p>
+            <a:pPr algn="ctr"/>
+          </a:p>
+        </p:txBody>
+      </p:sp>
+      <p:sp>
+        <p:nvSpPr>
+          <p:cNvPr id="14" name="TextBox 13"/>
+          <p:cNvSpPr txBox="1"/>
+          <p:nvPr/>
+        </p:nvSpPr>
+        <p:spPr>
+          <a:xfrm>
+            <a:off x="2089403" y="2788920"/>
+            <a:ext cx="502920" cy="1051560"/>
+          </a:xfrm>
+          <a:prstGeom prst="rect">
+            <a:avLst/>
+          </a:prstGeom>
+          <a:noFill/>
+        </p:spPr>
+        <p:txBody>
+          <a:bodyPr wrap="square" anchor="ctr" lIns="45720" rIns="45720">
+            <a:spAutoFit/>
+          </a:bodyPr>
+          <a:lstStyle/>
+          <a:p>
+            <a:pPr algn="ctr">
+              <a:spcAft>
+                <a:spcPts val="0"/>
+              </a:spcAft>
+            </a:pPr>
+            <a:r>
+              <a:rPr sz="1000" b="0">
+                <a:solidFill>
+                  <a:srgbClr val="FFFFFF"/>
+                </a:solidFill>
+                <a:latin typeface="Segoe UI"/>
+              </a:rPr>
+              <a:t>YOLO</a:t>
+            </a:r>
+          </a:p>
+        </p:txBody>
+      </p:sp>
+      <p:sp>
+        <p:nvSpPr>
+          <p:cNvPr id="15" name="Rounded Rectangle 14"/>
+          <p:cNvSpPr/>
+          <p:nvPr/>
+        </p:nvSpPr>
+        <p:spPr>
+          <a:xfrm>
+            <a:off x="2702052" y="2788920"/>
+            <a:ext cx="502920" cy="1051560"/>
+          </a:xfrm>
+          <a:prstGeom prst="roundRect">
+            <a:avLst>
+              <a:gd name="adj" fmla="val 12000"/>
+            </a:avLst>
+          </a:prstGeom>
+          <a:solidFill>
+            <a:srgbClr val="3987E5"/>
+          </a:solidFill>
+          <a:ln>
+            <a:noFill/>
+          </a:ln>
+          <a:effectLst/>
+        </p:spPr>
+        <p:style>
+          <a:lnRef idx="1">
+            <a:schemeClr val="accent1"/>
+          </a:lnRef>
+          <a:fillRef idx="3">
+            <a:schemeClr val="accent1"/>
+          </a:fillRef>
+          <a:effectRef idx="2">
+            <a:schemeClr val="accent1"/>
+          </a:effectRef>
+          <a:fontRef idx="minor">
+            <a:schemeClr val="lt1"/>
+          </a:fontRef>
+        </p:style>
+        <p:txBody>
+          <a:bodyPr rtlCol="0" anchor="ctr"/>
+          <a:lstStyle/>
+          <a:p>
+            <a:pPr algn="ctr"/>
+          </a:p>
+        </p:txBody>
+      </p:sp>
+      <p:sp>
+        <p:nvSpPr>
+          <p:cNvPr id="16" name="TextBox 15"/>
+          <p:cNvSpPr txBox="1"/>
+          <p:nvPr/>
+        </p:nvSpPr>
+        <p:spPr>
+          <a:xfrm>
+            <a:off x="2702052" y="2788920"/>
+            <a:ext cx="502920" cy="1051560"/>
+          </a:xfrm>
+          <a:prstGeom prst="rect">
+            <a:avLst/>
+          </a:prstGeom>
+          <a:noFill/>
+        </p:spPr>
+        <p:txBody>
+          <a:bodyPr wrap="square" anchor="ctr" lIns="45720" rIns="45720">
+            <a:spAutoFit/>
+          </a:bodyPr>
+          <a:lstStyle/>
+          <a:p>
+            <a:pPr algn="ctr">
+              <a:spcAft>
+                <a:spcPts val="0"/>
+              </a:spcAft>
+            </a:pPr>
+            <a:r>
+              <a:rPr sz="1000" b="0">
+                <a:solidFill>
+                  <a:srgbClr val="FFFFFF"/>
+                </a:solidFill>
+                <a:latin typeface="Segoe UI"/>
+              </a:rPr>
+              <a:t>YOLO</a:t>
+            </a:r>
+          </a:p>
+        </p:txBody>
+      </p:sp>
+      <p:sp>
+        <p:nvSpPr>
+          <p:cNvPr id="17" name="Rounded Rectangle 16"/>
+          <p:cNvSpPr/>
+          <p:nvPr/>
+        </p:nvSpPr>
+        <p:spPr>
+          <a:xfrm>
+            <a:off x="3314700" y="2788920"/>
+            <a:ext cx="502920" cy="1051560"/>
+          </a:xfrm>
+          <a:prstGeom prst="roundRect">
+            <a:avLst>
+              <a:gd name="adj" fmla="val 12000"/>
+            </a:avLst>
+          </a:prstGeom>
+          <a:solidFill>
+            <a:srgbClr val="2FB35C"/>
+          </a:solidFill>
+          <a:ln>
+            <a:noFill/>
+          </a:ln>
+          <a:effectLst/>
+        </p:spPr>
+        <p:style>
+          <a:lnRef idx="1">
+            <a:schemeClr val="accent1"/>
+          </a:lnRef>
+          <a:fillRef idx="3">
+            <a:schemeClr val="accent1"/>
+          </a:fillRef>
+          <a:effectRef idx="2">
+            <a:schemeClr val="accent1"/>
+          </a:effectRef>
+          <a:fontRef idx="minor">
+            <a:schemeClr val="lt1"/>
+          </a:fontRef>
+        </p:style>
+        <p:txBody>
+          <a:bodyPr rtlCol="0" anchor="ctr"/>
+          <a:lstStyle/>
+          <a:p>
+            <a:pPr algn="ctr"/>
+          </a:p>
+        </p:txBody>
+      </p:sp>
+      <p:sp>
+        <p:nvSpPr>
+          <p:cNvPr id="18" name="TextBox 17"/>
+          <p:cNvSpPr txBox="1"/>
+          <p:nvPr/>
+        </p:nvSpPr>
+        <p:spPr>
+          <a:xfrm>
+            <a:off x="3314700" y="2788920"/>
+            <a:ext cx="502920" cy="1051560"/>
+          </a:xfrm>
+          <a:prstGeom prst="rect">
+            <a:avLst/>
+          </a:prstGeom>
+          <a:noFill/>
+        </p:spPr>
+        <p:txBody>
+          <a:bodyPr wrap="square" anchor="ctr" lIns="45720" rIns="45720">
+            <a:spAutoFit/>
+          </a:bodyPr>
+          <a:lstStyle/>
+          <a:p>
+            <a:pPr algn="ctr">
+              <a:spcAft>
+                <a:spcPts val="0"/>
+              </a:spcAft>
+            </a:pPr>
+            <a:r>
+              <a:rPr sz="1000" b="1">
+                <a:solidFill>
+                  <a:srgbClr val="FFFFFF"/>
+                </a:solidFill>
+                <a:latin typeface="Segoe UI"/>
+              </a:rPr>
+              <a:t>Expert</a:t>
+            </a:r>
+          </a:p>
+        </p:txBody>
+      </p:sp>
+      <p:sp>
+        <p:nvSpPr>
+          <p:cNvPr id="19" name="Rounded Rectangle 18"/>
+          <p:cNvSpPr/>
+          <p:nvPr/>
+        </p:nvSpPr>
+        <p:spPr>
+          <a:xfrm>
+            <a:off x="3927348" y="2788920"/>
+            <a:ext cx="502920" cy="1051560"/>
+          </a:xfrm>
+          <a:prstGeom prst="roundRect">
+            <a:avLst>
+              <a:gd name="adj" fmla="val 12000"/>
+            </a:avLst>
+          </a:prstGeom>
+          <a:solidFill>
+            <a:srgbClr val="3987E5"/>
+          </a:solidFill>
+          <a:ln>
+            <a:noFill/>
+          </a:ln>
+          <a:effectLst/>
+        </p:spPr>
+        <p:style>
+          <a:lnRef idx="1">
+            <a:schemeClr val="accent1"/>
+          </a:lnRef>
+          <a:fillRef idx="3">
+            <a:schemeClr val="accent1"/>
+          </a:fillRef>
+          <a:effectRef idx="2">
+            <a:schemeClr val="accent1"/>
+          </a:effectRef>
+          <a:fontRef idx="minor">
+            <a:schemeClr val="lt1"/>
+          </a:fontRef>
+        </p:style>
+        <p:txBody>
+          <a:bodyPr rtlCol="0" anchor="ctr"/>
+          <a:lstStyle/>
+          <a:p>
+            <a:pPr algn="ctr"/>
+          </a:p>
+        </p:txBody>
+      </p:sp>
+      <p:sp>
+        <p:nvSpPr>
+          <p:cNvPr id="20" name="TextBox 19"/>
+          <p:cNvSpPr txBox="1"/>
+          <p:nvPr/>
+        </p:nvSpPr>
+        <p:spPr>
+          <a:xfrm>
+            <a:off x="3927348" y="2788920"/>
+            <a:ext cx="502920" cy="1051560"/>
+          </a:xfrm>
+          <a:prstGeom prst="rect">
+            <a:avLst/>
+          </a:prstGeom>
+          <a:noFill/>
+        </p:spPr>
+        <p:txBody>
+          <a:bodyPr wrap="square" anchor="ctr" lIns="45720" rIns="45720">
+            <a:spAutoFit/>
+          </a:bodyPr>
+          <a:lstStyle/>
+          <a:p>
+            <a:pPr algn="ctr">
+              <a:spcAft>
+                <a:spcPts val="0"/>
+              </a:spcAft>
+            </a:pPr>
+            <a:r>
+              <a:rPr sz="1000" b="0">
+                <a:solidFill>
+                  <a:srgbClr val="FFFFFF"/>
+                </a:solidFill>
+                <a:latin typeface="Segoe UI"/>
+              </a:rPr>
+              <a:t>YOLO</a:t>
+            </a:r>
+          </a:p>
+        </p:txBody>
+      </p:sp>
+      <p:sp>
+        <p:nvSpPr>
+          <p:cNvPr id="21" name="Rounded Rectangle 20"/>
+          <p:cNvSpPr/>
+          <p:nvPr/>
+        </p:nvSpPr>
+        <p:spPr>
+          <a:xfrm>
+            <a:off x="4539996" y="2788920"/>
+            <a:ext cx="502920" cy="1051560"/>
+          </a:xfrm>
+          <a:prstGeom prst="roundRect">
+            <a:avLst>
+              <a:gd name="adj" fmla="val 12000"/>
+            </a:avLst>
+          </a:prstGeom>
+          <a:solidFill>
+            <a:srgbClr val="3987E5"/>
+          </a:solidFill>
+          <a:ln>
+            <a:noFill/>
+          </a:ln>
+          <a:effectLst/>
+        </p:spPr>
+        <p:style>
+          <a:lnRef idx="1">
+            <a:schemeClr val="accent1"/>
+          </a:lnRef>
+          <a:fillRef idx="3">
+            <a:schemeClr val="accent1"/>
+          </a:fillRef>
+          <a:effectRef idx="2">
+            <a:schemeClr val="accent1"/>
+          </a:effectRef>
+          <a:fontRef idx="minor">
+            <a:schemeClr val="lt1"/>
+          </a:fontRef>
+        </p:style>
+        <p:txBody>
+          <a:bodyPr rtlCol="0" anchor="ctr"/>
+          <a:lstStyle/>
+          <a:p>
+            <a:pPr algn="ctr"/>
+          </a:p>
+        </p:txBody>
+      </p:sp>
+      <p:sp>
+        <p:nvSpPr>
+          <p:cNvPr id="22" name="TextBox 21"/>
+          <p:cNvSpPr txBox="1"/>
+          <p:nvPr/>
+        </p:nvSpPr>
+        <p:spPr>
+          <a:xfrm>
+            <a:off x="4539996" y="2788920"/>
+            <a:ext cx="502920" cy="1051560"/>
+          </a:xfrm>
+          <a:prstGeom prst="rect">
+            <a:avLst/>
+          </a:prstGeom>
+          <a:noFill/>
+        </p:spPr>
+        <p:txBody>
+          <a:bodyPr wrap="square" anchor="ctr" lIns="45720" rIns="45720">
+            <a:spAutoFit/>
+          </a:bodyPr>
+          <a:lstStyle/>
+          <a:p>
+            <a:pPr algn="ctr">
+              <a:spcAft>
+                <a:spcPts val="0"/>
+              </a:spcAft>
+            </a:pPr>
+            <a:r>
+              <a:rPr sz="1000" b="0">
+                <a:solidFill>
+                  <a:srgbClr val="FFFFFF"/>
+                </a:solidFill>
+                <a:latin typeface="Segoe UI"/>
+              </a:rPr>
+              <a:t>YOLO</a:t>
+            </a:r>
+          </a:p>
+        </p:txBody>
+      </p:sp>
+      <p:sp>
+        <p:nvSpPr>
+          <p:cNvPr id="23" name="Rounded Rectangle 22"/>
+          <p:cNvSpPr/>
+          <p:nvPr/>
+        </p:nvSpPr>
+        <p:spPr>
+          <a:xfrm>
+            <a:off x="5152644" y="2788920"/>
+            <a:ext cx="502920" cy="1051560"/>
+          </a:xfrm>
+          <a:prstGeom prst="roundRect">
+            <a:avLst>
+              <a:gd name="adj" fmla="val 12000"/>
+            </a:avLst>
+          </a:prstGeom>
+          <a:solidFill>
+            <a:srgbClr val="3987E5"/>
+          </a:solidFill>
+          <a:ln>
+            <a:noFill/>
+          </a:ln>
+          <a:effectLst/>
+        </p:spPr>
+        <p:style>
+          <a:lnRef idx="1">
+            <a:schemeClr val="accent1"/>
+          </a:lnRef>
+          <a:fillRef idx="3">
+            <a:schemeClr val="accent1"/>
+          </a:fillRef>
+          <a:effectRef idx="2">
+            <a:schemeClr val="accent1"/>
+          </a:effectRef>
+          <a:fontRef idx="minor">
+            <a:schemeClr val="lt1"/>
+          </a:fontRef>
+        </p:style>
+        <p:txBody>
+          <a:bodyPr rtlCol="0" anchor="ctr"/>
+          <a:lstStyle/>
+          <a:p>
+            <a:pPr algn="ctr"/>
+          </a:p>
+        </p:txBody>
+      </p:sp>
+      <p:sp>
+        <p:nvSpPr>
+          <p:cNvPr id="24" name="TextBox 23"/>
+          <p:cNvSpPr txBox="1"/>
+          <p:nvPr/>
+        </p:nvSpPr>
+        <p:spPr>
+          <a:xfrm>
+            <a:off x="5152644" y="2788920"/>
+            <a:ext cx="502920" cy="1051560"/>
+          </a:xfrm>
+          <a:prstGeom prst="rect">
+            <a:avLst/>
+          </a:prstGeom>
+          <a:noFill/>
+        </p:spPr>
+        <p:txBody>
+          <a:bodyPr wrap="square" anchor="ctr" lIns="45720" rIns="45720">
+            <a:spAutoFit/>
+          </a:bodyPr>
+          <a:lstStyle/>
+          <a:p>
+            <a:pPr algn="ctr">
+              <a:spcAft>
+                <a:spcPts val="0"/>
+              </a:spcAft>
+            </a:pPr>
+            <a:r>
+              <a:rPr sz="1000" b="0">
+                <a:solidFill>
+                  <a:srgbClr val="FFFFFF"/>
+                </a:solidFill>
+                <a:latin typeface="Segoe UI"/>
+              </a:rPr>
+              <a:t>YOLO</a:t>
+            </a:r>
+          </a:p>
+        </p:txBody>
+      </p:sp>
+      <p:sp>
+        <p:nvSpPr>
+          <p:cNvPr id="25" name="Rounded Rectangle 24"/>
+          <p:cNvSpPr/>
+          <p:nvPr/>
+        </p:nvSpPr>
+        <p:spPr>
+          <a:xfrm>
+            <a:off x="5765292" y="2788920"/>
+            <a:ext cx="502920" cy="1051560"/>
+          </a:xfrm>
+          <a:prstGeom prst="roundRect">
+            <a:avLst>
+              <a:gd name="adj" fmla="val 12000"/>
+            </a:avLst>
+          </a:prstGeom>
+          <a:solidFill>
+            <a:srgbClr val="3987E5"/>
+          </a:solidFill>
+          <a:ln>
+            <a:noFill/>
+          </a:ln>
+          <a:effectLst/>
+        </p:spPr>
+        <p:style>
+          <a:lnRef idx="1">
+            <a:schemeClr val="accent1"/>
+          </a:lnRef>
+          <a:fillRef idx="3">
+            <a:schemeClr val="accent1"/>
+          </a:fillRef>
+          <a:effectRef idx="2">
+            <a:schemeClr val="accent1"/>
+          </a:effectRef>
+          <a:fontRef idx="minor">
+            <a:schemeClr val="lt1"/>
+          </a:fontRef>
+        </p:style>
+        <p:txBody>
+          <a:bodyPr rtlCol="0" anchor="ctr"/>
+          <a:lstStyle/>
+          <a:p>
+            <a:pPr algn="ctr"/>
+          </a:p>
+        </p:txBody>
+      </p:sp>
+      <p:sp>
+        <p:nvSpPr>
+          <p:cNvPr id="26" name="TextBox 25"/>
+          <p:cNvSpPr txBox="1"/>
+          <p:nvPr/>
+        </p:nvSpPr>
+        <p:spPr>
+          <a:xfrm>
+            <a:off x="5765292" y="2788920"/>
+            <a:ext cx="502920" cy="1051560"/>
+          </a:xfrm>
+          <a:prstGeom prst="rect">
+            <a:avLst/>
+          </a:prstGeom>
+          <a:noFill/>
+        </p:spPr>
+        <p:txBody>
+          <a:bodyPr wrap="square" anchor="ctr" lIns="45720" rIns="45720">
+            <a:spAutoFit/>
+          </a:bodyPr>
+          <a:lstStyle/>
+          <a:p>
+            <a:pPr algn="ctr">
+              <a:spcAft>
+                <a:spcPts val="0"/>
+              </a:spcAft>
+            </a:pPr>
+            <a:r>
+              <a:rPr sz="1000" b="0">
+                <a:solidFill>
+                  <a:srgbClr val="FFFFFF"/>
+                </a:solidFill>
+                <a:latin typeface="Segoe UI"/>
+              </a:rPr>
+              <a:t>YOLO</a:t>
+            </a:r>
+          </a:p>
+        </p:txBody>
+      </p:sp>
+      <p:sp>
+        <p:nvSpPr>
+          <p:cNvPr id="27" name="TextBox 26"/>
+          <p:cNvSpPr txBox="1"/>
+          <p:nvPr/>
+        </p:nvSpPr>
+        <p:spPr>
+          <a:xfrm>
+            <a:off x="864107" y="3913631"/>
+            <a:ext cx="2377440" cy="320040"/>
+          </a:xfrm>
+          <a:prstGeom prst="rect">
+            <a:avLst/>
+          </a:prstGeom>
+          <a:noFill/>
+        </p:spPr>
+        <p:txBody>
+          <a:bodyPr wrap="square" anchor="t" lIns="45720" rIns="45720">
+            <a:spAutoFit/>
+          </a:bodyPr>
+          <a:lstStyle/>
+          <a:p>
+            <a:pPr algn="l">
+              <a:spcAft>
+                <a:spcPts val="0"/>
+              </a:spcAft>
+            </a:pPr>
+            <a:r>
+              <a:rPr sz="1300" b="0">
+                <a:solidFill>
+                  <a:srgbClr val="FFFFFF"/>
+                </a:solidFill>
+                <a:latin typeface="Segoe UI"/>
+              </a:rPr>
+              <a:t>◀  memory carries it up</a:t>
+            </a:r>
+          </a:p>
+        </p:txBody>
+      </p:sp>
+      <p:sp>
+        <p:nvSpPr>
+          <p:cNvPr id="28" name="TextBox 27"/>
+          <p:cNvSpPr txBox="1"/>
+          <p:nvPr/>
+        </p:nvSpPr>
+        <p:spPr>
+          <a:xfrm>
+            <a:off x="3890771" y="3913631"/>
+            <a:ext cx="2377440" cy="320040"/>
+          </a:xfrm>
+          <a:prstGeom prst="rect">
+            <a:avLst/>
+          </a:prstGeom>
+          <a:noFill/>
+        </p:spPr>
+        <p:txBody>
+          <a:bodyPr wrap="square" anchor="t" lIns="45720" rIns="45720">
+            <a:spAutoFit/>
+          </a:bodyPr>
+          <a:lstStyle/>
+          <a:p>
+            <a:pPr algn="r">
+              <a:spcAft>
+                <a:spcPts val="0"/>
+              </a:spcAft>
+            </a:pPr>
+            <a:r>
+              <a:rPr sz="1300" b="0">
+                <a:solidFill>
+                  <a:srgbClr val="FFFFFF"/>
+                </a:solidFill>
+                <a:latin typeface="Segoe UI"/>
+              </a:rPr>
+              <a:t>and down  ▶</a:t>
+            </a:r>
+          </a:p>
+        </p:txBody>
+      </p:sp>
+      <p:sp>
+        <p:nvSpPr>
+          <p:cNvPr id="29" name="Rectangle 28"/>
+          <p:cNvSpPr/>
+          <p:nvPr/>
+        </p:nvSpPr>
+        <p:spPr>
+          <a:xfrm>
+            <a:off x="777240" y="4434840"/>
+            <a:ext cx="182880" cy="182880"/>
+          </a:xfrm>
+          <a:prstGeom prst="rect">
+            <a:avLst/>
+          </a:prstGeom>
+          <a:solidFill>
+            <a:srgbClr val="2FB35C"/>
+          </a:solidFill>
+          <a:ln>
+            <a:noFill/>
+          </a:ln>
+          <a:effectLst/>
+        </p:spPr>
+        <p:style>
+          <a:lnRef idx="1">
+            <a:schemeClr val="accent1"/>
+          </a:lnRef>
+          <a:fillRef idx="3">
+            <a:schemeClr val="accent1"/>
+          </a:fillRef>
+          <a:effectRef idx="2">
+            <a:schemeClr val="accent1"/>
+          </a:effectRef>
+          <a:fontRef idx="minor">
+            <a:schemeClr val="lt1"/>
+          </a:fontRef>
+        </p:style>
+        <p:txBody>
+          <a:bodyPr rtlCol="0" anchor="ctr"/>
+          <a:lstStyle/>
+          <a:p>
+            <a:pPr algn="ctr"/>
+          </a:p>
+        </p:txBody>
+      </p:sp>
+      <p:sp>
+        <p:nvSpPr>
+          <p:cNvPr id="30" name="TextBox 29"/>
+          <p:cNvSpPr txBox="1"/>
+          <p:nvPr/>
+        </p:nvSpPr>
+        <p:spPr>
+          <a:xfrm>
+            <a:off x="1051560" y="4370832"/>
+            <a:ext cx="5303520" cy="320040"/>
+          </a:xfrm>
+          <a:prstGeom prst="rect">
+            <a:avLst/>
+          </a:prstGeom>
+          <a:noFill/>
+        </p:spPr>
+        <p:txBody>
+          <a:bodyPr wrap="square" anchor="t" lIns="45720" rIns="45720">
+            <a:spAutoFit/>
+          </a:bodyPr>
+          <a:lstStyle/>
+          <a:p>
+            <a:pPr algn="l">
+              <a:spcAft>
+                <a:spcPts val="0"/>
+              </a:spcAft>
+            </a:pPr>
+            <a:r>
+              <a:rPr sz="1300" b="0">
+                <a:solidFill>
+                  <a:srgbClr val="E8EAF2"/>
+                </a:solidFill>
+                <a:latin typeface="Segoe UI"/>
+              </a:rPr>
+              <a:t>Start slice: </a:t>
+            </a:r>
+            <a:r>
+              <a:rPr sz="1300" b="1">
+                <a:solidFill>
+                  <a:srgbClr val="E8EAF2"/>
+                </a:solidFill>
+                <a:latin typeface="Segoe UI"/>
+              </a:rPr>
+              <a:t>the expert mask</a:t>
+            </a:r>
+            <a:r>
+              <a:rPr sz="1300" b="0">
+                <a:solidFill>
+                  <a:srgbClr val="E8EAF2"/>
+                </a:solidFill>
+                <a:latin typeface="Segoe UI"/>
+              </a:rPr>
+              <a:t> (fully sure)</a:t>
+            </a:r>
+          </a:p>
+        </p:txBody>
+      </p:sp>
+      <p:sp>
+        <p:nvSpPr>
+          <p:cNvPr id="31" name="Rectangle 30"/>
+          <p:cNvSpPr/>
+          <p:nvPr/>
+        </p:nvSpPr>
+        <p:spPr>
+          <a:xfrm>
+            <a:off x="777240" y="4800600"/>
+            <a:ext cx="182880" cy="182880"/>
+          </a:xfrm>
+          <a:prstGeom prst="rect">
+            <a:avLst/>
+          </a:prstGeom>
+          <a:solidFill>
+            <a:srgbClr val="3987E5"/>
+          </a:solidFill>
+          <a:ln>
+            <a:noFill/>
+          </a:ln>
+          <a:effectLst/>
+        </p:spPr>
+        <p:style>
+          <a:lnRef idx="1">
+            <a:schemeClr val="accent1"/>
+          </a:lnRef>
+          <a:fillRef idx="3">
+            <a:schemeClr val="accent1"/>
+          </a:fillRef>
+          <a:effectRef idx="2">
+            <a:schemeClr val="accent1"/>
+          </a:effectRef>
+          <a:fontRef idx="minor">
+            <a:schemeClr val="lt1"/>
+          </a:fontRef>
+        </p:style>
+        <p:txBody>
+          <a:bodyPr rtlCol="0" anchor="ctr"/>
+          <a:lstStyle/>
+          <a:p>
+            <a:pPr algn="ctr"/>
+          </a:p>
+        </p:txBody>
+      </p:sp>
+      <p:sp>
+        <p:nvSpPr>
+          <p:cNvPr id="32" name="TextBox 31"/>
+          <p:cNvSpPr txBox="1"/>
+          <p:nvPr/>
+        </p:nvSpPr>
+        <p:spPr>
+          <a:xfrm>
+            <a:off x="1051560" y="4736592"/>
+            <a:ext cx="5303520" cy="320040"/>
+          </a:xfrm>
+          <a:prstGeom prst="rect">
+            <a:avLst/>
+          </a:prstGeom>
+          <a:noFill/>
+        </p:spPr>
+        <p:txBody>
+          <a:bodyPr wrap="square" anchor="t" lIns="45720" rIns="45720">
+            <a:spAutoFit/>
+          </a:bodyPr>
+          <a:lstStyle/>
+          <a:p>
+            <a:pPr algn="l">
+              <a:spcAft>
+                <a:spcPts val="0"/>
+              </a:spcAft>
+            </a:pPr>
+            <a:r>
+              <a:rPr sz="1300" b="0">
+                <a:solidFill>
+                  <a:srgbClr val="E8EAF2"/>
+                </a:solidFill>
+                <a:latin typeface="Segoe UI"/>
+              </a:rPr>
+              <a:t>All other slices: </a:t>
+            </a:r>
+            <a:r>
+              <a:rPr sz="1300" b="1">
+                <a:solidFill>
+                  <a:srgbClr val="E8EAF2"/>
+                </a:solidFill>
+                <a:latin typeface="Segoe UI"/>
+              </a:rPr>
+              <a:t>YOLO's hint</a:t>
+            </a:r>
+            <a:r>
+              <a:rPr sz="1300" b="0">
+                <a:solidFill>
+                  <a:srgbClr val="E8EAF2"/>
+                </a:solidFill>
+                <a:latin typeface="Segoe UI"/>
+              </a:rPr>
+              <a:t>, as usual</a:t>
+            </a:r>
+          </a:p>
+        </p:txBody>
+      </p:sp>
+      <p:sp>
+        <p:nvSpPr>
+          <p:cNvPr id="33" name="TextBox 32"/>
+          <p:cNvSpPr txBox="1"/>
+          <p:nvPr/>
+        </p:nvSpPr>
+        <p:spPr>
+          <a:xfrm>
+            <a:off x="731520" y="5166360"/>
+            <a:ext cx="5669280" cy="320040"/>
+          </a:xfrm>
+          <a:prstGeom prst="rect">
+            <a:avLst/>
+          </a:prstGeom>
+          <a:noFill/>
+        </p:spPr>
+        <p:txBody>
+          <a:bodyPr wrap="square" anchor="t" lIns="45720" rIns="45720">
+            <a:spAutoFit/>
+          </a:bodyPr>
+          <a:lstStyle/>
+          <a:p>
+            <a:pPr algn="l">
+              <a:spcAft>
+                <a:spcPts val="0"/>
+              </a:spcAft>
+            </a:pPr>
+            <a:r>
+              <a:rPr sz="1200" b="0">
+                <a:solidFill>
+                  <a:srgbClr val="B8BED3"/>
+                </a:solidFill>
+                <a:latin typeface="Segoe UI"/>
+              </a:rPr>
+              <a:t>A what-if only: the expert mask is never available when predicting.</a:t>
+            </a:r>
+          </a:p>
+        </p:txBody>
+      </p:sp>
+      <p:sp>
+        <p:nvSpPr>
+          <p:cNvPr id="34" name="Rectangle 33"/>
+          <p:cNvSpPr/>
+          <p:nvPr/>
+        </p:nvSpPr>
+        <p:spPr>
+          <a:xfrm>
+            <a:off x="6766560" y="2103120"/>
+            <a:ext cx="4846320" cy="3520440"/>
+          </a:xfrm>
+          <a:prstGeom prst="rect">
+            <a:avLst/>
+          </a:prstGeom>
+          <a:solidFill>
+            <a:srgbClr val="1A1F33"/>
+          </a:solidFill>
+          <a:ln>
+            <a:noFill/>
+          </a:ln>
+          <a:effectLst/>
+        </p:spPr>
+        <p:style>
+          <a:lnRef idx="1">
+            <a:schemeClr val="accent1"/>
+          </a:lnRef>
+          <a:fillRef idx="3">
+            <a:schemeClr val="accent1"/>
+          </a:fillRef>
+          <a:effectRef idx="2">
+            <a:schemeClr val="accent1"/>
+          </a:effectRef>
+          <a:fontRef idx="minor">
+            <a:schemeClr val="lt1"/>
+          </a:fontRef>
+        </p:style>
+        <p:txBody>
+          <a:bodyPr rtlCol="0" anchor="ctr"/>
+          <a:lstStyle/>
+          <a:p>
+            <a:pPr algn="ctr"/>
+          </a:p>
+        </p:txBody>
+      </p:sp>
+      <p:sp>
+        <p:nvSpPr>
+          <p:cNvPr id="35" name="TextBox 34"/>
+          <p:cNvSpPr txBox="1"/>
+          <p:nvPr/>
+        </p:nvSpPr>
+        <p:spPr>
+          <a:xfrm>
+            <a:off x="6903720" y="2212848"/>
+            <a:ext cx="2240280" cy="685800"/>
+          </a:xfrm>
+          <a:prstGeom prst="rect">
+            <a:avLst/>
+          </a:prstGeom>
+          <a:noFill/>
+        </p:spPr>
+        <p:txBody>
+          <a:bodyPr wrap="square" anchor="t" lIns="45720" rIns="45720">
+            <a:spAutoFit/>
+          </a:bodyPr>
+          <a:lstStyle/>
+          <a:p>
+            <a:pPr algn="ctr">
+              <a:spcAft>
+                <a:spcPts val="0"/>
+              </a:spcAft>
+            </a:pPr>
+            <a:r>
+              <a:rPr sz="3600" b="1">
+                <a:solidFill>
+                  <a:srgbClr val="2FB35C"/>
+                </a:solidFill>
+                <a:latin typeface="Segoe UI"/>
+              </a:rPr>
+              <a:t>+0.0047</a:t>
+            </a:r>
+          </a:p>
+        </p:txBody>
+      </p:sp>
+      <p:sp>
+        <p:nvSpPr>
+          <p:cNvPr id="36" name="TextBox 35"/>
+          <p:cNvSpPr txBox="1"/>
+          <p:nvPr/>
+        </p:nvSpPr>
+        <p:spPr>
+          <a:xfrm>
+            <a:off x="6903720" y="2898648"/>
+            <a:ext cx="2240280" cy="548640"/>
+          </a:xfrm>
+          <a:prstGeom prst="rect">
+            <a:avLst/>
+          </a:prstGeom>
+          <a:noFill/>
+        </p:spPr>
+        <p:txBody>
+          <a:bodyPr wrap="square" anchor="t" lIns="45720" rIns="45720">
+            <a:spAutoFit/>
+          </a:bodyPr>
+          <a:lstStyle/>
+          <a:p>
+            <a:pPr algn="ctr">
+              <a:spcAft>
+                <a:spcPts val="0"/>
+              </a:spcAft>
+            </a:pPr>
+            <a:r>
+              <a:rPr sz="1200" b="0">
+                <a:solidFill>
+                  <a:srgbClr val="B8BED3"/>
+                </a:solidFill>
+                <a:latin typeface="Segoe UI"/>
+              </a:rPr>
+              <a:t>val 3D Dice
+0.8928 → 0.8975</a:t>
+            </a:r>
+          </a:p>
+        </p:txBody>
+      </p:sp>
+      <p:sp>
+        <p:nvSpPr>
+          <p:cNvPr id="37" name="TextBox 36"/>
+          <p:cNvSpPr txBox="1"/>
+          <p:nvPr/>
+        </p:nvSpPr>
+        <p:spPr>
+          <a:xfrm>
+            <a:off x="9235440" y="2212848"/>
+            <a:ext cx="2240280" cy="685800"/>
+          </a:xfrm>
+          <a:prstGeom prst="rect">
+            <a:avLst/>
+          </a:prstGeom>
+          <a:noFill/>
+        </p:spPr>
+        <p:txBody>
+          <a:bodyPr wrap="square" anchor="t" lIns="45720" rIns="45720">
+            <a:spAutoFit/>
+          </a:bodyPr>
+          <a:lstStyle/>
+          <a:p>
+            <a:pPr algn="ctr">
+              <a:spcAft>
+                <a:spcPts val="0"/>
+              </a:spcAft>
+            </a:pPr>
+            <a:r>
+              <a:rPr sz="3600" b="1">
+                <a:solidFill>
+                  <a:srgbClr val="3987E5"/>
+                </a:solidFill>
+                <a:latin typeface="Segoe UI"/>
+              </a:rPr>
+              <a:t>173 / 1</a:t>
+            </a:r>
+          </a:p>
+        </p:txBody>
+      </p:sp>
+      <p:sp>
+        <p:nvSpPr>
+          <p:cNvPr id="38" name="TextBox 37"/>
+          <p:cNvSpPr txBox="1"/>
+          <p:nvPr/>
+        </p:nvSpPr>
+        <p:spPr>
+          <a:xfrm>
+            <a:off x="9235440" y="2898648"/>
+            <a:ext cx="2240280" cy="548640"/>
+          </a:xfrm>
+          <a:prstGeom prst="rect">
+            <a:avLst/>
+          </a:prstGeom>
+          <a:noFill/>
+        </p:spPr>
+        <p:txBody>
+          <a:bodyPr wrap="square" anchor="t" lIns="45720" rIns="45720">
+            <a:spAutoFit/>
+          </a:bodyPr>
+          <a:lstStyle/>
+          <a:p>
+            <a:pPr algn="ctr">
+              <a:spcAft>
+                <a:spcPts val="0"/>
+              </a:spcAft>
+            </a:pPr>
+            <a:r>
+              <a:rPr sz="1200" b="0">
+                <a:solidFill>
+                  <a:srgbClr val="B8BED3"/>
+                </a:solidFill>
+                <a:latin typeface="Segoe UI"/>
+              </a:rPr>
+              <a:t>patients
+better / worse</a:t>
+            </a:r>
+          </a:p>
+        </p:txBody>
+      </p:sp>
+      <p:sp>
+        <p:nvSpPr>
+          <p:cNvPr id="39" name="TextBox 38"/>
+          <p:cNvSpPr txBox="1"/>
+          <p:nvPr/>
+        </p:nvSpPr>
+        <p:spPr>
+          <a:xfrm>
+            <a:off x="6949440" y="3639312"/>
+            <a:ext cx="4480560" cy="320040"/>
+          </a:xfrm>
+          <a:prstGeom prst="rect">
+            <a:avLst/>
+          </a:prstGeom>
+          <a:noFill/>
+        </p:spPr>
+        <p:txBody>
+          <a:bodyPr wrap="square" anchor="t" lIns="45720" rIns="45720">
+            <a:spAutoFit/>
+          </a:bodyPr>
+          <a:lstStyle/>
+          <a:p>
+            <a:pPr algn="l">
+              <a:spcAft>
+                <a:spcPts val="0"/>
+              </a:spcAft>
+            </a:pPr>
+            <a:r>
+              <a:rPr sz="1300" b="1">
+                <a:solidFill>
+                  <a:srgbClr val="E8EAF2"/>
+                </a:solidFill>
+                <a:latin typeface="Segoe UI"/>
+              </a:rPr>
+              <a:t>Gain over today's pipeline (val)</a:t>
+            </a:r>
+          </a:p>
+        </p:txBody>
+      </p:sp>
+      <p:sp>
+        <p:nvSpPr>
+          <p:cNvPr id="40" name="TextBox 39"/>
+          <p:cNvSpPr txBox="1"/>
+          <p:nvPr/>
+        </p:nvSpPr>
+        <p:spPr>
+          <a:xfrm>
+            <a:off x="6949440" y="4023360"/>
+            <a:ext cx="4480560" cy="274320"/>
+          </a:xfrm>
+          <a:prstGeom prst="rect">
+            <a:avLst/>
+          </a:prstGeom>
+          <a:noFill/>
+        </p:spPr>
+        <p:txBody>
+          <a:bodyPr wrap="square" anchor="t" lIns="45720" rIns="45720">
+            <a:spAutoFit/>
+          </a:bodyPr>
+          <a:lstStyle/>
+          <a:p>
+            <a:pPr algn="l">
+              <a:spcAft>
+                <a:spcPts val="0"/>
+              </a:spcAft>
+            </a:pPr>
+            <a:r>
+              <a:rPr sz="1200" b="0">
+                <a:solidFill>
+                  <a:srgbClr val="B8BED3"/>
+                </a:solidFill>
+                <a:latin typeface="Segoe UI"/>
+              </a:rPr>
+              <a:t>Best confidence idea (blob → 'don't know')</a:t>
+            </a:r>
+          </a:p>
+        </p:txBody>
+      </p:sp>
+      <p:sp>
+        <p:nvSpPr>
+          <p:cNvPr id="41" name="Rectangle 40"/>
+          <p:cNvSpPr/>
+          <p:nvPr/>
+        </p:nvSpPr>
+        <p:spPr>
+          <a:xfrm>
+            <a:off x="6995160" y="4315968"/>
+            <a:ext cx="768096" cy="256032"/>
+          </a:xfrm>
+          <a:prstGeom prst="rect">
+            <a:avLst/>
+          </a:prstGeom>
+          <a:solidFill>
+            <a:srgbClr val="3987E5"/>
+          </a:solidFill>
+          <a:ln>
+            <a:noFill/>
+          </a:ln>
+          <a:effectLst/>
+        </p:spPr>
+        <p:style>
+          <a:lnRef idx="1">
+            <a:schemeClr val="accent1"/>
+          </a:lnRef>
+          <a:fillRef idx="3">
+            <a:schemeClr val="accent1"/>
+          </a:fillRef>
+          <a:effectRef idx="2">
+            <a:schemeClr val="accent1"/>
+          </a:effectRef>
+          <a:fontRef idx="minor">
+            <a:schemeClr val="lt1"/>
+          </a:fontRef>
+        </p:style>
+        <p:txBody>
+          <a:bodyPr rtlCol="0" anchor="ctr"/>
+          <a:lstStyle/>
+          <a:p>
+            <a:pPr algn="ctr"/>
+          </a:p>
+        </p:txBody>
+      </p:sp>
+      <p:sp>
+        <p:nvSpPr>
+          <p:cNvPr id="42" name="TextBox 41"/>
+          <p:cNvSpPr txBox="1"/>
+          <p:nvPr/>
+        </p:nvSpPr>
+        <p:spPr>
+          <a:xfrm>
+            <a:off x="7836408" y="4279392"/>
+            <a:ext cx="914400" cy="320040"/>
+          </a:xfrm>
+          <a:prstGeom prst="rect">
+            <a:avLst/>
+          </a:prstGeom>
+          <a:noFill/>
+        </p:spPr>
+        <p:txBody>
+          <a:bodyPr wrap="square" anchor="t" lIns="45720" rIns="45720">
+            <a:spAutoFit/>
+          </a:bodyPr>
+          <a:lstStyle/>
+          <a:p>
+            <a:pPr algn="l">
+              <a:spcAft>
+                <a:spcPts val="0"/>
+              </a:spcAft>
+            </a:pPr>
+            <a:r>
+              <a:rPr sz="1300" b="1">
+                <a:solidFill>
+                  <a:srgbClr val="E8EAF2"/>
+                </a:solidFill>
+                <a:latin typeface="Segoe UI"/>
+              </a:rPr>
+              <a:t>+0.0012</a:t>
+            </a:r>
+          </a:p>
+        </p:txBody>
+      </p:sp>
+      <p:sp>
+        <p:nvSpPr>
+          <p:cNvPr id="43" name="TextBox 42"/>
+          <p:cNvSpPr txBox="1"/>
+          <p:nvPr/>
+        </p:nvSpPr>
+        <p:spPr>
+          <a:xfrm>
+            <a:off x="6949440" y="4736592"/>
+            <a:ext cx="4480560" cy="274320"/>
+          </a:xfrm>
+          <a:prstGeom prst="rect">
+            <a:avLst/>
+          </a:prstGeom>
+          <a:noFill/>
+        </p:spPr>
+        <p:txBody>
+          <a:bodyPr wrap="square" anchor="t" lIns="45720" rIns="45720">
+            <a:spAutoFit/>
+          </a:bodyPr>
+          <a:lstStyle/>
+          <a:p>
+            <a:pPr algn="l">
+              <a:spcAft>
+                <a:spcPts val="0"/>
+              </a:spcAft>
+            </a:pPr>
+            <a:r>
+              <a:rPr sz="1200" b="0">
+                <a:solidFill>
+                  <a:srgbClr val="B8BED3"/>
+                </a:solidFill>
+                <a:latin typeface="Segoe UI"/>
+              </a:rPr>
+              <a:t>Expert mask on the start slice</a:t>
+            </a:r>
+          </a:p>
+        </p:txBody>
+      </p:sp>
+      <p:sp>
+        <p:nvSpPr>
+          <p:cNvPr id="44" name="Rectangle 43"/>
+          <p:cNvSpPr/>
+          <p:nvPr/>
+        </p:nvSpPr>
+        <p:spPr>
+          <a:xfrm>
+            <a:off x="6995160" y="5029200"/>
+            <a:ext cx="3008376" cy="256032"/>
+          </a:xfrm>
+          <a:prstGeom prst="rect">
+            <a:avLst/>
+          </a:prstGeom>
+          <a:solidFill>
+            <a:srgbClr val="2FB35C"/>
+          </a:solidFill>
+          <a:ln>
+            <a:noFill/>
+          </a:ln>
+          <a:effectLst/>
+        </p:spPr>
+        <p:style>
+          <a:lnRef idx="1">
+            <a:schemeClr val="accent1"/>
+          </a:lnRef>
+          <a:fillRef idx="3">
+            <a:schemeClr val="accent1"/>
+          </a:fillRef>
+          <a:effectRef idx="2">
+            <a:schemeClr val="accent1"/>
+          </a:effectRef>
+          <a:fontRef idx="minor">
+            <a:schemeClr val="lt1"/>
+          </a:fontRef>
+        </p:style>
+        <p:txBody>
+          <a:bodyPr rtlCol="0" anchor="ctr"/>
+          <a:lstStyle/>
+          <a:p>
+            <a:pPr algn="ctr"/>
+          </a:p>
+        </p:txBody>
+      </p:sp>
+      <p:sp>
+        <p:nvSpPr>
+          <p:cNvPr id="45" name="TextBox 44"/>
+          <p:cNvSpPr txBox="1"/>
+          <p:nvPr/>
+        </p:nvSpPr>
+        <p:spPr>
+          <a:xfrm>
+            <a:off x="10076688" y="4992624"/>
+            <a:ext cx="914400" cy="320040"/>
+          </a:xfrm>
+          <a:prstGeom prst="rect">
+            <a:avLst/>
+          </a:prstGeom>
+          <a:noFill/>
+        </p:spPr>
+        <p:txBody>
+          <a:bodyPr wrap="square" anchor="t" lIns="45720" rIns="45720">
+            <a:spAutoFit/>
+          </a:bodyPr>
+          <a:lstStyle/>
+          <a:p>
+            <a:pPr algn="l">
+              <a:spcAft>
+                <a:spcPts val="0"/>
+              </a:spcAft>
+            </a:pPr>
+            <a:r>
+              <a:rPr sz="1300" b="1">
+                <a:solidFill>
+                  <a:srgbClr val="E8EAF2"/>
+                </a:solidFill>
+                <a:latin typeface="Segoe UI"/>
+              </a:rPr>
+              <a:t>+0.0047</a:t>
+            </a:r>
+          </a:p>
+        </p:txBody>
+      </p:sp>
+      <p:sp>
+        <p:nvSpPr>
+          <p:cNvPr id="46" name="Rounded Rectangle 45"/>
+          <p:cNvSpPr/>
+          <p:nvPr/>
+        </p:nvSpPr>
+        <p:spPr>
+          <a:xfrm>
+            <a:off x="548640" y="5806440"/>
+            <a:ext cx="11064240" cy="566928"/>
+          </a:xfrm>
+          <a:prstGeom prst="roundRect">
+            <a:avLst>
+              <a:gd name="adj" fmla="val 15000"/>
+            </a:avLst>
+          </a:prstGeom>
+          <a:solidFill>
+            <a:srgbClr val="1A1F33"/>
+          </a:solidFill>
+          <a:ln>
+            <a:noFill/>
+          </a:ln>
+          <a:effectLst/>
+        </p:spPr>
+        <p:style>
+          <a:lnRef idx="1">
+            <a:schemeClr val="accent1"/>
+          </a:lnRef>
+          <a:fillRef idx="3">
+            <a:schemeClr val="accent1"/>
+          </a:fillRef>
+          <a:effectRef idx="2">
+            <a:schemeClr val="accent1"/>
+          </a:effectRef>
+          <a:fontRef idx="minor">
+            <a:schemeClr val="lt1"/>
+          </a:fontRef>
+        </p:style>
+        <p:txBody>
+          <a:bodyPr rtlCol="0" anchor="ctr"/>
+          <a:lstStyle/>
+          <a:p>
+            <a:pPr algn="ctr"/>
+          </a:p>
+        </p:txBody>
+      </p:sp>
+      <p:sp>
+        <p:nvSpPr>
+          <p:cNvPr id="47" name="TextBox 46"/>
+          <p:cNvSpPr txBox="1"/>
+          <p:nvPr/>
+        </p:nvSpPr>
+        <p:spPr>
+          <a:xfrm>
+            <a:off x="777240" y="5806440"/>
+            <a:ext cx="10744200" cy="566928"/>
+          </a:xfrm>
+          <a:prstGeom prst="rect">
+            <a:avLst/>
+          </a:prstGeom>
+          <a:noFill/>
+        </p:spPr>
+        <p:txBody>
+          <a:bodyPr wrap="square" anchor="ctr" lIns="45720" rIns="45720">
+            <a:spAutoFit/>
+          </a:bodyPr>
+          <a:lstStyle/>
+          <a:p>
+            <a:pPr algn="l">
+              <a:spcAft>
+                <a:spcPts val="0"/>
+              </a:spcAft>
+            </a:pPr>
+            <a:r>
+              <a:rPr sz="1600" b="1">
+                <a:solidFill>
+                  <a:srgbClr val="E8EAF2"/>
+                </a:solidFill>
+                <a:latin typeface="Segoe UI"/>
+              </a:rPr>
+              <a:t>Key takeaway:</a:t>
+            </a:r>
+            <a:r>
+              <a:rPr sz="1600" b="0">
+                <a:solidFill>
+                  <a:srgbClr val="E8EAF2"/>
+                </a:solidFill>
+                <a:latin typeface="Segoe UI"/>
+              </a:rPr>
+              <a:t> one correct slice, carried by memory, adds +0.005 Dice: 4× the best confidence idea.</a:t>
+            </a:r>
+          </a:p>
+        </p:txBody>
+      </p:sp>
     </p:spTree>
   </p:cSld>
   <p:clrMapOvr>

--- a/Presentation/BrainTumour_YOLO_MedSAM2.pptx
+++ b/Presentation/BrainTumour_YOLO_MedSAM2.pptx
@@ -18,11 +18,13 @@
     <p:sldId id="261" r:id="rId8"/>
     <p:sldId id="279" r:id="rId9"/>
     <p:sldId id="278" r:id="rId10"/>
+    <p:sldId id="286" r:id="rId28"/>
     <p:sldId id="280" r:id="rId11"/>
     <p:sldId id="281" r:id="rId12"/>
     <p:sldId id="267" r:id="rId13"/>
     <p:sldId id="268" r:id="rId14"/>
     <p:sldId id="284" r:id="rId26"/>
+    <p:sldId id="285" r:id="rId27"/>
     <p:sldId id="270" r:id="rId15"/>
     <p:sldId id="282" r:id="rId24"/>
     <p:sldId id="277" r:id="rId16"/>
@@ -2247,6 +2249,148 @@
 </p:notes>
 </file>
 
+<file path=ppt/notesSlides/notesSlide18.xml><?xml version="1.0" encoding="utf-8"?>
+<p:notes xmlns:a="http://schemas.openxmlformats.org/drawingml/2006/main" xmlns:p="http://schemas.openxmlformats.org/presentationml/2006/main" xmlns:r="http://schemas.openxmlformats.org/officeDocument/2006/relationships">
+  <p:cSld>
+    <p:spTree>
+      <p:nvGrpSpPr>
+        <p:cNvPr id="1" name=""/>
+        <p:cNvGrpSpPr/>
+        <p:nvPr/>
+      </p:nvGrpSpPr>
+      <p:grpSpPr>
+        <a:xfrm>
+          <a:off x="0" y="0"/>
+          <a:ext cx="0" cy="0"/>
+          <a:chOff x="0" y="0"/>
+          <a:chExt cx="0" cy="0"/>
+        </a:xfrm>
+      </p:grpSpPr>
+      <p:sp>
+        <p:nvSpPr>
+          <p:cNvPr id="3" name="Notes Placeholder 2"/>
+          <p:cNvSpPr>
+            <a:spLocks noGrp="1"/>
+          </p:cNvSpPr>
+          <p:nvPr>
+            <p:ph type="body" sz="quarter" idx="3"/>
+          </p:nvPr>
+        </p:nvSpPr>
+        <p:spPr/>
+        <p:txBody>
+          <a:bodyPr/>
+          <a:lstStyle/>
+          <a:p>
+            <a:r>
+              <a:t>בדקנו מה קורה כשלגידול יש כמה חלקים נפרדים, כלומר חלקים שאין ביניהם אף פרוסה משותפת.</a:t>
+            </a:r>
+          </a:p>
+          <a:p>
+            <a:r>
+              <a:t>זה קורה ב-35 מתוך 324 מטופלי המבחן, 11%. ברוב המקרים פרוסת ההתחלה נמצאת בחלק הגדול.</a:t>
+            </a:r>
+          </a:p>
+          <a:p>
+            <a:r>
+              <a:t>את החלק הגדול MedSAM2 מוצא תמיד, 35 מתוך 35.</a:t>
+            </a:r>
+          </a:p>
+          <a:p>
+            <a:r>
+              <a:t>בחלקים האחרים, בגודל 100 ווקסלים ומעלה: כש-YOLO נתן רמז על החלק, MedSAM2 מצא 7 מתוך 9. כש-YOLO פספס את החלק, MedSAM2 פספס את כל השבעה.</a:t>
+            </a:r>
+          </a:p>
+          <a:p>
+            <a:r>
+              <a:t>הסיבה: הזיכרון מעביר את הגידול מפרוסה לפרוסה, אבל בפרוסות הריקות שבין החלקים אין מה להעביר, ולכן החלק הבא חייב להגיע מהרמז של YOLO.</a:t>
+            </a:r>
+          </a:p>
+          <a:p>
+            <a:r>
+              <a:t>בשני מקרים MedSAM2 איבד חלק ש-YOLO מצא היטב; את הסיבה עוד לא בדקנו.</a:t>
+            </a:r>
+          </a:p>
+        </p:txBody>
+      </p:sp>
+    </p:spTree>
+  </p:cSld>
+  <p:clrMapOvr>
+    <a:masterClrMapping/>
+  </p:clrMapOvr>
+</p:notes>
+</file>
+
+<file path=ppt/notesSlides/notesSlide19.xml><?xml version="1.0" encoding="utf-8"?>
+<p:notes xmlns:a="http://schemas.openxmlformats.org/drawingml/2006/main" xmlns:p="http://schemas.openxmlformats.org/presentationml/2006/main" xmlns:r="http://schemas.openxmlformats.org/officeDocument/2006/relationships">
+  <p:cSld>
+    <p:spTree>
+      <p:nvGrpSpPr>
+        <p:cNvPr id="1" name=""/>
+        <p:cNvGrpSpPr/>
+        <p:nvPr/>
+      </p:nvGrpSpPr>
+      <p:grpSpPr>
+        <a:xfrm>
+          <a:off x="0" y="0"/>
+          <a:ext cx="0" cy="0"/>
+          <a:chOff x="0" y="0"/>
+          <a:chExt cx="0" cy="0"/>
+        </a:xfrm>
+      </p:grpSpPr>
+      <p:sp>
+        <p:nvSpPr>
+          <p:cNvPr id="3" name="Notes Placeholder 2"/>
+          <p:cNvSpPr>
+            <a:spLocks noGrp="1"/>
+          </p:cNvSpPr>
+          <p:nvPr>
+            <p:ph type="body" sz="quarter" idx="3"/>
+          </p:nvPr>
+        </p:nvSpPr>
+        <p:spPr/>
+        <p:txBody>
+          <a:bodyPr/>
+          <a:lstStyle/>
+          <a:p>
+            <a:r>
+              <a:t>השוואה בין שתי דרכים להעביר את הרמז של YOLO ל-MedSAM2. כאן רק הקלט, לא מה ש-MedSAM2 עושה איתו.</a:t>
+            </a:r>
+          </a:p>
+          <a:p>
+            <a:r>
+              <a:t>max, מה שהשתמשנו בו בכל הריצות: לכל פיקסל ההסתברות של YOLO, והביטחון של הצורה לא נכנס.</a:t>
+            </a:r>
+          </a:p>
+          <a:p>
+            <a:r>
+              <a:t>max_weighted: ההסתברות כפול הביטחון של הצורה, ואז אותו לוגיט כפול 8.</a:t>
+            </a:r>
+          </a:p>
+          <a:p>
+            <a:r>
+              <a:t>בגרף העליון: ב-max כמעט חצי מהפיקסלים מקבלים את הערך המקסימלי, 44+. ב-max_weighted אין אף פיקסל מעל בערך 24+, כי הביטחון הכי גבוה הוא בערך 0.9.</a:t>
+            </a:r>
+          </a:p>
+          <a:p>
+            <a:r>
+              <a:t>בגרף התחתון: כל צורה עם ביטחון מתחת ל-0.5 הופכת ב-max_weighted ל'לא גידול' לגמרי, כי הסתברות כפול ביטחון לא יכולה לעבור 0.5. ב-max אותן צורות עדיין אומרות 'גידול' ב-40% עד 63% מהפיקסלים.</a:t>
+            </a:r>
+          </a:p>
+          <a:p>
+            <a:r>
+              <a:t>שימו לב: 77% מפיקסלי הצורות הם בצורות עם ביטחון מעל 0.75, אז רוב הרמז כמעט לא משתנה, חוץ מהעוצמה.</a:t>
+            </a:r>
+          </a:p>
+        </p:txBody>
+      </p:sp>
+    </p:spTree>
+  </p:cSld>
+  <p:clrMapOvr>
+    <a:masterClrMapping/>
+  </p:clrMapOvr>
+</p:notes>
+</file>
+
 <file path=ppt/notesSlides/notesSlide2.xml><?xml version="1.0" encoding="utf-8"?>
 <p:notes xmlns:a="http://schemas.openxmlformats.org/drawingml/2006/main" xmlns:r="http://schemas.openxmlformats.org/officeDocument/2006/relationships" xmlns:p="http://schemas.openxmlformats.org/presentationml/2006/main">
   <p:cSld>
@@ -8761,7 +8905,7 @@
                 </a:solidFill>
                 <a:latin typeface="Segoe UI"/>
               </a:rPr>
-              <a:t>11</a:t>
+              <a:t>12</a:t>
             </a:r>
             <a:endParaRPr sz="1100" b="0" dirty="0">
               <a:solidFill>
@@ -9855,7 +9999,7 @@
                 </a:solidFill>
                 <a:latin typeface="Segoe UI"/>
               </a:rPr>
-              <a:t>12</a:t>
+              <a:t>13</a:t>
             </a:r>
             <a:endParaRPr sz="1100" b="0" dirty="0">
               <a:solidFill>
@@ -12274,7 +12418,7 @@
                 </a:solidFill>
                 <a:latin typeface="Segoe UI"/>
               </a:rPr>
-              <a:t>13</a:t>
+              <a:t>14</a:t>
             </a:r>
             <a:endParaRPr sz="1100" b="0" dirty="0">
               <a:solidFill>
@@ -12732,7 +12876,7 @@
                 </a:solidFill>
                 <a:latin typeface="Segoe UI"/>
               </a:rPr>
-              <a:t>14</a:t>
+              <a:t>15</a:t>
             </a:r>
             <a:endParaRPr sz="1100" b="0" dirty="0">
               <a:solidFill>
@@ -13475,7 +13619,7 @@
 </file>
 
 <file path=ppt/slides/slide15.xml><?xml version="1.0" encoding="utf-8"?>
-<p:sld xmlns:a="http://schemas.openxmlformats.org/drawingml/2006/main" xmlns:r="http://schemas.openxmlformats.org/officeDocument/2006/relationships" xmlns:p="http://schemas.openxmlformats.org/presentationml/2006/main">
+<p:sld xmlns:a="http://schemas.openxmlformats.org/drawingml/2006/main" xmlns:p="http://schemas.openxmlformats.org/presentationml/2006/main" xmlns:r="http://schemas.openxmlformats.org/officeDocument/2006/relationships">
   <p:cSld>
     <p:spTree>
       <p:nvGrpSpPr>
@@ -13483,14 +13627,7 @@
         <p:cNvGrpSpPr/>
         <p:nvPr/>
       </p:nvGrpSpPr>
-      <p:grpSpPr>
-        <a:xfrm>
-          <a:off x="0" y="0"/>
-          <a:ext cx="0" cy="0"/>
-          <a:chOff x="0" y="0"/>
-          <a:chExt cx="0" cy="0"/>
-        </a:xfrm>
-      </p:grpSpPr>
+      <p:grpSpPr/>
       <p:sp>
         <p:nvSpPr>
           <p:cNvPr id="2" name="TextBox 1"/>
@@ -13500,7 +13637,7 @@
         <p:spPr>
           <a:xfrm>
             <a:off x="548640" y="256032"/>
-            <a:ext cx="8229600" cy="320040"/>
+            <a:ext cx="8229600" cy="274320"/>
           </a:xfrm>
           <a:prstGeom prst="rect">
             <a:avLst/>
@@ -13508,7 +13645,7 @@
           <a:noFill/>
         </p:spPr>
         <p:txBody>
-          <a:bodyPr wrap="square" lIns="45720" rIns="45720" anchor="t">
+          <a:bodyPr wrap="square" anchor="t" lIns="45720" rIns="45720">
             <a:spAutoFit/>
           </a:bodyPr>
           <a:lstStyle/>
@@ -13521,11 +13658,11 @@
             <a:r>
               <a:rPr sz="1200" b="0">
                 <a:solidFill>
-                  <a:srgbClr val="E06A2E"/>
-                </a:solidFill>
-                <a:latin typeface="Segoe UI"/>
-              </a:rPr>
-              <a:t>NEXT STEPS</a:t>
+                  <a:srgbClr val="FFFFFF"/>
+                </a:solidFill>
+                <a:latin typeface="Segoe UI"/>
+              </a:rPr>
+              <a:t>EXPERIMENTS · WHAT-IF TEST (VAL, 245 PATIENTS)</a:t>
             </a:r>
           </a:p>
         </p:txBody>
@@ -13539,7 +13676,7 @@
         <p:spPr>
           <a:xfrm>
             <a:off x="548640" y="475488"/>
-            <a:ext cx="11064240" cy="731520"/>
+            <a:ext cx="11064240" cy="585216"/>
           </a:xfrm>
           <a:prstGeom prst="rect">
             <a:avLst/>
@@ -13547,7 +13684,7 @@
           <a:noFill/>
         </p:spPr>
         <p:txBody>
-          <a:bodyPr wrap="square" lIns="45720" rIns="45720" anchor="t">
+          <a:bodyPr wrap="square" anchor="t" lIns="45720" rIns="45720">
             <a:spAutoFit/>
           </a:bodyPr>
           <a:lstStyle/>
@@ -13560,11 +13697,11 @@
             <a:r>
               <a:rPr sz="3200" b="0">
                 <a:solidFill>
-                  <a:srgbClr val="E8EAF2"/>
-                </a:solidFill>
-                <a:latin typeface="Segoe UI"/>
-              </a:rPr>
-              <a:t>Future work</a:t>
+                  <a:srgbClr val="FFFFFF"/>
+                </a:solidFill>
+                <a:latin typeface="Segoe UI"/>
+              </a:rPr>
+              <a:t>What if the start slice were perfect?</a:t>
             </a:r>
           </a:p>
         </p:txBody>
@@ -13578,7 +13715,7 @@
         <p:spPr>
           <a:xfrm>
             <a:off x="10972800" y="6446520"/>
-            <a:ext cx="914400" cy="261610"/>
+            <a:ext cx="914400" cy="265176"/>
           </a:xfrm>
           <a:prstGeom prst="rect">
             <a:avLst/>
@@ -13586,7 +13723,7 @@
           <a:noFill/>
         </p:spPr>
         <p:txBody>
-          <a:bodyPr wrap="square" lIns="45720" rIns="45720" anchor="t">
+          <a:bodyPr wrap="square" anchor="t" lIns="45720" rIns="45720">
             <a:spAutoFit/>
           </a:bodyPr>
           <a:lstStyle/>
@@ -13597,36 +13734,32 @@
               </a:spcAft>
             </a:pPr>
             <a:r>
-              <a:rPr lang="en-US" sz="1100" b="0" dirty="0">
-                <a:solidFill>
-                  <a:schemeClr val="bg1"/>
+              <a:rPr sz="1100" b="0">
+                <a:solidFill>
+                  <a:srgbClr val="FFFFFF"/>
                 </a:solidFill>
                 <a:latin typeface="Segoe UI"/>
               </a:rPr>
               <a:t>16</a:t>
             </a:r>
-            <a:endParaRPr sz="1100" b="0" dirty="0">
-              <a:solidFill>
-                <a:schemeClr val="bg1"/>
-              </a:solidFill>
-              <a:latin typeface="Segoe UI"/>
-            </a:endParaRPr>
-          </a:p>
-        </p:txBody>
-      </p:sp>
-      <p:sp>
-        <p:nvSpPr>
-          <p:cNvPr id="5" name="Rectangle 4"/>
+          </a:p>
+        </p:txBody>
+      </p:sp>
+      <p:sp>
+        <p:nvSpPr>
+          <p:cNvPr id="5" name="Rounded Rectangle 4"/>
           <p:cNvSpPr/>
           <p:nvPr/>
         </p:nvSpPr>
         <p:spPr>
           <a:xfrm>
-            <a:off x="548640" y="1463040"/>
-            <a:ext cx="3566160" cy="4023360"/>
-          </a:xfrm>
-          <a:prstGeom prst="rect">
-            <a:avLst/>
+            <a:off x="548640" y="1325880"/>
+            <a:ext cx="11064240" cy="566928"/>
+          </a:xfrm>
+          <a:prstGeom prst="roundRect">
+            <a:avLst>
+              <a:gd name="adj" fmla="val 15000"/>
+            </a:avLst>
           </a:prstGeom>
           <a:solidFill>
             <a:srgbClr val="1A1F33"/>
@@ -13655,7 +13788,6 @@
           <a:lstStyle/>
           <a:p>
             <a:pPr algn="ctr"/>
-            <a:endParaRPr/>
           </a:p>
         </p:txBody>
       </p:sp>
@@ -13667,8 +13799,8 @@
         </p:nvSpPr>
         <p:spPr>
           <a:xfrm>
-            <a:off x="731520" y="1645920"/>
-            <a:ext cx="3200400" cy="457200"/>
+            <a:off x="777240" y="1325880"/>
+            <a:ext cx="10744200" cy="566928"/>
           </a:xfrm>
           <a:prstGeom prst="rect">
             <a:avLst/>
@@ -13676,55 +13808,25 @@
           <a:noFill/>
         </p:spPr>
         <p:txBody>
-          <a:bodyPr wrap="square" lIns="45720" rIns="45720" anchor="t">
+          <a:bodyPr wrap="square" anchor="ctr" lIns="45720" rIns="45720">
             <a:spAutoFit/>
           </a:bodyPr>
           <a:lstStyle/>
           <a:p>
             <a:pPr algn="l">
               <a:spcAft>
-                <a:spcPts val="600"/>
+                <a:spcPts val="0"/>
               </a:spcAft>
             </a:pPr>
             <a:r>
-              <a:rPr sz="1900" b="1">
-                <a:solidFill>
-                  <a:srgbClr val="E06A2E"/>
-                </a:solidFill>
-                <a:latin typeface="Segoe UI"/>
-              </a:rPr>
-              <a:t>Sharper edges</a:t>
-            </a:r>
-          </a:p>
-        </p:txBody>
-      </p:sp>
-      <p:sp>
-        <p:nvSpPr>
-          <p:cNvPr id="7" name="TextBox 6"/>
-          <p:cNvSpPr txBox="1"/>
-          <p:nvPr/>
-        </p:nvSpPr>
-        <p:spPr>
-          <a:xfrm>
-            <a:off x="731520" y="2240280"/>
-            <a:ext cx="3200400" cy="3200400"/>
-          </a:xfrm>
-          <a:prstGeom prst="rect">
-            <a:avLst/>
-          </a:prstGeom>
-          <a:noFill/>
-        </p:spPr>
-        <p:txBody>
-          <a:bodyPr wrap="square" lIns="45720" rIns="45720" anchor="t">
-            <a:spAutoFit/>
-          </a:bodyPr>
-          <a:lstStyle/>
-          <a:p>
-            <a:pPr algn="l">
-              <a:spcAft>
-                <a:spcPts val="1200"/>
-              </a:spcAft>
-            </a:pPr>
+              <a:rPr sz="1600" b="1">
+                <a:solidFill>
+                  <a:srgbClr val="E8EAF2"/>
+                </a:solidFill>
+                <a:latin typeface="Segoe UI"/>
+              </a:rPr>
+              <a:t>The test:</a:t>
+            </a:r>
             <a:r>
               <a:rPr sz="1600" b="0">
                 <a:solidFill>
@@ -13732,53 +13834,21 @@
                 </a:solidFill>
                 <a:latin typeface="Segoe UI"/>
               </a:rPr>
-              <a:t>•  Average several trained MedSAM2 runs (an ensemble), with no new training.</a:t>
-            </a:r>
-          </a:p>
-          <a:p>
-            <a:pPr algn="l">
-              <a:spcAft>
-                <a:spcPts val="1200"/>
-              </a:spcAft>
-            </a:pPr>
-            <a:r>
-              <a:rPr sz="1600" b="0">
-                <a:solidFill>
-                  <a:srgbClr val="E8EAF2"/>
-                </a:solidFill>
-                <a:latin typeface="Segoe UI"/>
-              </a:rPr>
-              <a:t>•  Edge-focused training loss.</a:t>
-            </a:r>
-          </a:p>
-          <a:p>
-            <a:pPr algn="l">
-              <a:spcAft>
-                <a:spcPts val="1200"/>
-              </a:spcAft>
-            </a:pPr>
-            <a:r>
-              <a:rPr sz="1600" b="0">
-                <a:solidFill>
-                  <a:srgbClr val="E8EAF2"/>
-                </a:solidFill>
-                <a:latin typeface="Segoe UI"/>
-              </a:rPr>
-              <a:t>•  Finer output: scans are 182 × 218, the model works at 512 × 512.</a:t>
-            </a:r>
-          </a:p>
-        </p:txBody>
-      </p:sp>
-      <p:sp>
-        <p:nvSpPr>
-          <p:cNvPr id="8" name="Rectangle 7"/>
+              <a:t> same trained MedSAM2, no retraining. Start slice gets the expert mask; all other slices keep YOLO's hint.</a:t>
+            </a:r>
+          </a:p>
+        </p:txBody>
+      </p:sp>
+      <p:sp>
+        <p:nvSpPr>
+          <p:cNvPr id="7" name="Rectangle 6"/>
           <p:cNvSpPr/>
           <p:nvPr/>
         </p:nvSpPr>
         <p:spPr>
           <a:xfrm>
-            <a:off x="4297679" y="1463040"/>
-            <a:ext cx="3566160" cy="4023360"/>
+            <a:off x="548640" y="2103120"/>
+            <a:ext cx="6035040" cy="3520440"/>
           </a:xfrm>
           <a:prstGeom prst="rect">
             <a:avLst/>
@@ -13810,20 +13880,19 @@
           <a:lstStyle/>
           <a:p>
             <a:pPr algn="ctr"/>
-            <a:endParaRPr/>
-          </a:p>
-        </p:txBody>
-      </p:sp>
-      <p:sp>
-        <p:nvSpPr>
-          <p:cNvPr id="9" name="TextBox 8"/>
+          </a:p>
+        </p:txBody>
+      </p:sp>
+      <p:sp>
+        <p:nvSpPr>
+          <p:cNvPr id="8" name="TextBox 7"/>
           <p:cNvSpPr txBox="1"/>
           <p:nvPr/>
         </p:nvSpPr>
         <p:spPr>
           <a:xfrm>
-            <a:off x="4480559" y="1645920"/>
-            <a:ext cx="3200400" cy="457200"/>
+            <a:off x="731520" y="2212848"/>
+            <a:ext cx="5669280" cy="411480"/>
           </a:xfrm>
           <a:prstGeom prst="rect">
             <a:avLst/>
@@ -13831,131 +13900,46 @@
           <a:noFill/>
         </p:spPr>
         <p:txBody>
-          <a:bodyPr wrap="square" lIns="45720" rIns="45720" anchor="t">
+          <a:bodyPr wrap="square" anchor="t" lIns="45720" rIns="45720">
             <a:spAutoFit/>
           </a:bodyPr>
           <a:lstStyle/>
           <a:p>
             <a:pPr algn="l">
               <a:spcAft>
-                <a:spcPts val="600"/>
+                <a:spcPts val="0"/>
               </a:spcAft>
             </a:pPr>
             <a:r>
               <a:rPr sz="1900" b="1">
                 <a:solidFill>
-                  <a:srgbClr val="3987E5"/>
-                </a:solidFill>
-                <a:latin typeface="Segoe UI"/>
-              </a:rPr>
-              <a:t>Hints &amp; small tumours</a:t>
-            </a:r>
-          </a:p>
-        </p:txBody>
-      </p:sp>
-      <p:sp>
-        <p:nvSpPr>
-          <p:cNvPr id="10" name="TextBox 9"/>
-          <p:cNvSpPr txBox="1"/>
-          <p:nvPr/>
-        </p:nvSpPr>
-        <p:spPr>
-          <a:xfrm>
-            <a:off x="4480559" y="2240280"/>
-            <a:ext cx="3200400" cy="3200400"/>
-          </a:xfrm>
-          <a:prstGeom prst="rect">
-            <a:avLst/>
-          </a:prstGeom>
-          <a:noFill/>
-        </p:spPr>
-        <p:txBody>
-          <a:bodyPr wrap="square" lIns="45720" rIns="45720" anchor="t">
-            <a:spAutoFit/>
-          </a:bodyPr>
-          <a:lstStyle/>
-          <a:p>
-            <a:pPr algn="l">
-              <a:spcAft>
-                <a:spcPts val="1200"/>
-              </a:spcAft>
-            </a:pPr>
-            <a:r>
-              <a:rPr sz="1600" b="0">
-                <a:solidFill>
-                  <a:srgbClr val="E8EAF2"/>
-                </a:solidFill>
-                <a:latin typeface="Segoe UI"/>
-              </a:rPr>
-              <a:t>•  Replace YOLO with a 3D nnU‑Net as the hint maker: the final score follows the hint quality.</a:t>
-            </a:r>
-          </a:p>
-          <a:p>
-            <a:pPr algn="l">
-              <a:spcAft>
-                <a:spcPts val="1200"/>
-              </a:spcAft>
-            </a:pPr>
-            <a:r>
-              <a:rPr sz="1600" b="0">
-                <a:solidFill>
-                  <a:srgbClr val="E8EAF2"/>
-                </a:solidFill>
-                <a:latin typeface="Segoe UI"/>
-              </a:rPr>
-              <a:t>•  Weigh hint pixels by shape confidence ('max_weighted').</a:t>
-            </a:r>
-          </a:p>
-          <a:p>
-            <a:pPr algn="l">
-              <a:spcAft>
-                <a:spcPts val="1200"/>
-              </a:spcAft>
-            </a:pPr>
-            <a:r>
-              <a:rPr sz="1600" b="0">
-                <a:solidFill>
-                  <a:srgbClr val="E8EAF2"/>
-                </a:solidFill>
-                <a:latin typeface="Segoe UI"/>
-              </a:rPr>
-              <a:t>•  Give YOLO 3D context (neighbouring slices).</a:t>
-            </a:r>
-          </a:p>
-          <a:p>
-            <a:pPr algn="l">
-              <a:spcAft>
-                <a:spcPts val="1200"/>
-              </a:spcAft>
-            </a:pPr>
-            <a:r>
-              <a:rPr sz="1600" b="0">
-                <a:solidFill>
-                  <a:srgbClr val="E8EAF2"/>
-                </a:solidFill>
-                <a:latin typeface="Segoe UI"/>
-              </a:rPr>
-              <a:t>•  Train more on tumours under 10 mL.</a:t>
-            </a:r>
-          </a:p>
-        </p:txBody>
-      </p:sp>
-      <p:sp>
-        <p:nvSpPr>
-          <p:cNvPr id="11" name="Rectangle 10"/>
+                  <a:srgbClr val="E06A2E"/>
+                </a:solidFill>
+                <a:latin typeface="Segoe UI"/>
+              </a:rPr>
+              <a:t>How it runs</a:t>
+            </a:r>
+          </a:p>
+        </p:txBody>
+      </p:sp>
+      <p:sp>
+        <p:nvSpPr>
+          <p:cNvPr id="9" name="Rounded Rectangle 8"/>
           <p:cNvSpPr/>
           <p:nvPr/>
         </p:nvSpPr>
         <p:spPr>
           <a:xfrm>
-            <a:off x="8046719" y="1463040"/>
-            <a:ext cx="3566160" cy="4023360"/>
-          </a:xfrm>
-          <a:prstGeom prst="rect">
-            <a:avLst/>
+            <a:off x="864107" y="2788920"/>
+            <a:ext cx="502920" cy="1051560"/>
+          </a:xfrm>
+          <a:prstGeom prst="roundRect">
+            <a:avLst>
+              <a:gd name="adj" fmla="val 12000"/>
+            </a:avLst>
           </a:prstGeom>
           <a:solidFill>
-            <a:srgbClr val="1A1F33"/>
+            <a:srgbClr val="3987E5"/>
           </a:solidFill>
           <a:ln>
             <a:noFill/>
@@ -13981,20 +13965,19 @@
           <a:lstStyle/>
           <a:p>
             <a:pPr algn="ctr"/>
-            <a:endParaRPr/>
-          </a:p>
-        </p:txBody>
-      </p:sp>
-      <p:sp>
-        <p:nvSpPr>
-          <p:cNvPr id="12" name="TextBox 11"/>
+          </a:p>
+        </p:txBody>
+      </p:sp>
+      <p:sp>
+        <p:nvSpPr>
+          <p:cNvPr id="10" name="TextBox 9"/>
           <p:cNvSpPr txBox="1"/>
           <p:nvPr/>
         </p:nvSpPr>
         <p:spPr>
           <a:xfrm>
-            <a:off x="8229599" y="1645920"/>
-            <a:ext cx="3200400" cy="457200"/>
+            <a:off x="864107" y="2788920"/>
+            <a:ext cx="502920" cy="1051560"/>
           </a:xfrm>
           <a:prstGeom prst="rect">
             <a:avLst/>
@@ -14002,117 +13985,46 @@
           <a:noFill/>
         </p:spPr>
         <p:txBody>
-          <a:bodyPr wrap="square" lIns="45720" rIns="45720" anchor="t">
+          <a:bodyPr wrap="square" anchor="ctr" lIns="45720" rIns="45720">
             <a:spAutoFit/>
           </a:bodyPr>
           <a:lstStyle/>
           <a:p>
-            <a:pPr algn="l">
+            <a:pPr algn="ctr">
               <a:spcAft>
-                <a:spcPts val="600"/>
+                <a:spcPts val="0"/>
               </a:spcAft>
             </a:pPr>
             <a:r>
-              <a:rPr sz="1900" b="1">
-                <a:solidFill>
-                  <a:srgbClr val="2FB35C"/>
-                </a:solidFill>
-                <a:latin typeface="Segoe UI"/>
-              </a:rPr>
-              <a:t>Beyond this project</a:t>
-            </a:r>
-          </a:p>
-        </p:txBody>
-      </p:sp>
-      <p:sp>
-        <p:nvSpPr>
-          <p:cNvPr id="13" name="TextBox 12"/>
-          <p:cNvSpPr txBox="1"/>
-          <p:nvPr/>
-        </p:nvSpPr>
-        <p:spPr>
-          <a:xfrm>
-            <a:off x="8229599" y="2240280"/>
-            <a:ext cx="3200400" cy="3200400"/>
-          </a:xfrm>
-          <a:prstGeom prst="rect">
-            <a:avLst/>
-          </a:prstGeom>
-          <a:noFill/>
-        </p:spPr>
-        <p:txBody>
-          <a:bodyPr wrap="square" lIns="45720" rIns="45720" anchor="t">
-            <a:spAutoFit/>
-          </a:bodyPr>
-          <a:lstStyle/>
-          <a:p>
-            <a:pPr algn="l">
-              <a:spcAft>
-                <a:spcPts val="1200"/>
-              </a:spcAft>
-            </a:pPr>
-            <a:r>
-              <a:rPr sz="1600" b="0">
-                <a:solidFill>
-                  <a:srgbClr val="E8EAF2"/>
-                </a:solidFill>
-                <a:latin typeface="Segoe UI"/>
-              </a:rPr>
-              <a:t>•  Predict the tumour parts (ET, NETC, SNFH), not only the whole tumour.</a:t>
-            </a:r>
-          </a:p>
-          <a:p>
-            <a:pPr algn="l">
-              <a:spcAft>
-                <a:spcPts val="1200"/>
-              </a:spcAft>
-            </a:pPr>
-            <a:r>
-              <a:rPr sz="1600" b="0">
-                <a:solidFill>
-                  <a:srgbClr val="E8EAF2"/>
-                </a:solidFill>
-                <a:latin typeface="Segoe UI"/>
-              </a:rPr>
-              <a:t>•  Test on other hospitals' scans.</a:t>
-            </a:r>
-          </a:p>
-          <a:p>
-            <a:pPr algn="l">
-              <a:spcAft>
-                <a:spcPts val="1200"/>
-              </a:spcAft>
-            </a:pPr>
-            <a:r>
-              <a:rPr sz="1600" b="0">
-                <a:solidFill>
-                  <a:srgbClr val="E8EAF2"/>
-                </a:solidFill>
-                <a:latin typeface="Segoe UI"/>
-              </a:rPr>
-              <a:t>•  Remove the test/train people overlap; measure speed.</a:t>
-            </a:r>
-          </a:p>
-        </p:txBody>
-      </p:sp>
-      <p:sp>
-        <p:nvSpPr>
-          <p:cNvPr id="14" name="Rounded Rectangle 13"/>
+              <a:rPr sz="1000" b="0">
+                <a:solidFill>
+                  <a:srgbClr val="FFFFFF"/>
+                </a:solidFill>
+                <a:latin typeface="Segoe UI"/>
+              </a:rPr>
+              <a:t>YOLO</a:t>
+            </a:r>
+          </a:p>
+        </p:txBody>
+      </p:sp>
+      <p:sp>
+        <p:nvSpPr>
+          <p:cNvPr id="11" name="Rounded Rectangle 10"/>
           <p:cNvSpPr/>
           <p:nvPr/>
         </p:nvSpPr>
         <p:spPr>
           <a:xfrm>
-            <a:off x="548640" y="5806440"/>
-            <a:ext cx="11064240" cy="566928"/>
+            <a:off x="1476755" y="2788920"/>
+            <a:ext cx="502920" cy="1051560"/>
           </a:xfrm>
           <a:prstGeom prst="roundRect">
             <a:avLst>
-              <a:gd name="adj" fmla="val 15000"/>
+              <a:gd name="adj" fmla="val 12000"/>
             </a:avLst>
           </a:prstGeom>
           <a:solidFill>
-            <a:srgbClr val="1A1F33"/>
+            <a:srgbClr val="3987E5"/>
           </a:solidFill>
           <a:ln>
             <a:noFill/>
@@ -14138,20 +14050,19 @@
           <a:lstStyle/>
           <a:p>
             <a:pPr algn="ctr"/>
-            <a:endParaRPr/>
-          </a:p>
-        </p:txBody>
-      </p:sp>
-      <p:sp>
-        <p:nvSpPr>
-          <p:cNvPr id="15" name="TextBox 14"/>
+          </a:p>
+        </p:txBody>
+      </p:sp>
+      <p:sp>
+        <p:nvSpPr>
+          <p:cNvPr id="12" name="TextBox 11"/>
           <p:cNvSpPr txBox="1"/>
           <p:nvPr/>
         </p:nvSpPr>
         <p:spPr>
           <a:xfrm>
-            <a:off x="777240" y="5806440"/>
-            <a:ext cx="10744200" cy="566928"/>
+            <a:off x="1476755" y="2788920"/>
+            <a:ext cx="502920" cy="1051560"/>
           </a:xfrm>
           <a:prstGeom prst="rect">
             <a:avLst/>
@@ -14159,7 +14070,641 @@
           <a:noFill/>
         </p:spPr>
         <p:txBody>
-          <a:bodyPr wrap="square" lIns="45720" rIns="45720" anchor="ctr">
+          <a:bodyPr wrap="square" anchor="ctr" lIns="45720" rIns="45720">
+            <a:spAutoFit/>
+          </a:bodyPr>
+          <a:lstStyle/>
+          <a:p>
+            <a:pPr algn="ctr">
+              <a:spcAft>
+                <a:spcPts val="0"/>
+              </a:spcAft>
+            </a:pPr>
+            <a:r>
+              <a:rPr sz="1000" b="0">
+                <a:solidFill>
+                  <a:srgbClr val="FFFFFF"/>
+                </a:solidFill>
+                <a:latin typeface="Segoe UI"/>
+              </a:rPr>
+              <a:t>YOLO</a:t>
+            </a:r>
+          </a:p>
+        </p:txBody>
+      </p:sp>
+      <p:sp>
+        <p:nvSpPr>
+          <p:cNvPr id="13" name="Rounded Rectangle 12"/>
+          <p:cNvSpPr/>
+          <p:nvPr/>
+        </p:nvSpPr>
+        <p:spPr>
+          <a:xfrm>
+            <a:off x="2089403" y="2788920"/>
+            <a:ext cx="502920" cy="1051560"/>
+          </a:xfrm>
+          <a:prstGeom prst="roundRect">
+            <a:avLst>
+              <a:gd name="adj" fmla="val 12000"/>
+            </a:avLst>
+          </a:prstGeom>
+          <a:solidFill>
+            <a:srgbClr val="3987E5"/>
+          </a:solidFill>
+          <a:ln>
+            <a:noFill/>
+          </a:ln>
+          <a:effectLst/>
+        </p:spPr>
+        <p:style>
+          <a:lnRef idx="1">
+            <a:schemeClr val="accent1"/>
+          </a:lnRef>
+          <a:fillRef idx="3">
+            <a:schemeClr val="accent1"/>
+          </a:fillRef>
+          <a:effectRef idx="2">
+            <a:schemeClr val="accent1"/>
+          </a:effectRef>
+          <a:fontRef idx="minor">
+            <a:schemeClr val="lt1"/>
+          </a:fontRef>
+        </p:style>
+        <p:txBody>
+          <a:bodyPr rtlCol="0" anchor="ctr"/>
+          <a:lstStyle/>
+          <a:p>
+            <a:pPr algn="ctr"/>
+          </a:p>
+        </p:txBody>
+      </p:sp>
+      <p:sp>
+        <p:nvSpPr>
+          <p:cNvPr id="14" name="TextBox 13"/>
+          <p:cNvSpPr txBox="1"/>
+          <p:nvPr/>
+        </p:nvSpPr>
+        <p:spPr>
+          <a:xfrm>
+            <a:off x="2089403" y="2788920"/>
+            <a:ext cx="502920" cy="1051560"/>
+          </a:xfrm>
+          <a:prstGeom prst="rect">
+            <a:avLst/>
+          </a:prstGeom>
+          <a:noFill/>
+        </p:spPr>
+        <p:txBody>
+          <a:bodyPr wrap="square" anchor="ctr" lIns="45720" rIns="45720">
+            <a:spAutoFit/>
+          </a:bodyPr>
+          <a:lstStyle/>
+          <a:p>
+            <a:pPr algn="ctr">
+              <a:spcAft>
+                <a:spcPts val="0"/>
+              </a:spcAft>
+            </a:pPr>
+            <a:r>
+              <a:rPr sz="1000" b="0">
+                <a:solidFill>
+                  <a:srgbClr val="FFFFFF"/>
+                </a:solidFill>
+                <a:latin typeface="Segoe UI"/>
+              </a:rPr>
+              <a:t>YOLO</a:t>
+            </a:r>
+          </a:p>
+        </p:txBody>
+      </p:sp>
+      <p:sp>
+        <p:nvSpPr>
+          <p:cNvPr id="15" name="Rounded Rectangle 14"/>
+          <p:cNvSpPr/>
+          <p:nvPr/>
+        </p:nvSpPr>
+        <p:spPr>
+          <a:xfrm>
+            <a:off x="2702052" y="2788920"/>
+            <a:ext cx="502920" cy="1051560"/>
+          </a:xfrm>
+          <a:prstGeom prst="roundRect">
+            <a:avLst>
+              <a:gd name="adj" fmla="val 12000"/>
+            </a:avLst>
+          </a:prstGeom>
+          <a:solidFill>
+            <a:srgbClr val="3987E5"/>
+          </a:solidFill>
+          <a:ln>
+            <a:noFill/>
+          </a:ln>
+          <a:effectLst/>
+        </p:spPr>
+        <p:style>
+          <a:lnRef idx="1">
+            <a:schemeClr val="accent1"/>
+          </a:lnRef>
+          <a:fillRef idx="3">
+            <a:schemeClr val="accent1"/>
+          </a:fillRef>
+          <a:effectRef idx="2">
+            <a:schemeClr val="accent1"/>
+          </a:effectRef>
+          <a:fontRef idx="minor">
+            <a:schemeClr val="lt1"/>
+          </a:fontRef>
+        </p:style>
+        <p:txBody>
+          <a:bodyPr rtlCol="0" anchor="ctr"/>
+          <a:lstStyle/>
+          <a:p>
+            <a:pPr algn="ctr"/>
+          </a:p>
+        </p:txBody>
+      </p:sp>
+      <p:sp>
+        <p:nvSpPr>
+          <p:cNvPr id="16" name="TextBox 15"/>
+          <p:cNvSpPr txBox="1"/>
+          <p:nvPr/>
+        </p:nvSpPr>
+        <p:spPr>
+          <a:xfrm>
+            <a:off x="2702052" y="2788920"/>
+            <a:ext cx="502920" cy="1051560"/>
+          </a:xfrm>
+          <a:prstGeom prst="rect">
+            <a:avLst/>
+          </a:prstGeom>
+          <a:noFill/>
+        </p:spPr>
+        <p:txBody>
+          <a:bodyPr wrap="square" anchor="ctr" lIns="45720" rIns="45720">
+            <a:spAutoFit/>
+          </a:bodyPr>
+          <a:lstStyle/>
+          <a:p>
+            <a:pPr algn="ctr">
+              <a:spcAft>
+                <a:spcPts val="0"/>
+              </a:spcAft>
+            </a:pPr>
+            <a:r>
+              <a:rPr sz="1000" b="0">
+                <a:solidFill>
+                  <a:srgbClr val="FFFFFF"/>
+                </a:solidFill>
+                <a:latin typeface="Segoe UI"/>
+              </a:rPr>
+              <a:t>YOLO</a:t>
+            </a:r>
+          </a:p>
+        </p:txBody>
+      </p:sp>
+      <p:sp>
+        <p:nvSpPr>
+          <p:cNvPr id="17" name="Rounded Rectangle 16"/>
+          <p:cNvSpPr/>
+          <p:nvPr/>
+        </p:nvSpPr>
+        <p:spPr>
+          <a:xfrm>
+            <a:off x="3314700" y="2788920"/>
+            <a:ext cx="502920" cy="1051560"/>
+          </a:xfrm>
+          <a:prstGeom prst="roundRect">
+            <a:avLst>
+              <a:gd name="adj" fmla="val 12000"/>
+            </a:avLst>
+          </a:prstGeom>
+          <a:solidFill>
+            <a:srgbClr val="2FB35C"/>
+          </a:solidFill>
+          <a:ln>
+            <a:noFill/>
+          </a:ln>
+          <a:effectLst/>
+        </p:spPr>
+        <p:style>
+          <a:lnRef idx="1">
+            <a:schemeClr val="accent1"/>
+          </a:lnRef>
+          <a:fillRef idx="3">
+            <a:schemeClr val="accent1"/>
+          </a:fillRef>
+          <a:effectRef idx="2">
+            <a:schemeClr val="accent1"/>
+          </a:effectRef>
+          <a:fontRef idx="minor">
+            <a:schemeClr val="lt1"/>
+          </a:fontRef>
+        </p:style>
+        <p:txBody>
+          <a:bodyPr rtlCol="0" anchor="ctr"/>
+          <a:lstStyle/>
+          <a:p>
+            <a:pPr algn="ctr"/>
+          </a:p>
+        </p:txBody>
+      </p:sp>
+      <p:sp>
+        <p:nvSpPr>
+          <p:cNvPr id="18" name="TextBox 17"/>
+          <p:cNvSpPr txBox="1"/>
+          <p:nvPr/>
+        </p:nvSpPr>
+        <p:spPr>
+          <a:xfrm>
+            <a:off x="3314700" y="2788920"/>
+            <a:ext cx="502920" cy="1051560"/>
+          </a:xfrm>
+          <a:prstGeom prst="rect">
+            <a:avLst/>
+          </a:prstGeom>
+          <a:noFill/>
+        </p:spPr>
+        <p:txBody>
+          <a:bodyPr wrap="square" anchor="ctr" lIns="45720" rIns="45720">
+            <a:spAutoFit/>
+          </a:bodyPr>
+          <a:lstStyle/>
+          <a:p>
+            <a:pPr algn="ctr">
+              <a:spcAft>
+                <a:spcPts val="0"/>
+              </a:spcAft>
+            </a:pPr>
+            <a:r>
+              <a:rPr sz="1000" b="1">
+                <a:solidFill>
+                  <a:srgbClr val="FFFFFF"/>
+                </a:solidFill>
+                <a:latin typeface="Segoe UI"/>
+              </a:rPr>
+              <a:t>Expert</a:t>
+            </a:r>
+          </a:p>
+        </p:txBody>
+      </p:sp>
+      <p:sp>
+        <p:nvSpPr>
+          <p:cNvPr id="19" name="Rounded Rectangle 18"/>
+          <p:cNvSpPr/>
+          <p:nvPr/>
+        </p:nvSpPr>
+        <p:spPr>
+          <a:xfrm>
+            <a:off x="3927348" y="2788920"/>
+            <a:ext cx="502920" cy="1051560"/>
+          </a:xfrm>
+          <a:prstGeom prst="roundRect">
+            <a:avLst>
+              <a:gd name="adj" fmla="val 12000"/>
+            </a:avLst>
+          </a:prstGeom>
+          <a:solidFill>
+            <a:srgbClr val="3987E5"/>
+          </a:solidFill>
+          <a:ln>
+            <a:noFill/>
+          </a:ln>
+          <a:effectLst/>
+        </p:spPr>
+        <p:style>
+          <a:lnRef idx="1">
+            <a:schemeClr val="accent1"/>
+          </a:lnRef>
+          <a:fillRef idx="3">
+            <a:schemeClr val="accent1"/>
+          </a:fillRef>
+          <a:effectRef idx="2">
+            <a:schemeClr val="accent1"/>
+          </a:effectRef>
+          <a:fontRef idx="minor">
+            <a:schemeClr val="lt1"/>
+          </a:fontRef>
+        </p:style>
+        <p:txBody>
+          <a:bodyPr rtlCol="0" anchor="ctr"/>
+          <a:lstStyle/>
+          <a:p>
+            <a:pPr algn="ctr"/>
+          </a:p>
+        </p:txBody>
+      </p:sp>
+      <p:sp>
+        <p:nvSpPr>
+          <p:cNvPr id="20" name="TextBox 19"/>
+          <p:cNvSpPr txBox="1"/>
+          <p:nvPr/>
+        </p:nvSpPr>
+        <p:spPr>
+          <a:xfrm>
+            <a:off x="3927348" y="2788920"/>
+            <a:ext cx="502920" cy="1051560"/>
+          </a:xfrm>
+          <a:prstGeom prst="rect">
+            <a:avLst/>
+          </a:prstGeom>
+          <a:noFill/>
+        </p:spPr>
+        <p:txBody>
+          <a:bodyPr wrap="square" anchor="ctr" lIns="45720" rIns="45720">
+            <a:spAutoFit/>
+          </a:bodyPr>
+          <a:lstStyle/>
+          <a:p>
+            <a:pPr algn="ctr">
+              <a:spcAft>
+                <a:spcPts val="0"/>
+              </a:spcAft>
+            </a:pPr>
+            <a:r>
+              <a:rPr sz="1000" b="0">
+                <a:solidFill>
+                  <a:srgbClr val="FFFFFF"/>
+                </a:solidFill>
+                <a:latin typeface="Segoe UI"/>
+              </a:rPr>
+              <a:t>YOLO</a:t>
+            </a:r>
+          </a:p>
+        </p:txBody>
+      </p:sp>
+      <p:sp>
+        <p:nvSpPr>
+          <p:cNvPr id="21" name="Rounded Rectangle 20"/>
+          <p:cNvSpPr/>
+          <p:nvPr/>
+        </p:nvSpPr>
+        <p:spPr>
+          <a:xfrm>
+            <a:off x="4539996" y="2788920"/>
+            <a:ext cx="502920" cy="1051560"/>
+          </a:xfrm>
+          <a:prstGeom prst="roundRect">
+            <a:avLst>
+              <a:gd name="adj" fmla="val 12000"/>
+            </a:avLst>
+          </a:prstGeom>
+          <a:solidFill>
+            <a:srgbClr val="3987E5"/>
+          </a:solidFill>
+          <a:ln>
+            <a:noFill/>
+          </a:ln>
+          <a:effectLst/>
+        </p:spPr>
+        <p:style>
+          <a:lnRef idx="1">
+            <a:schemeClr val="accent1"/>
+          </a:lnRef>
+          <a:fillRef idx="3">
+            <a:schemeClr val="accent1"/>
+          </a:fillRef>
+          <a:effectRef idx="2">
+            <a:schemeClr val="accent1"/>
+          </a:effectRef>
+          <a:fontRef idx="minor">
+            <a:schemeClr val="lt1"/>
+          </a:fontRef>
+        </p:style>
+        <p:txBody>
+          <a:bodyPr rtlCol="0" anchor="ctr"/>
+          <a:lstStyle/>
+          <a:p>
+            <a:pPr algn="ctr"/>
+          </a:p>
+        </p:txBody>
+      </p:sp>
+      <p:sp>
+        <p:nvSpPr>
+          <p:cNvPr id="22" name="TextBox 21"/>
+          <p:cNvSpPr txBox="1"/>
+          <p:nvPr/>
+        </p:nvSpPr>
+        <p:spPr>
+          <a:xfrm>
+            <a:off x="4539996" y="2788920"/>
+            <a:ext cx="502920" cy="1051560"/>
+          </a:xfrm>
+          <a:prstGeom prst="rect">
+            <a:avLst/>
+          </a:prstGeom>
+          <a:noFill/>
+        </p:spPr>
+        <p:txBody>
+          <a:bodyPr wrap="square" anchor="ctr" lIns="45720" rIns="45720">
+            <a:spAutoFit/>
+          </a:bodyPr>
+          <a:lstStyle/>
+          <a:p>
+            <a:pPr algn="ctr">
+              <a:spcAft>
+                <a:spcPts val="0"/>
+              </a:spcAft>
+            </a:pPr>
+            <a:r>
+              <a:rPr sz="1000" b="0">
+                <a:solidFill>
+                  <a:srgbClr val="FFFFFF"/>
+                </a:solidFill>
+                <a:latin typeface="Segoe UI"/>
+              </a:rPr>
+              <a:t>YOLO</a:t>
+            </a:r>
+          </a:p>
+        </p:txBody>
+      </p:sp>
+      <p:sp>
+        <p:nvSpPr>
+          <p:cNvPr id="23" name="Rounded Rectangle 22"/>
+          <p:cNvSpPr/>
+          <p:nvPr/>
+        </p:nvSpPr>
+        <p:spPr>
+          <a:xfrm>
+            <a:off x="5152644" y="2788920"/>
+            <a:ext cx="502920" cy="1051560"/>
+          </a:xfrm>
+          <a:prstGeom prst="roundRect">
+            <a:avLst>
+              <a:gd name="adj" fmla="val 12000"/>
+            </a:avLst>
+          </a:prstGeom>
+          <a:solidFill>
+            <a:srgbClr val="3987E5"/>
+          </a:solidFill>
+          <a:ln>
+            <a:noFill/>
+          </a:ln>
+          <a:effectLst/>
+        </p:spPr>
+        <p:style>
+          <a:lnRef idx="1">
+            <a:schemeClr val="accent1"/>
+          </a:lnRef>
+          <a:fillRef idx="3">
+            <a:schemeClr val="accent1"/>
+          </a:fillRef>
+          <a:effectRef idx="2">
+            <a:schemeClr val="accent1"/>
+          </a:effectRef>
+          <a:fontRef idx="minor">
+            <a:schemeClr val="lt1"/>
+          </a:fontRef>
+        </p:style>
+        <p:txBody>
+          <a:bodyPr rtlCol="0" anchor="ctr"/>
+          <a:lstStyle/>
+          <a:p>
+            <a:pPr algn="ctr"/>
+          </a:p>
+        </p:txBody>
+      </p:sp>
+      <p:sp>
+        <p:nvSpPr>
+          <p:cNvPr id="24" name="TextBox 23"/>
+          <p:cNvSpPr txBox="1"/>
+          <p:nvPr/>
+        </p:nvSpPr>
+        <p:spPr>
+          <a:xfrm>
+            <a:off x="5152644" y="2788920"/>
+            <a:ext cx="502920" cy="1051560"/>
+          </a:xfrm>
+          <a:prstGeom prst="rect">
+            <a:avLst/>
+          </a:prstGeom>
+          <a:noFill/>
+        </p:spPr>
+        <p:txBody>
+          <a:bodyPr wrap="square" anchor="ctr" lIns="45720" rIns="45720">
+            <a:spAutoFit/>
+          </a:bodyPr>
+          <a:lstStyle/>
+          <a:p>
+            <a:pPr algn="ctr">
+              <a:spcAft>
+                <a:spcPts val="0"/>
+              </a:spcAft>
+            </a:pPr>
+            <a:r>
+              <a:rPr sz="1000" b="0">
+                <a:solidFill>
+                  <a:srgbClr val="FFFFFF"/>
+                </a:solidFill>
+                <a:latin typeface="Segoe UI"/>
+              </a:rPr>
+              <a:t>YOLO</a:t>
+            </a:r>
+          </a:p>
+        </p:txBody>
+      </p:sp>
+      <p:sp>
+        <p:nvSpPr>
+          <p:cNvPr id="25" name="Rounded Rectangle 24"/>
+          <p:cNvSpPr/>
+          <p:nvPr/>
+        </p:nvSpPr>
+        <p:spPr>
+          <a:xfrm>
+            <a:off x="5765292" y="2788920"/>
+            <a:ext cx="502920" cy="1051560"/>
+          </a:xfrm>
+          <a:prstGeom prst="roundRect">
+            <a:avLst>
+              <a:gd name="adj" fmla="val 12000"/>
+            </a:avLst>
+          </a:prstGeom>
+          <a:solidFill>
+            <a:srgbClr val="3987E5"/>
+          </a:solidFill>
+          <a:ln>
+            <a:noFill/>
+          </a:ln>
+          <a:effectLst/>
+        </p:spPr>
+        <p:style>
+          <a:lnRef idx="1">
+            <a:schemeClr val="accent1"/>
+          </a:lnRef>
+          <a:fillRef idx="3">
+            <a:schemeClr val="accent1"/>
+          </a:fillRef>
+          <a:effectRef idx="2">
+            <a:schemeClr val="accent1"/>
+          </a:effectRef>
+          <a:fontRef idx="minor">
+            <a:schemeClr val="lt1"/>
+          </a:fontRef>
+        </p:style>
+        <p:txBody>
+          <a:bodyPr rtlCol="0" anchor="ctr"/>
+          <a:lstStyle/>
+          <a:p>
+            <a:pPr algn="ctr"/>
+          </a:p>
+        </p:txBody>
+      </p:sp>
+      <p:sp>
+        <p:nvSpPr>
+          <p:cNvPr id="26" name="TextBox 25"/>
+          <p:cNvSpPr txBox="1"/>
+          <p:nvPr/>
+        </p:nvSpPr>
+        <p:spPr>
+          <a:xfrm>
+            <a:off x="5765292" y="2788920"/>
+            <a:ext cx="502920" cy="1051560"/>
+          </a:xfrm>
+          <a:prstGeom prst="rect">
+            <a:avLst/>
+          </a:prstGeom>
+          <a:noFill/>
+        </p:spPr>
+        <p:txBody>
+          <a:bodyPr wrap="square" anchor="ctr" lIns="45720" rIns="45720">
+            <a:spAutoFit/>
+          </a:bodyPr>
+          <a:lstStyle/>
+          <a:p>
+            <a:pPr algn="ctr">
+              <a:spcAft>
+                <a:spcPts val="0"/>
+              </a:spcAft>
+            </a:pPr>
+            <a:r>
+              <a:rPr sz="1000" b="0">
+                <a:solidFill>
+                  <a:srgbClr val="FFFFFF"/>
+                </a:solidFill>
+                <a:latin typeface="Segoe UI"/>
+              </a:rPr>
+              <a:t>YOLO</a:t>
+            </a:r>
+          </a:p>
+        </p:txBody>
+      </p:sp>
+      <p:sp>
+        <p:nvSpPr>
+          <p:cNvPr id="27" name="TextBox 26"/>
+          <p:cNvSpPr txBox="1"/>
+          <p:nvPr/>
+        </p:nvSpPr>
+        <p:spPr>
+          <a:xfrm>
+            <a:off x="864107" y="3913631"/>
+            <a:ext cx="2377440" cy="320040"/>
+          </a:xfrm>
+          <a:prstGeom prst="rect">
+            <a:avLst/>
+          </a:prstGeom>
+          <a:noFill/>
+        </p:spPr>
+        <p:txBody>
+          <a:bodyPr wrap="square" anchor="t" lIns="45720" rIns="45720">
             <a:spAutoFit/>
           </a:bodyPr>
           <a:lstStyle/>
@@ -14170,6 +14715,856 @@
               </a:spcAft>
             </a:pPr>
             <a:r>
+              <a:rPr sz="1300" b="0">
+                <a:solidFill>
+                  <a:srgbClr val="FFFFFF"/>
+                </a:solidFill>
+                <a:latin typeface="Segoe UI"/>
+              </a:rPr>
+              <a:t>◀  memory carries it up</a:t>
+            </a:r>
+          </a:p>
+        </p:txBody>
+      </p:sp>
+      <p:sp>
+        <p:nvSpPr>
+          <p:cNvPr id="28" name="TextBox 27"/>
+          <p:cNvSpPr txBox="1"/>
+          <p:nvPr/>
+        </p:nvSpPr>
+        <p:spPr>
+          <a:xfrm>
+            <a:off x="3890771" y="3913631"/>
+            <a:ext cx="2377440" cy="320040"/>
+          </a:xfrm>
+          <a:prstGeom prst="rect">
+            <a:avLst/>
+          </a:prstGeom>
+          <a:noFill/>
+        </p:spPr>
+        <p:txBody>
+          <a:bodyPr wrap="square" anchor="t" lIns="45720" rIns="45720">
+            <a:spAutoFit/>
+          </a:bodyPr>
+          <a:lstStyle/>
+          <a:p>
+            <a:pPr algn="r">
+              <a:spcAft>
+                <a:spcPts val="0"/>
+              </a:spcAft>
+            </a:pPr>
+            <a:r>
+              <a:rPr sz="1300" b="0">
+                <a:solidFill>
+                  <a:srgbClr val="FFFFFF"/>
+                </a:solidFill>
+                <a:latin typeface="Segoe UI"/>
+              </a:rPr>
+              <a:t>and down  ▶</a:t>
+            </a:r>
+          </a:p>
+        </p:txBody>
+      </p:sp>
+      <p:sp>
+        <p:nvSpPr>
+          <p:cNvPr id="29" name="Rectangle 28"/>
+          <p:cNvSpPr/>
+          <p:nvPr/>
+        </p:nvSpPr>
+        <p:spPr>
+          <a:xfrm>
+            <a:off x="777240" y="4434840"/>
+            <a:ext cx="182880" cy="182880"/>
+          </a:xfrm>
+          <a:prstGeom prst="rect">
+            <a:avLst/>
+          </a:prstGeom>
+          <a:solidFill>
+            <a:srgbClr val="2FB35C"/>
+          </a:solidFill>
+          <a:ln>
+            <a:noFill/>
+          </a:ln>
+          <a:effectLst/>
+        </p:spPr>
+        <p:style>
+          <a:lnRef idx="1">
+            <a:schemeClr val="accent1"/>
+          </a:lnRef>
+          <a:fillRef idx="3">
+            <a:schemeClr val="accent1"/>
+          </a:fillRef>
+          <a:effectRef idx="2">
+            <a:schemeClr val="accent1"/>
+          </a:effectRef>
+          <a:fontRef idx="minor">
+            <a:schemeClr val="lt1"/>
+          </a:fontRef>
+        </p:style>
+        <p:txBody>
+          <a:bodyPr rtlCol="0" anchor="ctr"/>
+          <a:lstStyle/>
+          <a:p>
+            <a:pPr algn="ctr"/>
+          </a:p>
+        </p:txBody>
+      </p:sp>
+      <p:sp>
+        <p:nvSpPr>
+          <p:cNvPr id="30" name="TextBox 29"/>
+          <p:cNvSpPr txBox="1"/>
+          <p:nvPr/>
+        </p:nvSpPr>
+        <p:spPr>
+          <a:xfrm>
+            <a:off x="1051560" y="4370832"/>
+            <a:ext cx="5303520" cy="320040"/>
+          </a:xfrm>
+          <a:prstGeom prst="rect">
+            <a:avLst/>
+          </a:prstGeom>
+          <a:noFill/>
+        </p:spPr>
+        <p:txBody>
+          <a:bodyPr wrap="square" anchor="t" lIns="45720" rIns="45720">
+            <a:spAutoFit/>
+          </a:bodyPr>
+          <a:lstStyle/>
+          <a:p>
+            <a:pPr algn="l">
+              <a:spcAft>
+                <a:spcPts val="0"/>
+              </a:spcAft>
+            </a:pPr>
+            <a:r>
+              <a:rPr sz="1300" b="0">
+                <a:solidFill>
+                  <a:srgbClr val="E8EAF2"/>
+                </a:solidFill>
+                <a:latin typeface="Segoe UI"/>
+              </a:rPr>
+              <a:t>Start slice: </a:t>
+            </a:r>
+            <a:r>
+              <a:rPr sz="1300" b="1">
+                <a:solidFill>
+                  <a:srgbClr val="E8EAF2"/>
+                </a:solidFill>
+                <a:latin typeface="Segoe UI"/>
+              </a:rPr>
+              <a:t>the expert mask</a:t>
+            </a:r>
+            <a:r>
+              <a:rPr sz="1300" b="0">
+                <a:solidFill>
+                  <a:srgbClr val="E8EAF2"/>
+                </a:solidFill>
+                <a:latin typeface="Segoe UI"/>
+              </a:rPr>
+              <a:t> (fully sure)</a:t>
+            </a:r>
+          </a:p>
+        </p:txBody>
+      </p:sp>
+      <p:sp>
+        <p:nvSpPr>
+          <p:cNvPr id="31" name="Rectangle 30"/>
+          <p:cNvSpPr/>
+          <p:nvPr/>
+        </p:nvSpPr>
+        <p:spPr>
+          <a:xfrm>
+            <a:off x="777240" y="4800600"/>
+            <a:ext cx="182880" cy="182880"/>
+          </a:xfrm>
+          <a:prstGeom prst="rect">
+            <a:avLst/>
+          </a:prstGeom>
+          <a:solidFill>
+            <a:srgbClr val="3987E5"/>
+          </a:solidFill>
+          <a:ln>
+            <a:noFill/>
+          </a:ln>
+          <a:effectLst/>
+        </p:spPr>
+        <p:style>
+          <a:lnRef idx="1">
+            <a:schemeClr val="accent1"/>
+          </a:lnRef>
+          <a:fillRef idx="3">
+            <a:schemeClr val="accent1"/>
+          </a:fillRef>
+          <a:effectRef idx="2">
+            <a:schemeClr val="accent1"/>
+          </a:effectRef>
+          <a:fontRef idx="minor">
+            <a:schemeClr val="lt1"/>
+          </a:fontRef>
+        </p:style>
+        <p:txBody>
+          <a:bodyPr rtlCol="0" anchor="ctr"/>
+          <a:lstStyle/>
+          <a:p>
+            <a:pPr algn="ctr"/>
+          </a:p>
+        </p:txBody>
+      </p:sp>
+      <p:sp>
+        <p:nvSpPr>
+          <p:cNvPr id="32" name="TextBox 31"/>
+          <p:cNvSpPr txBox="1"/>
+          <p:nvPr/>
+        </p:nvSpPr>
+        <p:spPr>
+          <a:xfrm>
+            <a:off x="1051560" y="4736592"/>
+            <a:ext cx="5303520" cy="320040"/>
+          </a:xfrm>
+          <a:prstGeom prst="rect">
+            <a:avLst/>
+          </a:prstGeom>
+          <a:noFill/>
+        </p:spPr>
+        <p:txBody>
+          <a:bodyPr wrap="square" anchor="t" lIns="45720" rIns="45720">
+            <a:spAutoFit/>
+          </a:bodyPr>
+          <a:lstStyle/>
+          <a:p>
+            <a:pPr algn="l">
+              <a:spcAft>
+                <a:spcPts val="0"/>
+              </a:spcAft>
+            </a:pPr>
+            <a:r>
+              <a:rPr sz="1300" b="0">
+                <a:solidFill>
+                  <a:srgbClr val="E8EAF2"/>
+                </a:solidFill>
+                <a:latin typeface="Segoe UI"/>
+              </a:rPr>
+              <a:t>All other slices: </a:t>
+            </a:r>
+            <a:r>
+              <a:rPr sz="1300" b="1">
+                <a:solidFill>
+                  <a:srgbClr val="E8EAF2"/>
+                </a:solidFill>
+                <a:latin typeface="Segoe UI"/>
+              </a:rPr>
+              <a:t>YOLO's hint</a:t>
+            </a:r>
+            <a:r>
+              <a:rPr sz="1300" b="0">
+                <a:solidFill>
+                  <a:srgbClr val="E8EAF2"/>
+                </a:solidFill>
+                <a:latin typeface="Segoe UI"/>
+              </a:rPr>
+              <a:t>, as usual</a:t>
+            </a:r>
+          </a:p>
+        </p:txBody>
+      </p:sp>
+      <p:sp>
+        <p:nvSpPr>
+          <p:cNvPr id="33" name="TextBox 32"/>
+          <p:cNvSpPr txBox="1"/>
+          <p:nvPr/>
+        </p:nvSpPr>
+        <p:spPr>
+          <a:xfrm>
+            <a:off x="731520" y="5166360"/>
+            <a:ext cx="5669280" cy="320040"/>
+          </a:xfrm>
+          <a:prstGeom prst="rect">
+            <a:avLst/>
+          </a:prstGeom>
+          <a:noFill/>
+        </p:spPr>
+        <p:txBody>
+          <a:bodyPr wrap="square" anchor="t" lIns="45720" rIns="45720">
+            <a:spAutoFit/>
+          </a:bodyPr>
+          <a:lstStyle/>
+          <a:p>
+            <a:pPr algn="l">
+              <a:spcAft>
+                <a:spcPts val="0"/>
+              </a:spcAft>
+            </a:pPr>
+            <a:r>
+              <a:rPr sz="1200" b="0">
+                <a:solidFill>
+                  <a:srgbClr val="B8BED3"/>
+                </a:solidFill>
+                <a:latin typeface="Segoe UI"/>
+              </a:rPr>
+              <a:t>A what-if only: the expert mask is never available when predicting.</a:t>
+            </a:r>
+          </a:p>
+        </p:txBody>
+      </p:sp>
+      <p:sp>
+        <p:nvSpPr>
+          <p:cNvPr id="34" name="Rectangle 33"/>
+          <p:cNvSpPr/>
+          <p:nvPr/>
+        </p:nvSpPr>
+        <p:spPr>
+          <a:xfrm>
+            <a:off x="6766560" y="2103120"/>
+            <a:ext cx="4846320" cy="3520440"/>
+          </a:xfrm>
+          <a:prstGeom prst="rect">
+            <a:avLst/>
+          </a:prstGeom>
+          <a:solidFill>
+            <a:srgbClr val="1A1F33"/>
+          </a:solidFill>
+          <a:ln>
+            <a:noFill/>
+          </a:ln>
+          <a:effectLst/>
+        </p:spPr>
+        <p:style>
+          <a:lnRef idx="1">
+            <a:schemeClr val="accent1"/>
+          </a:lnRef>
+          <a:fillRef idx="3">
+            <a:schemeClr val="accent1"/>
+          </a:fillRef>
+          <a:effectRef idx="2">
+            <a:schemeClr val="accent1"/>
+          </a:effectRef>
+          <a:fontRef idx="minor">
+            <a:schemeClr val="lt1"/>
+          </a:fontRef>
+        </p:style>
+        <p:txBody>
+          <a:bodyPr rtlCol="0" anchor="ctr"/>
+          <a:lstStyle/>
+          <a:p>
+            <a:pPr algn="ctr"/>
+          </a:p>
+        </p:txBody>
+      </p:sp>
+      <p:sp>
+        <p:nvSpPr>
+          <p:cNvPr id="35" name="TextBox 34"/>
+          <p:cNvSpPr txBox="1"/>
+          <p:nvPr/>
+        </p:nvSpPr>
+        <p:spPr>
+          <a:xfrm>
+            <a:off x="6903720" y="2212848"/>
+            <a:ext cx="2240280" cy="685800"/>
+          </a:xfrm>
+          <a:prstGeom prst="rect">
+            <a:avLst/>
+          </a:prstGeom>
+          <a:noFill/>
+        </p:spPr>
+        <p:txBody>
+          <a:bodyPr wrap="square" anchor="t" lIns="45720" rIns="45720">
+            <a:spAutoFit/>
+          </a:bodyPr>
+          <a:lstStyle/>
+          <a:p>
+            <a:pPr algn="ctr">
+              <a:spcAft>
+                <a:spcPts val="0"/>
+              </a:spcAft>
+            </a:pPr>
+            <a:r>
+              <a:rPr sz="3600" b="1">
+                <a:solidFill>
+                  <a:srgbClr val="2FB35C"/>
+                </a:solidFill>
+                <a:latin typeface="Segoe UI"/>
+              </a:rPr>
+              <a:t>+0.0047</a:t>
+            </a:r>
+          </a:p>
+        </p:txBody>
+      </p:sp>
+      <p:sp>
+        <p:nvSpPr>
+          <p:cNvPr id="36" name="TextBox 35"/>
+          <p:cNvSpPr txBox="1"/>
+          <p:nvPr/>
+        </p:nvSpPr>
+        <p:spPr>
+          <a:xfrm>
+            <a:off x="6903720" y="2898648"/>
+            <a:ext cx="2240280" cy="548640"/>
+          </a:xfrm>
+          <a:prstGeom prst="rect">
+            <a:avLst/>
+          </a:prstGeom>
+          <a:noFill/>
+        </p:spPr>
+        <p:txBody>
+          <a:bodyPr wrap="square" anchor="t" lIns="45720" rIns="45720">
+            <a:spAutoFit/>
+          </a:bodyPr>
+          <a:lstStyle/>
+          <a:p>
+            <a:pPr algn="ctr">
+              <a:spcAft>
+                <a:spcPts val="0"/>
+              </a:spcAft>
+            </a:pPr>
+            <a:r>
+              <a:rPr sz="1200" b="0">
+                <a:solidFill>
+                  <a:srgbClr val="B8BED3"/>
+                </a:solidFill>
+                <a:latin typeface="Segoe UI"/>
+              </a:rPr>
+              <a:t>val 3D Dice
+0.8928 → 0.8975</a:t>
+            </a:r>
+          </a:p>
+        </p:txBody>
+      </p:sp>
+      <p:sp>
+        <p:nvSpPr>
+          <p:cNvPr id="37" name="TextBox 36"/>
+          <p:cNvSpPr txBox="1"/>
+          <p:nvPr/>
+        </p:nvSpPr>
+        <p:spPr>
+          <a:xfrm>
+            <a:off x="9235440" y="2212848"/>
+            <a:ext cx="2240280" cy="685800"/>
+          </a:xfrm>
+          <a:prstGeom prst="rect">
+            <a:avLst/>
+          </a:prstGeom>
+          <a:noFill/>
+        </p:spPr>
+        <p:txBody>
+          <a:bodyPr wrap="square" anchor="t" lIns="45720" rIns="45720">
+            <a:spAutoFit/>
+          </a:bodyPr>
+          <a:lstStyle/>
+          <a:p>
+            <a:pPr algn="ctr">
+              <a:spcAft>
+                <a:spcPts val="0"/>
+              </a:spcAft>
+            </a:pPr>
+            <a:r>
+              <a:rPr sz="3600" b="1">
+                <a:solidFill>
+                  <a:srgbClr val="3987E5"/>
+                </a:solidFill>
+                <a:latin typeface="Segoe UI"/>
+              </a:rPr>
+              <a:t>173 / 1</a:t>
+            </a:r>
+          </a:p>
+        </p:txBody>
+      </p:sp>
+      <p:sp>
+        <p:nvSpPr>
+          <p:cNvPr id="38" name="TextBox 37"/>
+          <p:cNvSpPr txBox="1"/>
+          <p:nvPr/>
+        </p:nvSpPr>
+        <p:spPr>
+          <a:xfrm>
+            <a:off x="9235440" y="2898648"/>
+            <a:ext cx="2240280" cy="548640"/>
+          </a:xfrm>
+          <a:prstGeom prst="rect">
+            <a:avLst/>
+          </a:prstGeom>
+          <a:noFill/>
+        </p:spPr>
+        <p:txBody>
+          <a:bodyPr wrap="square" anchor="t" lIns="45720" rIns="45720">
+            <a:spAutoFit/>
+          </a:bodyPr>
+          <a:lstStyle/>
+          <a:p>
+            <a:pPr algn="ctr">
+              <a:spcAft>
+                <a:spcPts val="0"/>
+              </a:spcAft>
+            </a:pPr>
+            <a:r>
+              <a:rPr sz="1200" b="0">
+                <a:solidFill>
+                  <a:srgbClr val="B8BED3"/>
+                </a:solidFill>
+                <a:latin typeface="Segoe UI"/>
+              </a:rPr>
+              <a:t>patients
+better / worse</a:t>
+            </a:r>
+          </a:p>
+        </p:txBody>
+      </p:sp>
+      <p:sp>
+        <p:nvSpPr>
+          <p:cNvPr id="39" name="TextBox 38"/>
+          <p:cNvSpPr txBox="1"/>
+          <p:nvPr/>
+        </p:nvSpPr>
+        <p:spPr>
+          <a:xfrm>
+            <a:off x="6949440" y="3639312"/>
+            <a:ext cx="4480560" cy="320040"/>
+          </a:xfrm>
+          <a:prstGeom prst="rect">
+            <a:avLst/>
+          </a:prstGeom>
+          <a:noFill/>
+        </p:spPr>
+        <p:txBody>
+          <a:bodyPr wrap="square" anchor="t" lIns="45720" rIns="45720">
+            <a:spAutoFit/>
+          </a:bodyPr>
+          <a:lstStyle/>
+          <a:p>
+            <a:pPr algn="l">
+              <a:spcAft>
+                <a:spcPts val="0"/>
+              </a:spcAft>
+            </a:pPr>
+            <a:r>
+              <a:rPr sz="1300" b="1">
+                <a:solidFill>
+                  <a:srgbClr val="E8EAF2"/>
+                </a:solidFill>
+                <a:latin typeface="Segoe UI"/>
+              </a:rPr>
+              <a:t>Gain over today's pipeline (val)</a:t>
+            </a:r>
+          </a:p>
+        </p:txBody>
+      </p:sp>
+      <p:sp>
+        <p:nvSpPr>
+          <p:cNvPr id="40" name="TextBox 39"/>
+          <p:cNvSpPr txBox="1"/>
+          <p:nvPr/>
+        </p:nvSpPr>
+        <p:spPr>
+          <a:xfrm>
+            <a:off x="6949440" y="4023360"/>
+            <a:ext cx="4480560" cy="274320"/>
+          </a:xfrm>
+          <a:prstGeom prst="rect">
+            <a:avLst/>
+          </a:prstGeom>
+          <a:noFill/>
+        </p:spPr>
+        <p:txBody>
+          <a:bodyPr wrap="square" anchor="t" lIns="45720" rIns="45720">
+            <a:spAutoFit/>
+          </a:bodyPr>
+          <a:lstStyle/>
+          <a:p>
+            <a:pPr algn="l">
+              <a:spcAft>
+                <a:spcPts val="0"/>
+              </a:spcAft>
+            </a:pPr>
+            <a:r>
+              <a:rPr sz="1200" b="0">
+                <a:solidFill>
+                  <a:srgbClr val="B8BED3"/>
+                </a:solidFill>
+                <a:latin typeface="Segoe UI"/>
+              </a:rPr>
+              <a:t>Best confidence idea (blob → 'don't know')</a:t>
+            </a:r>
+          </a:p>
+        </p:txBody>
+      </p:sp>
+      <p:sp>
+        <p:nvSpPr>
+          <p:cNvPr id="41" name="Rectangle 40"/>
+          <p:cNvSpPr/>
+          <p:nvPr/>
+        </p:nvSpPr>
+        <p:spPr>
+          <a:xfrm>
+            <a:off x="6995160" y="4315968"/>
+            <a:ext cx="768096" cy="256032"/>
+          </a:xfrm>
+          <a:prstGeom prst="rect">
+            <a:avLst/>
+          </a:prstGeom>
+          <a:solidFill>
+            <a:srgbClr val="3987E5"/>
+          </a:solidFill>
+          <a:ln>
+            <a:noFill/>
+          </a:ln>
+          <a:effectLst/>
+        </p:spPr>
+        <p:style>
+          <a:lnRef idx="1">
+            <a:schemeClr val="accent1"/>
+          </a:lnRef>
+          <a:fillRef idx="3">
+            <a:schemeClr val="accent1"/>
+          </a:fillRef>
+          <a:effectRef idx="2">
+            <a:schemeClr val="accent1"/>
+          </a:effectRef>
+          <a:fontRef idx="minor">
+            <a:schemeClr val="lt1"/>
+          </a:fontRef>
+        </p:style>
+        <p:txBody>
+          <a:bodyPr rtlCol="0" anchor="ctr"/>
+          <a:lstStyle/>
+          <a:p>
+            <a:pPr algn="ctr"/>
+          </a:p>
+        </p:txBody>
+      </p:sp>
+      <p:sp>
+        <p:nvSpPr>
+          <p:cNvPr id="42" name="TextBox 41"/>
+          <p:cNvSpPr txBox="1"/>
+          <p:nvPr/>
+        </p:nvSpPr>
+        <p:spPr>
+          <a:xfrm>
+            <a:off x="7836408" y="4279392"/>
+            <a:ext cx="914400" cy="320040"/>
+          </a:xfrm>
+          <a:prstGeom prst="rect">
+            <a:avLst/>
+          </a:prstGeom>
+          <a:noFill/>
+        </p:spPr>
+        <p:txBody>
+          <a:bodyPr wrap="square" anchor="t" lIns="45720" rIns="45720">
+            <a:spAutoFit/>
+          </a:bodyPr>
+          <a:lstStyle/>
+          <a:p>
+            <a:pPr algn="l">
+              <a:spcAft>
+                <a:spcPts val="0"/>
+              </a:spcAft>
+            </a:pPr>
+            <a:r>
+              <a:rPr sz="1300" b="1">
+                <a:solidFill>
+                  <a:srgbClr val="E8EAF2"/>
+                </a:solidFill>
+                <a:latin typeface="Segoe UI"/>
+              </a:rPr>
+              <a:t>+0.0012</a:t>
+            </a:r>
+          </a:p>
+        </p:txBody>
+      </p:sp>
+      <p:sp>
+        <p:nvSpPr>
+          <p:cNvPr id="43" name="TextBox 42"/>
+          <p:cNvSpPr txBox="1"/>
+          <p:nvPr/>
+        </p:nvSpPr>
+        <p:spPr>
+          <a:xfrm>
+            <a:off x="6949440" y="4736592"/>
+            <a:ext cx="4480560" cy="274320"/>
+          </a:xfrm>
+          <a:prstGeom prst="rect">
+            <a:avLst/>
+          </a:prstGeom>
+          <a:noFill/>
+        </p:spPr>
+        <p:txBody>
+          <a:bodyPr wrap="square" anchor="t" lIns="45720" rIns="45720">
+            <a:spAutoFit/>
+          </a:bodyPr>
+          <a:lstStyle/>
+          <a:p>
+            <a:pPr algn="l">
+              <a:spcAft>
+                <a:spcPts val="0"/>
+              </a:spcAft>
+            </a:pPr>
+            <a:r>
+              <a:rPr sz="1200" b="0">
+                <a:solidFill>
+                  <a:srgbClr val="B8BED3"/>
+                </a:solidFill>
+                <a:latin typeface="Segoe UI"/>
+              </a:rPr>
+              <a:t>Expert mask on the start slice</a:t>
+            </a:r>
+          </a:p>
+        </p:txBody>
+      </p:sp>
+      <p:sp>
+        <p:nvSpPr>
+          <p:cNvPr id="44" name="Rectangle 43"/>
+          <p:cNvSpPr/>
+          <p:nvPr/>
+        </p:nvSpPr>
+        <p:spPr>
+          <a:xfrm>
+            <a:off x="6995160" y="5029200"/>
+            <a:ext cx="3008376" cy="256032"/>
+          </a:xfrm>
+          <a:prstGeom prst="rect">
+            <a:avLst/>
+          </a:prstGeom>
+          <a:solidFill>
+            <a:srgbClr val="2FB35C"/>
+          </a:solidFill>
+          <a:ln>
+            <a:noFill/>
+          </a:ln>
+          <a:effectLst/>
+        </p:spPr>
+        <p:style>
+          <a:lnRef idx="1">
+            <a:schemeClr val="accent1"/>
+          </a:lnRef>
+          <a:fillRef idx="3">
+            <a:schemeClr val="accent1"/>
+          </a:fillRef>
+          <a:effectRef idx="2">
+            <a:schemeClr val="accent1"/>
+          </a:effectRef>
+          <a:fontRef idx="minor">
+            <a:schemeClr val="lt1"/>
+          </a:fontRef>
+        </p:style>
+        <p:txBody>
+          <a:bodyPr rtlCol="0" anchor="ctr"/>
+          <a:lstStyle/>
+          <a:p>
+            <a:pPr algn="ctr"/>
+          </a:p>
+        </p:txBody>
+      </p:sp>
+      <p:sp>
+        <p:nvSpPr>
+          <p:cNvPr id="45" name="TextBox 44"/>
+          <p:cNvSpPr txBox="1"/>
+          <p:nvPr/>
+        </p:nvSpPr>
+        <p:spPr>
+          <a:xfrm>
+            <a:off x="10076688" y="4992624"/>
+            <a:ext cx="914400" cy="320040"/>
+          </a:xfrm>
+          <a:prstGeom prst="rect">
+            <a:avLst/>
+          </a:prstGeom>
+          <a:noFill/>
+        </p:spPr>
+        <p:txBody>
+          <a:bodyPr wrap="square" anchor="t" lIns="45720" rIns="45720">
+            <a:spAutoFit/>
+          </a:bodyPr>
+          <a:lstStyle/>
+          <a:p>
+            <a:pPr algn="l">
+              <a:spcAft>
+                <a:spcPts val="0"/>
+              </a:spcAft>
+            </a:pPr>
+            <a:r>
+              <a:rPr sz="1300" b="1">
+                <a:solidFill>
+                  <a:srgbClr val="E8EAF2"/>
+                </a:solidFill>
+                <a:latin typeface="Segoe UI"/>
+              </a:rPr>
+              <a:t>+0.0047</a:t>
+            </a:r>
+          </a:p>
+        </p:txBody>
+      </p:sp>
+      <p:sp>
+        <p:nvSpPr>
+          <p:cNvPr id="46" name="Rounded Rectangle 45"/>
+          <p:cNvSpPr/>
+          <p:nvPr/>
+        </p:nvSpPr>
+        <p:spPr>
+          <a:xfrm>
+            <a:off x="548640" y="5806440"/>
+            <a:ext cx="11064240" cy="566928"/>
+          </a:xfrm>
+          <a:prstGeom prst="roundRect">
+            <a:avLst>
+              <a:gd name="adj" fmla="val 15000"/>
+            </a:avLst>
+          </a:prstGeom>
+          <a:solidFill>
+            <a:srgbClr val="1A1F33"/>
+          </a:solidFill>
+          <a:ln>
+            <a:noFill/>
+          </a:ln>
+          <a:effectLst/>
+        </p:spPr>
+        <p:style>
+          <a:lnRef idx="1">
+            <a:schemeClr val="accent1"/>
+          </a:lnRef>
+          <a:fillRef idx="3">
+            <a:schemeClr val="accent1"/>
+          </a:fillRef>
+          <a:effectRef idx="2">
+            <a:schemeClr val="accent1"/>
+          </a:effectRef>
+          <a:fontRef idx="minor">
+            <a:schemeClr val="lt1"/>
+          </a:fontRef>
+        </p:style>
+        <p:txBody>
+          <a:bodyPr rtlCol="0" anchor="ctr"/>
+          <a:lstStyle/>
+          <a:p>
+            <a:pPr algn="ctr"/>
+          </a:p>
+        </p:txBody>
+      </p:sp>
+      <p:sp>
+        <p:nvSpPr>
+          <p:cNvPr id="47" name="TextBox 46"/>
+          <p:cNvSpPr txBox="1"/>
+          <p:nvPr/>
+        </p:nvSpPr>
+        <p:spPr>
+          <a:xfrm>
+            <a:off x="777240" y="5806440"/>
+            <a:ext cx="10744200" cy="566928"/>
+          </a:xfrm>
+          <a:prstGeom prst="rect">
+            <a:avLst/>
+          </a:prstGeom>
+          <a:noFill/>
+        </p:spPr>
+        <p:txBody>
+          <a:bodyPr wrap="square" anchor="ctr" lIns="45720" rIns="45720">
+            <a:spAutoFit/>
+          </a:bodyPr>
+          <a:lstStyle/>
+          <a:p>
+            <a:pPr algn="l">
+              <a:spcAft>
+                <a:spcPts val="0"/>
+              </a:spcAft>
+            </a:pPr>
+            <a:r>
               <a:rPr sz="1600" b="1">
                 <a:solidFill>
                   <a:srgbClr val="E8EAF2"/>
@@ -14185,7 +15580,7 @@
                 </a:solidFill>
                 <a:latin typeface="Segoe UI"/>
               </a:rPr>
-              <a:t> Next gains come from sharper edges and small tumours, then proving it on outside data.</a:t>
+              <a:t> one correct slice, carried by memory, adds +0.005 Dice: 4× the best confidence idea.</a:t>
             </a:r>
           </a:p>
         </p:txBody>
@@ -14217,7 +15612,7 @@
         <p:spPr>
           <a:xfrm>
             <a:off x="548640" y="256032"/>
-            <a:ext cx="8229600" cy="320040"/>
+            <a:ext cx="8229600" cy="274320"/>
           </a:xfrm>
           <a:prstGeom prst="rect">
             <a:avLst/>
@@ -14225,7 +15620,7 @@
           <a:noFill/>
         </p:spPr>
         <p:txBody>
-          <a:bodyPr wrap="square" lIns="45720" rIns="45720" anchor="t">
+          <a:bodyPr wrap="square" anchor="t" lIns="45720" rIns="45720">
             <a:spAutoFit/>
           </a:bodyPr>
           <a:lstStyle/>
@@ -14238,11 +15633,11 @@
             <a:r>
               <a:rPr sz="1200" b="0">
                 <a:solidFill>
-                  <a:srgbClr val="E06A2E"/>
-                </a:solidFill>
-                <a:latin typeface="Segoe UI"/>
-              </a:rPr>
-              <a:t>NEXT STEPS</a:t>
+                  <a:srgbClr val="FFFFFF"/>
+                </a:solidFill>
+                <a:latin typeface="Segoe UI"/>
+              </a:rPr>
+              <a:t>RESULTS · TEST, 324 PATIENTS</a:t>
             </a:r>
           </a:p>
         </p:txBody>
@@ -14256,7 +15651,7 @@
         <p:spPr>
           <a:xfrm>
             <a:off x="548640" y="475488"/>
-            <a:ext cx="11064240" cy="731520"/>
+            <a:ext cx="11064240" cy="585216"/>
           </a:xfrm>
           <a:prstGeom prst="rect">
             <a:avLst/>
@@ -14264,7 +15659,7 @@
           <a:noFill/>
         </p:spPr>
         <p:txBody>
-          <a:bodyPr wrap="square" lIns="45720" rIns="45720" anchor="t">
+          <a:bodyPr wrap="square" anchor="t" lIns="45720" rIns="45720">
             <a:spAutoFit/>
           </a:bodyPr>
           <a:lstStyle/>
@@ -14277,11 +15672,11 @@
             <a:r>
               <a:rPr sz="3200" b="0">
                 <a:solidFill>
-                  <a:srgbClr val="E8EAF2"/>
-                </a:solidFill>
-                <a:latin typeface="Segoe UI"/>
-              </a:rPr>
-              <a:t>Future work: fewer missed and false slices</a:t>
+                  <a:srgbClr val="FFFFFF"/>
+                </a:solidFill>
+                <a:latin typeface="Segoe UI"/>
+              </a:rPr>
+              <a:t>Separate tumour pieces: MedSAM2 needs YOLO to see them</a:t>
             </a:r>
           </a:p>
         </p:txBody>
@@ -14295,7 +15690,7 @@
         <p:spPr>
           <a:xfrm>
             <a:off x="10972800" y="6446520"/>
-            <a:ext cx="914400" cy="261610"/>
+            <a:ext cx="914400" cy="265176"/>
           </a:xfrm>
           <a:prstGeom prst="rect">
             <a:avLst/>
@@ -14303,7 +15698,7 @@
           <a:noFill/>
         </p:spPr>
         <p:txBody>
-          <a:bodyPr wrap="square" lIns="45720" rIns="45720" anchor="t">
+          <a:bodyPr wrap="square" anchor="t" lIns="45720" rIns="45720">
             <a:spAutoFit/>
           </a:bodyPr>
           <a:lstStyle/>
@@ -14314,36 +15709,32 @@
               </a:spcAft>
             </a:pPr>
             <a:r>
-              <a:rPr lang="en-US" sz="1100" b="0" dirty="0">
-                <a:solidFill>
-                  <a:schemeClr val="bg1"/>
+              <a:rPr sz="1100" b="0">
+                <a:solidFill>
+                  <a:srgbClr val="FFFFFF"/>
                 </a:solidFill>
                 <a:latin typeface="Segoe UI"/>
               </a:rPr>
               <a:t>17</a:t>
             </a:r>
-            <a:endParaRPr sz="1100" b="0" dirty="0">
-              <a:solidFill>
-                <a:schemeClr val="bg1"/>
-              </a:solidFill>
-              <a:latin typeface="Segoe UI"/>
-            </a:endParaRPr>
-          </a:p>
-        </p:txBody>
-      </p:sp>
-      <p:sp>
-        <p:nvSpPr>
-          <p:cNvPr id="5" name="Rectangle 4"/>
+          </a:p>
+        </p:txBody>
+      </p:sp>
+      <p:sp>
+        <p:nvSpPr>
+          <p:cNvPr id="5" name="Rounded Rectangle 4"/>
           <p:cNvSpPr/>
           <p:nvPr/>
         </p:nvSpPr>
         <p:spPr>
           <a:xfrm>
-            <a:off x="548640" y="2103120"/>
-            <a:ext cx="3566160" cy="3520440"/>
-          </a:xfrm>
-          <a:prstGeom prst="rect">
-            <a:avLst/>
+            <a:off x="548640" y="1325880"/>
+            <a:ext cx="11064240" cy="566928"/>
+          </a:xfrm>
+          <a:prstGeom prst="roundRect">
+            <a:avLst>
+              <a:gd name="adj" fmla="val 15000"/>
+            </a:avLst>
           </a:prstGeom>
           <a:solidFill>
             <a:srgbClr val="1A1F33"/>
@@ -14372,7 +15763,6 @@
           <a:lstStyle/>
           <a:p>
             <a:pPr algn="ctr"/>
-            <a:endParaRPr/>
           </a:p>
         </p:txBody>
       </p:sp>
@@ -14384,8 +15774,8 @@
         </p:nvSpPr>
         <p:spPr>
           <a:xfrm>
-            <a:off x="731520" y="2240280"/>
-            <a:ext cx="3200400" cy="457200"/>
+            <a:off x="777240" y="1325880"/>
+            <a:ext cx="10744200" cy="566928"/>
           </a:xfrm>
           <a:prstGeom prst="rect">
             <a:avLst/>
@@ -14393,55 +15783,25 @@
           <a:noFill/>
         </p:spPr>
         <p:txBody>
-          <a:bodyPr wrap="square" lIns="45720" rIns="45720" anchor="t">
+          <a:bodyPr wrap="square" anchor="ctr" lIns="45720" rIns="45720">
             <a:spAutoFit/>
           </a:bodyPr>
           <a:lstStyle/>
           <a:p>
             <a:pPr algn="l">
               <a:spcAft>
-                <a:spcPts val="600"/>
+                <a:spcPts val="0"/>
               </a:spcAft>
             </a:pPr>
             <a:r>
-              <a:rPr sz="1900" b="1">
-                <a:solidFill>
-                  <a:srgbClr val="E06A2E"/>
-                </a:solidFill>
-                <a:latin typeface="Segoe UI"/>
-              </a:rPr>
-              <a:t>Fewer false slices</a:t>
-            </a:r>
-          </a:p>
-        </p:txBody>
-      </p:sp>
-      <p:sp>
-        <p:nvSpPr>
-          <p:cNvPr id="7" name="TextBox 6"/>
-          <p:cNvSpPr txBox="1"/>
-          <p:nvPr/>
-        </p:nvSpPr>
-        <p:spPr>
-          <a:xfrm>
-            <a:off x="731520" y="2788920"/>
-            <a:ext cx="3200400" cy="2743200"/>
-          </a:xfrm>
-          <a:prstGeom prst="rect">
-            <a:avLst/>
-          </a:prstGeom>
-          <a:noFill/>
-        </p:spPr>
-        <p:txBody>
-          <a:bodyPr wrap="square" lIns="45720" rIns="45720" anchor="t">
-            <a:spAutoFit/>
-          </a:bodyPr>
-          <a:lstStyle/>
-          <a:p>
-            <a:pPr algn="l">
-              <a:spcAft>
-                <a:spcPts val="1200"/>
-              </a:spcAft>
-            </a:pPr>
+              <a:rPr sz="1600" b="1">
+                <a:solidFill>
+                  <a:srgbClr val="E8EAF2"/>
+                </a:solidFill>
+                <a:latin typeface="Segoe UI"/>
+              </a:rPr>
+              <a:t>35 of 324 patients (11%)</a:t>
+            </a:r>
             <a:r>
               <a:rPr sz="1600" b="0">
                 <a:solidFill>
@@ -14449,37 +15809,21 @@
                 </a:solidFill>
                 <a:latin typeface="Segoe UI"/>
               </a:rPr>
-              <a:t>•  Smooth YOLO across neighbouring slices, so a one-slice false alarm fades before it becomes a hint.</a:t>
-            </a:r>
-          </a:p>
-          <a:p>
-            <a:pPr algn="l">
-              <a:spcAft>
-                <a:spcPts val="1200"/>
-              </a:spcAft>
-            </a:pPr>
-            <a:r>
-              <a:rPr sz="1600" b="0">
-                <a:solidFill>
-                  <a:srgbClr val="E8EAF2"/>
-                </a:solidFill>
-                <a:latin typeface="Segoe UI"/>
-              </a:rPr>
-              <a:t>•  Let MedSAM2's 'tumour here?' score wipe empty slices (the switch is in the code, not yet tested).</a:t>
-            </a:r>
-          </a:p>
-        </p:txBody>
-      </p:sp>
-      <p:sp>
-        <p:nvSpPr>
-          <p:cNvPr id="8" name="Rectangle 7"/>
+              <a:t> have tumour pieces that share no slice. The start slice is in the largest piece in 33 of them.</a:t>
+            </a:r>
+          </a:p>
+        </p:txBody>
+      </p:sp>
+      <p:sp>
+        <p:nvSpPr>
+          <p:cNvPr id="7" name="Rectangle 6"/>
           <p:cNvSpPr/>
           <p:nvPr/>
         </p:nvSpPr>
         <p:spPr>
           <a:xfrm>
-            <a:off x="4297679" y="2103120"/>
-            <a:ext cx="3566160" cy="3520440"/>
+            <a:off x="548640" y="2103120"/>
+            <a:ext cx="5486400" cy="3520440"/>
           </a:xfrm>
           <a:prstGeom prst="rect">
             <a:avLst/>
@@ -14511,20 +15855,19 @@
           <a:lstStyle/>
           <a:p>
             <a:pPr algn="ctr"/>
-            <a:endParaRPr/>
-          </a:p>
-        </p:txBody>
-      </p:sp>
-      <p:sp>
-        <p:nvSpPr>
-          <p:cNvPr id="9" name="TextBox 8"/>
+          </a:p>
+        </p:txBody>
+      </p:sp>
+      <p:sp>
+        <p:nvSpPr>
+          <p:cNvPr id="8" name="TextBox 7"/>
           <p:cNvSpPr txBox="1"/>
           <p:nvPr/>
         </p:nvSpPr>
         <p:spPr>
           <a:xfrm>
-            <a:off x="4480559" y="2240280"/>
-            <a:ext cx="3200400" cy="457200"/>
+            <a:off x="731520" y="2212848"/>
+            <a:ext cx="5120640" cy="411480"/>
           </a:xfrm>
           <a:prstGeom prst="rect">
             <a:avLst/>
@@ -14532,99 +15875,46 @@
           <a:noFill/>
         </p:spPr>
         <p:txBody>
-          <a:bodyPr wrap="square" lIns="45720" rIns="45720" anchor="t">
+          <a:bodyPr wrap="square" anchor="t" lIns="45720" rIns="45720">
             <a:spAutoFit/>
           </a:bodyPr>
           <a:lstStyle/>
           <a:p>
             <a:pPr algn="l">
               <a:spcAft>
-                <a:spcPts val="600"/>
+                <a:spcPts val="0"/>
               </a:spcAft>
             </a:pPr>
             <a:r>
               <a:rPr sz="1900" b="1">
                 <a:solidFill>
-                  <a:srgbClr val="3987E5"/>
-                </a:solidFill>
-                <a:latin typeface="Segoe UI"/>
-              </a:rPr>
-              <a:t>Hints &amp; small tumours</a:t>
-            </a:r>
-          </a:p>
-        </p:txBody>
-      </p:sp>
-      <p:sp>
-        <p:nvSpPr>
-          <p:cNvPr id="10" name="TextBox 9"/>
-          <p:cNvSpPr txBox="1"/>
-          <p:nvPr/>
-        </p:nvSpPr>
-        <p:spPr>
-          <a:xfrm>
-            <a:off x="4480559" y="2788920"/>
-            <a:ext cx="3200400" cy="2743200"/>
-          </a:xfrm>
-          <a:prstGeom prst="rect">
-            <a:avLst/>
-          </a:prstGeom>
-          <a:noFill/>
-        </p:spPr>
-        <p:txBody>
-          <a:bodyPr wrap="square" lIns="45720" rIns="45720" anchor="t">
-            <a:spAutoFit/>
-          </a:bodyPr>
-          <a:lstStyle/>
-          <a:p>
-            <a:pPr algn="l">
-              <a:spcAft>
-                <a:spcPts val="1200"/>
-              </a:spcAft>
-            </a:pPr>
-            <a:r>
-              <a:rPr sz="1600" b="0">
-                <a:solidFill>
-                  <a:srgbClr val="E8EAF2"/>
-                </a:solidFill>
-                <a:latin typeface="Segoe UI"/>
-              </a:rPr>
-              <a:t>•  Multiply each pixel of the hint by its shape’s confidence, so a 0.06 shape becomes faint instead of as loud as a 0.90 one.</a:t>
-            </a:r>
-          </a:p>
-          <a:p>
-            <a:pPr algn="l">
-              <a:spcAft>
-                <a:spcPts val="1200"/>
-              </a:spcAft>
-            </a:pPr>
-            <a:r>
-              <a:rPr sz="1600" b="0">
-                <a:solidFill>
-                  <a:srgbClr val="E8EAF2"/>
-                </a:solidFill>
-                <a:latin typeface="Segoe UI"/>
-              </a:rPr>
-              <a:t>•  Train more on tumours under 10 mL.</a:t>
-            </a:r>
-          </a:p>
-        </p:txBody>
-      </p:sp>
-      <p:sp>
-        <p:nvSpPr>
-          <p:cNvPr id="11" name="Rectangle 10"/>
+                  <a:srgbClr val="E06A2E"/>
+                </a:solidFill>
+                <a:latin typeface="Segoe UI"/>
+              </a:rPr>
+              <a:t>What MedSAM2 faces</a:t>
+            </a:r>
+          </a:p>
+        </p:txBody>
+      </p:sp>
+      <p:sp>
+        <p:nvSpPr>
+          <p:cNvPr id="9" name="Rounded Rectangle 8"/>
           <p:cNvSpPr/>
           <p:nvPr/>
         </p:nvSpPr>
         <p:spPr>
           <a:xfrm>
-            <a:off x="8046719" y="2103120"/>
-            <a:ext cx="3566160" cy="3520440"/>
-          </a:xfrm>
-          <a:prstGeom prst="rect">
-            <a:avLst/>
+            <a:off x="813816" y="2971800"/>
+            <a:ext cx="384048" cy="868680"/>
+          </a:xfrm>
+          <a:prstGeom prst="roundRect">
+            <a:avLst>
+              <a:gd name="adj" fmla="val 15000"/>
+            </a:avLst>
           </a:prstGeom>
           <a:solidFill>
-            <a:srgbClr val="1A1F33"/>
+            <a:srgbClr val="2FB35C"/>
           </a:solidFill>
           <a:ln>
             <a:noFill/>
@@ -14650,114 +15940,19 @@
           <a:lstStyle/>
           <a:p>
             <a:pPr algn="ctr"/>
-            <a:endParaRPr/>
-          </a:p>
-        </p:txBody>
-      </p:sp>
-      <p:sp>
-        <p:nvSpPr>
-          <p:cNvPr id="12" name="TextBox 11"/>
-          <p:cNvSpPr txBox="1"/>
-          <p:nvPr/>
-        </p:nvSpPr>
-        <p:spPr>
-          <a:xfrm>
-            <a:off x="8229599" y="2240280"/>
-            <a:ext cx="3200400" cy="457200"/>
-          </a:xfrm>
-          <a:prstGeom prst="rect">
-            <a:avLst/>
-          </a:prstGeom>
-          <a:noFill/>
-        </p:spPr>
-        <p:txBody>
-          <a:bodyPr wrap="square" lIns="45720" rIns="45720" anchor="t">
-            <a:spAutoFit/>
-          </a:bodyPr>
-          <a:lstStyle/>
-          <a:p>
-            <a:pPr algn="l">
-              <a:spcAft>
-                <a:spcPts val="600"/>
-              </a:spcAft>
-            </a:pPr>
-            <a:r>
-              <a:rPr sz="1900" b="1">
-                <a:solidFill>
-                  <a:srgbClr val="2FB35C"/>
-                </a:solidFill>
-                <a:latin typeface="Segoe UI"/>
-              </a:rPr>
-              <a:t>Much more data</a:t>
-            </a:r>
-          </a:p>
-        </p:txBody>
-      </p:sp>
-      <p:sp>
-        <p:nvSpPr>
-          <p:cNvPr id="13" name="TextBox 12"/>
-          <p:cNvSpPr txBox="1"/>
-          <p:nvPr/>
-        </p:nvSpPr>
-        <p:spPr>
-          <a:xfrm>
-            <a:off x="8229599" y="2788920"/>
-            <a:ext cx="3200400" cy="2743200"/>
-          </a:xfrm>
-          <a:prstGeom prst="rect">
-            <a:avLst/>
-          </a:prstGeom>
-          <a:noFill/>
-        </p:spPr>
-        <p:txBody>
-          <a:bodyPr wrap="square" lIns="45720" rIns="45720" anchor="t">
-            <a:spAutoFit/>
-          </a:bodyPr>
-          <a:lstStyle/>
-          <a:p>
-            <a:pPr algn="l">
-              <a:spcAft>
-                <a:spcPts val="1200"/>
-              </a:spcAft>
-            </a:pPr>
-            <a:r>
-              <a:rPr sz="1600" b="0">
-                <a:solidFill>
-                  <a:srgbClr val="E8EAF2"/>
-                </a:solidFill>
-                <a:latin typeface="Segoe UI"/>
-              </a:rPr>
-              <a:t>•  Train on much more data sets: other BraTS collections and other hospitals' scans.</a:t>
-            </a:r>
-          </a:p>
-          <a:p>
-            <a:pPr algn="l">
-              <a:spcAft>
-                <a:spcPts val="1200"/>
-              </a:spcAft>
-            </a:pPr>
-            <a:r>
-              <a:rPr sz="1600" b="0">
-                <a:solidFill>
-                  <a:srgbClr val="E8EAF2"/>
-                </a:solidFill>
-                <a:latin typeface="Segoe UI"/>
-              </a:rPr>
-              <a:t>•  YOLO still improved with more data; MedSAM2 had levelled off.</a:t>
-            </a:r>
-          </a:p>
-        </p:txBody>
-      </p:sp>
-      <p:sp>
-        <p:nvSpPr>
-          <p:cNvPr id="14" name="Rounded Rectangle 13"/>
+          </a:p>
+        </p:txBody>
+      </p:sp>
+      <p:sp>
+        <p:nvSpPr>
+          <p:cNvPr id="10" name="Rounded Rectangle 9"/>
           <p:cNvSpPr/>
           <p:nvPr/>
         </p:nvSpPr>
         <p:spPr>
           <a:xfrm>
-            <a:off x="548640" y="5806440"/>
-            <a:ext cx="11064240" cy="566928"/>
+            <a:off x="1271016" y="2971800"/>
+            <a:ext cx="384048" cy="868680"/>
           </a:xfrm>
           <a:prstGeom prst="roundRect">
             <a:avLst>
@@ -14765,7 +15960,7 @@
             </a:avLst>
           </a:prstGeom>
           <a:solidFill>
-            <a:srgbClr val="1A1F33"/>
+            <a:srgbClr val="2FB35C"/>
           </a:solidFill>
           <a:ln>
             <a:noFill/>
@@ -14791,68 +15986,19 @@
           <a:lstStyle/>
           <a:p>
             <a:pPr algn="ctr"/>
-            <a:endParaRPr/>
-          </a:p>
-        </p:txBody>
-      </p:sp>
-      <p:sp>
-        <p:nvSpPr>
-          <p:cNvPr id="15" name="TextBox 14"/>
-          <p:cNvSpPr txBox="1"/>
-          <p:nvPr/>
-        </p:nvSpPr>
-        <p:spPr>
-          <a:xfrm>
-            <a:off x="777240" y="5806440"/>
-            <a:ext cx="10744200" cy="566928"/>
-          </a:xfrm>
-          <a:prstGeom prst="rect">
-            <a:avLst/>
-          </a:prstGeom>
-          <a:noFill/>
-        </p:spPr>
-        <p:txBody>
-          <a:bodyPr wrap="square" lIns="45720" rIns="45720" anchor="ctr">
-            <a:spAutoFit/>
-          </a:bodyPr>
-          <a:lstStyle/>
-          <a:p>
-            <a:pPr algn="l">
-              <a:spcAft>
-                <a:spcPts val="0"/>
-              </a:spcAft>
-            </a:pPr>
-            <a:r>
-              <a:rPr sz="1600" b="1">
-                <a:solidFill>
-                  <a:srgbClr val="E8EAF2"/>
-                </a:solidFill>
-                <a:latin typeface="Segoe UI"/>
-              </a:rPr>
-              <a:t>Key takeaway: </a:t>
-            </a:r>
-            <a:r>
-              <a:rPr sz="1600" b="0">
-                <a:solidFill>
-                  <a:srgbClr val="E8EAF2"/>
-                </a:solidFill>
-                <a:latin typeface="Segoe UI"/>
-              </a:rPr>
-              <a:t>cleaner hints, more small tumours and much more data should cut missed and false slices.</a:t>
-            </a:r>
-          </a:p>
-        </p:txBody>
-      </p:sp>
-      <p:sp>
-        <p:nvSpPr>
-          <p:cNvPr id="14" name="Rounded Rectangle 13"/>
+          </a:p>
+        </p:txBody>
+      </p:sp>
+      <p:sp>
+        <p:nvSpPr>
+          <p:cNvPr id="11" name="Rounded Rectangle 10"/>
           <p:cNvSpPr/>
           <p:nvPr/>
         </p:nvSpPr>
         <p:spPr>
           <a:xfrm>
-            <a:off x="548640" y="1325880"/>
-            <a:ext cx="11064240" cy="566928"/>
+            <a:off x="1728216" y="2971800"/>
+            <a:ext cx="384048" cy="868680"/>
           </a:xfrm>
           <a:prstGeom prst="roundRect">
             <a:avLst>
@@ -14860,7 +16006,7 @@
             </a:avLst>
           </a:prstGeom>
           <a:solidFill>
-            <a:srgbClr val="1A1F33"/>
+            <a:srgbClr val="2FB35C"/>
           </a:solidFill>
           <a:ln>
             <a:noFill/>
@@ -14886,20 +16032,19 @@
           <a:lstStyle/>
           <a:p>
             <a:pPr algn="ctr"/>
-            <a:endParaRPr/>
-          </a:p>
-        </p:txBody>
-      </p:sp>
-      <p:sp>
-        <p:nvSpPr>
-          <p:cNvPr id="15" name="TextBox 14"/>
+          </a:p>
+        </p:txBody>
+      </p:sp>
+      <p:sp>
+        <p:nvSpPr>
+          <p:cNvPr id="12" name="TextBox 11"/>
           <p:cNvSpPr txBox="1"/>
           <p:nvPr/>
         </p:nvSpPr>
         <p:spPr>
           <a:xfrm>
-            <a:off x="777240" y="1325880"/>
-            <a:ext cx="10744200" cy="566928"/>
+            <a:off x="1545336" y="2679192"/>
+            <a:ext cx="749808" cy="274320"/>
           </a:xfrm>
           <a:prstGeom prst="rect">
             <a:avLst/>
@@ -14907,7 +16052,648 @@
           <a:noFill/>
         </p:spPr>
         <p:txBody>
-          <a:bodyPr wrap="square" lIns="45720" rIns="45720" anchor="ctr">
+          <a:bodyPr wrap="square" anchor="t" lIns="45720" rIns="45720">
+            <a:spAutoFit/>
+          </a:bodyPr>
+          <a:lstStyle/>
+          <a:p>
+            <a:pPr algn="ctr">
+              <a:spcAft>
+                <a:spcPts val="0"/>
+              </a:spcAft>
+            </a:pPr>
+            <a:r>
+              <a:rPr sz="1100" b="0">
+                <a:solidFill>
+                  <a:srgbClr val="FFFFFF"/>
+                </a:solidFill>
+                <a:latin typeface="Segoe UI"/>
+              </a:rPr>
+              <a:t>start</a:t>
+            </a:r>
+          </a:p>
+        </p:txBody>
+      </p:sp>
+      <p:sp>
+        <p:nvSpPr>
+          <p:cNvPr id="13" name="Rounded Rectangle 12"/>
+          <p:cNvSpPr/>
+          <p:nvPr/>
+        </p:nvSpPr>
+        <p:spPr>
+          <a:xfrm>
+            <a:off x="2185416" y="2971800"/>
+            <a:ext cx="384048" cy="868680"/>
+          </a:xfrm>
+          <a:prstGeom prst="roundRect">
+            <a:avLst>
+              <a:gd name="adj" fmla="val 15000"/>
+            </a:avLst>
+          </a:prstGeom>
+          <a:solidFill>
+            <a:srgbClr val="2FB35C"/>
+          </a:solidFill>
+          <a:ln>
+            <a:noFill/>
+          </a:ln>
+          <a:effectLst/>
+        </p:spPr>
+        <p:style>
+          <a:lnRef idx="1">
+            <a:schemeClr val="accent1"/>
+          </a:lnRef>
+          <a:fillRef idx="3">
+            <a:schemeClr val="accent1"/>
+          </a:fillRef>
+          <a:effectRef idx="2">
+            <a:schemeClr val="accent1"/>
+          </a:effectRef>
+          <a:fontRef idx="minor">
+            <a:schemeClr val="lt1"/>
+          </a:fontRef>
+        </p:style>
+        <p:txBody>
+          <a:bodyPr rtlCol="0" anchor="ctr"/>
+          <a:lstStyle/>
+          <a:p>
+            <a:pPr algn="ctr"/>
+          </a:p>
+        </p:txBody>
+      </p:sp>
+      <p:sp>
+        <p:nvSpPr>
+          <p:cNvPr id="14" name="Rounded Rectangle 13"/>
+          <p:cNvSpPr/>
+          <p:nvPr/>
+        </p:nvSpPr>
+        <p:spPr>
+          <a:xfrm>
+            <a:off x="2642616" y="2971800"/>
+            <a:ext cx="384048" cy="868680"/>
+          </a:xfrm>
+          <a:prstGeom prst="roundRect">
+            <a:avLst>
+              <a:gd name="adj" fmla="val 15000"/>
+            </a:avLst>
+          </a:prstGeom>
+          <a:solidFill>
+            <a:srgbClr val="2FB35C"/>
+          </a:solidFill>
+          <a:ln>
+            <a:noFill/>
+          </a:ln>
+          <a:effectLst/>
+        </p:spPr>
+        <p:style>
+          <a:lnRef idx="1">
+            <a:schemeClr val="accent1"/>
+          </a:lnRef>
+          <a:fillRef idx="3">
+            <a:schemeClr val="accent1"/>
+          </a:fillRef>
+          <a:effectRef idx="2">
+            <a:schemeClr val="accent1"/>
+          </a:effectRef>
+          <a:fontRef idx="minor">
+            <a:schemeClr val="lt1"/>
+          </a:fontRef>
+        </p:style>
+        <p:txBody>
+          <a:bodyPr rtlCol="0" anchor="ctr"/>
+          <a:lstStyle/>
+          <a:p>
+            <a:pPr algn="ctr"/>
+          </a:p>
+        </p:txBody>
+      </p:sp>
+      <p:sp>
+        <p:nvSpPr>
+          <p:cNvPr id="15" name="Rounded Rectangle 14"/>
+          <p:cNvSpPr/>
+          <p:nvPr/>
+        </p:nvSpPr>
+        <p:spPr>
+          <a:xfrm>
+            <a:off x="3099816" y="2971800"/>
+            <a:ext cx="384048" cy="868680"/>
+          </a:xfrm>
+          <a:prstGeom prst="roundRect">
+            <a:avLst>
+              <a:gd name="adj" fmla="val 15000"/>
+            </a:avLst>
+          </a:prstGeom>
+          <a:solidFill>
+            <a:srgbClr val="3A4160"/>
+          </a:solidFill>
+          <a:ln>
+            <a:noFill/>
+          </a:ln>
+          <a:effectLst/>
+        </p:spPr>
+        <p:style>
+          <a:lnRef idx="1">
+            <a:schemeClr val="accent1"/>
+          </a:lnRef>
+          <a:fillRef idx="3">
+            <a:schemeClr val="accent1"/>
+          </a:fillRef>
+          <a:effectRef idx="2">
+            <a:schemeClr val="accent1"/>
+          </a:effectRef>
+          <a:fontRef idx="minor">
+            <a:schemeClr val="lt1"/>
+          </a:fontRef>
+        </p:style>
+        <p:txBody>
+          <a:bodyPr rtlCol="0" anchor="ctr"/>
+          <a:lstStyle/>
+          <a:p>
+            <a:pPr algn="ctr"/>
+          </a:p>
+        </p:txBody>
+      </p:sp>
+      <p:sp>
+        <p:nvSpPr>
+          <p:cNvPr id="16" name="Rounded Rectangle 15"/>
+          <p:cNvSpPr/>
+          <p:nvPr/>
+        </p:nvSpPr>
+        <p:spPr>
+          <a:xfrm>
+            <a:off x="3557016" y="2971800"/>
+            <a:ext cx="384048" cy="868680"/>
+          </a:xfrm>
+          <a:prstGeom prst="roundRect">
+            <a:avLst>
+              <a:gd name="adj" fmla="val 15000"/>
+            </a:avLst>
+          </a:prstGeom>
+          <a:solidFill>
+            <a:srgbClr val="3A4160"/>
+          </a:solidFill>
+          <a:ln>
+            <a:noFill/>
+          </a:ln>
+          <a:effectLst/>
+        </p:spPr>
+        <p:style>
+          <a:lnRef idx="1">
+            <a:schemeClr val="accent1"/>
+          </a:lnRef>
+          <a:fillRef idx="3">
+            <a:schemeClr val="accent1"/>
+          </a:fillRef>
+          <a:effectRef idx="2">
+            <a:schemeClr val="accent1"/>
+          </a:effectRef>
+          <a:fontRef idx="minor">
+            <a:schemeClr val="lt1"/>
+          </a:fontRef>
+        </p:style>
+        <p:txBody>
+          <a:bodyPr rtlCol="0" anchor="ctr"/>
+          <a:lstStyle/>
+          <a:p>
+            <a:pPr algn="ctr"/>
+          </a:p>
+        </p:txBody>
+      </p:sp>
+      <p:sp>
+        <p:nvSpPr>
+          <p:cNvPr id="17" name="Rounded Rectangle 16"/>
+          <p:cNvSpPr/>
+          <p:nvPr/>
+        </p:nvSpPr>
+        <p:spPr>
+          <a:xfrm>
+            <a:off x="4014215" y="2971800"/>
+            <a:ext cx="384048" cy="868680"/>
+          </a:xfrm>
+          <a:prstGeom prst="roundRect">
+            <a:avLst>
+              <a:gd name="adj" fmla="val 15000"/>
+            </a:avLst>
+          </a:prstGeom>
+          <a:solidFill>
+            <a:srgbClr val="3A4160"/>
+          </a:solidFill>
+          <a:ln>
+            <a:noFill/>
+          </a:ln>
+          <a:effectLst/>
+        </p:spPr>
+        <p:style>
+          <a:lnRef idx="1">
+            <a:schemeClr val="accent1"/>
+          </a:lnRef>
+          <a:fillRef idx="3">
+            <a:schemeClr val="accent1"/>
+          </a:fillRef>
+          <a:effectRef idx="2">
+            <a:schemeClr val="accent1"/>
+          </a:effectRef>
+          <a:fontRef idx="minor">
+            <a:schemeClr val="lt1"/>
+          </a:fontRef>
+        </p:style>
+        <p:txBody>
+          <a:bodyPr rtlCol="0" anchor="ctr"/>
+          <a:lstStyle/>
+          <a:p>
+            <a:pPr algn="ctr"/>
+          </a:p>
+        </p:txBody>
+      </p:sp>
+      <p:sp>
+        <p:nvSpPr>
+          <p:cNvPr id="18" name="Rounded Rectangle 17"/>
+          <p:cNvSpPr/>
+          <p:nvPr/>
+        </p:nvSpPr>
+        <p:spPr>
+          <a:xfrm>
+            <a:off x="4471416" y="2971800"/>
+            <a:ext cx="384048" cy="868680"/>
+          </a:xfrm>
+          <a:prstGeom prst="roundRect">
+            <a:avLst>
+              <a:gd name="adj" fmla="val 15000"/>
+            </a:avLst>
+          </a:prstGeom>
+          <a:solidFill>
+            <a:srgbClr val="8FE08F"/>
+          </a:solidFill>
+          <a:ln>
+            <a:noFill/>
+          </a:ln>
+          <a:effectLst/>
+        </p:spPr>
+        <p:style>
+          <a:lnRef idx="1">
+            <a:schemeClr val="accent1"/>
+          </a:lnRef>
+          <a:fillRef idx="3">
+            <a:schemeClr val="accent1"/>
+          </a:fillRef>
+          <a:effectRef idx="2">
+            <a:schemeClr val="accent1"/>
+          </a:effectRef>
+          <a:fontRef idx="minor">
+            <a:schemeClr val="lt1"/>
+          </a:fontRef>
+        </p:style>
+        <p:txBody>
+          <a:bodyPr rtlCol="0" anchor="ctr"/>
+          <a:lstStyle/>
+          <a:p>
+            <a:pPr algn="ctr"/>
+          </a:p>
+        </p:txBody>
+      </p:sp>
+      <p:sp>
+        <p:nvSpPr>
+          <p:cNvPr id="19" name="Rounded Rectangle 18"/>
+          <p:cNvSpPr/>
+          <p:nvPr/>
+        </p:nvSpPr>
+        <p:spPr>
+          <a:xfrm>
+            <a:off x="4928616" y="2971800"/>
+            <a:ext cx="384048" cy="868680"/>
+          </a:xfrm>
+          <a:prstGeom prst="roundRect">
+            <a:avLst>
+              <a:gd name="adj" fmla="val 15000"/>
+            </a:avLst>
+          </a:prstGeom>
+          <a:solidFill>
+            <a:srgbClr val="8FE08F"/>
+          </a:solidFill>
+          <a:ln>
+            <a:noFill/>
+          </a:ln>
+          <a:effectLst/>
+        </p:spPr>
+        <p:style>
+          <a:lnRef idx="1">
+            <a:schemeClr val="accent1"/>
+          </a:lnRef>
+          <a:fillRef idx="3">
+            <a:schemeClr val="accent1"/>
+          </a:fillRef>
+          <a:effectRef idx="2">
+            <a:schemeClr val="accent1"/>
+          </a:effectRef>
+          <a:fontRef idx="minor">
+            <a:schemeClr val="lt1"/>
+          </a:fontRef>
+        </p:style>
+        <p:txBody>
+          <a:bodyPr rtlCol="0" anchor="ctr"/>
+          <a:lstStyle/>
+          <a:p>
+            <a:pPr algn="ctr"/>
+          </a:p>
+        </p:txBody>
+      </p:sp>
+      <p:sp>
+        <p:nvSpPr>
+          <p:cNvPr id="20" name="Rounded Rectangle 19"/>
+          <p:cNvSpPr/>
+          <p:nvPr/>
+        </p:nvSpPr>
+        <p:spPr>
+          <a:xfrm>
+            <a:off x="5385816" y="2971800"/>
+            <a:ext cx="384048" cy="868680"/>
+          </a:xfrm>
+          <a:prstGeom prst="roundRect">
+            <a:avLst>
+              <a:gd name="adj" fmla="val 15000"/>
+            </a:avLst>
+          </a:prstGeom>
+          <a:solidFill>
+            <a:srgbClr val="8FE08F"/>
+          </a:solidFill>
+          <a:ln>
+            <a:noFill/>
+          </a:ln>
+          <a:effectLst/>
+        </p:spPr>
+        <p:style>
+          <a:lnRef idx="1">
+            <a:schemeClr val="accent1"/>
+          </a:lnRef>
+          <a:fillRef idx="3">
+            <a:schemeClr val="accent1"/>
+          </a:fillRef>
+          <a:effectRef idx="2">
+            <a:schemeClr val="accent1"/>
+          </a:effectRef>
+          <a:fontRef idx="minor">
+            <a:schemeClr val="lt1"/>
+          </a:fontRef>
+        </p:style>
+        <p:txBody>
+          <a:bodyPr rtlCol="0" anchor="ctr"/>
+          <a:lstStyle/>
+          <a:p>
+            <a:pPr algn="ctr"/>
+          </a:p>
+        </p:txBody>
+      </p:sp>
+      <p:sp>
+        <p:nvSpPr>
+          <p:cNvPr id="21" name="TextBox 20"/>
+          <p:cNvSpPr txBox="1"/>
+          <p:nvPr/>
+        </p:nvSpPr>
+        <p:spPr>
+          <a:xfrm>
+            <a:off x="722376" y="3895344"/>
+            <a:ext cx="2395728" cy="274320"/>
+          </a:xfrm>
+          <a:prstGeom prst="rect">
+            <a:avLst/>
+          </a:prstGeom>
+          <a:noFill/>
+        </p:spPr>
+        <p:txBody>
+          <a:bodyPr wrap="square" anchor="t" lIns="45720" rIns="45720">
+            <a:spAutoFit/>
+          </a:bodyPr>
+          <a:lstStyle/>
+          <a:p>
+            <a:pPr algn="ctr">
+              <a:spcAft>
+                <a:spcPts val="0"/>
+              </a:spcAft>
+            </a:pPr>
+            <a:r>
+              <a:rPr sz="1200" b="0">
+                <a:solidFill>
+                  <a:srgbClr val="B8BED3"/>
+                </a:solidFill>
+                <a:latin typeface="Segoe UI"/>
+              </a:rPr>
+              <a:t>largest piece</a:t>
+            </a:r>
+          </a:p>
+        </p:txBody>
+      </p:sp>
+      <p:sp>
+        <p:nvSpPr>
+          <p:cNvPr id="22" name="TextBox 21"/>
+          <p:cNvSpPr txBox="1"/>
+          <p:nvPr/>
+        </p:nvSpPr>
+        <p:spPr>
+          <a:xfrm>
+            <a:off x="3008376" y="3895344"/>
+            <a:ext cx="1481328" cy="274320"/>
+          </a:xfrm>
+          <a:prstGeom prst="rect">
+            <a:avLst/>
+          </a:prstGeom>
+          <a:noFill/>
+        </p:spPr>
+        <p:txBody>
+          <a:bodyPr wrap="square" anchor="t" lIns="45720" rIns="45720">
+            <a:spAutoFit/>
+          </a:bodyPr>
+          <a:lstStyle/>
+          <a:p>
+            <a:pPr algn="ctr">
+              <a:spcAft>
+                <a:spcPts val="0"/>
+              </a:spcAft>
+            </a:pPr>
+            <a:r>
+              <a:rPr sz="1200" b="0">
+                <a:solidFill>
+                  <a:srgbClr val="B8BED3"/>
+                </a:solidFill>
+                <a:latin typeface="Segoe UI"/>
+              </a:rPr>
+              <a:t>empty slices</a:t>
+            </a:r>
+          </a:p>
+        </p:txBody>
+      </p:sp>
+      <p:sp>
+        <p:nvSpPr>
+          <p:cNvPr id="23" name="TextBox 22"/>
+          <p:cNvSpPr txBox="1"/>
+          <p:nvPr/>
+        </p:nvSpPr>
+        <p:spPr>
+          <a:xfrm>
+            <a:off x="4379976" y="3895344"/>
+            <a:ext cx="1481328" cy="274320"/>
+          </a:xfrm>
+          <a:prstGeom prst="rect">
+            <a:avLst/>
+          </a:prstGeom>
+          <a:noFill/>
+        </p:spPr>
+        <p:txBody>
+          <a:bodyPr wrap="square" anchor="t" lIns="45720" rIns="45720">
+            <a:spAutoFit/>
+          </a:bodyPr>
+          <a:lstStyle/>
+          <a:p>
+            <a:pPr algn="ctr">
+              <a:spcAft>
+                <a:spcPts val="0"/>
+              </a:spcAft>
+            </a:pPr>
+            <a:r>
+              <a:rPr sz="1200" b="0">
+                <a:solidFill>
+                  <a:srgbClr val="B8BED3"/>
+                </a:solidFill>
+                <a:latin typeface="Segoe UI"/>
+              </a:rPr>
+              <a:t>other piece</a:t>
+            </a:r>
+          </a:p>
+        </p:txBody>
+      </p:sp>
+      <p:sp>
+        <p:nvSpPr>
+          <p:cNvPr id="24" name="TextBox 23"/>
+          <p:cNvSpPr txBox="1"/>
+          <p:nvPr/>
+        </p:nvSpPr>
+        <p:spPr>
+          <a:xfrm>
+            <a:off x="731520" y="4389120"/>
+            <a:ext cx="5120640" cy="1188720"/>
+          </a:xfrm>
+          <a:prstGeom prst="rect">
+            <a:avLst/>
+          </a:prstGeom>
+          <a:noFill/>
+        </p:spPr>
+        <p:txBody>
+          <a:bodyPr wrap="square" anchor="t" lIns="45720" rIns="45720">
+            <a:spAutoFit/>
+          </a:bodyPr>
+          <a:lstStyle/>
+          <a:p>
+            <a:pPr algn="l">
+              <a:spcAft>
+                <a:spcPts val="500"/>
+              </a:spcAft>
+            </a:pPr>
+            <a:r>
+              <a:rPr sz="1400" b="0">
+                <a:solidFill>
+                  <a:srgbClr val="E8EAF2"/>
+                </a:solidFill>
+                <a:latin typeface="Segoe UI"/>
+              </a:rPr>
+              <a:t>•  Memory passes the tumour from slice to slice.</a:t>
+            </a:r>
+          </a:p>
+          <a:p>
+            <a:pPr algn="l">
+              <a:spcAft>
+                <a:spcPts val="500"/>
+              </a:spcAft>
+            </a:pPr>
+            <a:r>
+              <a:rPr sz="1400" b="0">
+                <a:solidFill>
+                  <a:srgbClr val="E8EAF2"/>
+                </a:solidFill>
+                <a:latin typeface="Segoe UI"/>
+              </a:rPr>
+              <a:t>•  Across empty slices there is nothing to pass on, so the next piece must come from </a:t>
+            </a:r>
+            <a:r>
+              <a:rPr sz="1400" b="1">
+                <a:solidFill>
+                  <a:srgbClr val="E8EAF2"/>
+                </a:solidFill>
+                <a:latin typeface="Segoe UI"/>
+              </a:rPr>
+              <a:t>YOLO's hint</a:t>
+            </a:r>
+            <a:r>
+              <a:rPr sz="1400" b="0">
+                <a:solidFill>
+                  <a:srgbClr val="E8EAF2"/>
+                </a:solidFill>
+                <a:latin typeface="Segoe UI"/>
+              </a:rPr>
+              <a:t>.</a:t>
+            </a:r>
+          </a:p>
+        </p:txBody>
+      </p:sp>
+      <p:sp>
+        <p:nvSpPr>
+          <p:cNvPr id="25" name="Rectangle 24"/>
+          <p:cNvSpPr/>
+          <p:nvPr/>
+        </p:nvSpPr>
+        <p:spPr>
+          <a:xfrm>
+            <a:off x="6217920" y="2103120"/>
+            <a:ext cx="5394960" cy="3520440"/>
+          </a:xfrm>
+          <a:prstGeom prst="rect">
+            <a:avLst/>
+          </a:prstGeom>
+          <a:solidFill>
+            <a:srgbClr val="1A1F33"/>
+          </a:solidFill>
+          <a:ln>
+            <a:noFill/>
+          </a:ln>
+          <a:effectLst/>
+        </p:spPr>
+        <p:style>
+          <a:lnRef idx="1">
+            <a:schemeClr val="accent1"/>
+          </a:lnRef>
+          <a:fillRef idx="3">
+            <a:schemeClr val="accent1"/>
+          </a:fillRef>
+          <a:effectRef idx="2">
+            <a:schemeClr val="accent1"/>
+          </a:effectRef>
+          <a:fontRef idx="minor">
+            <a:schemeClr val="lt1"/>
+          </a:fontRef>
+        </p:style>
+        <p:txBody>
+          <a:bodyPr rtlCol="0" anchor="ctr"/>
+          <a:lstStyle/>
+          <a:p>
+            <a:pPr algn="ctr"/>
+          </a:p>
+        </p:txBody>
+      </p:sp>
+      <p:sp>
+        <p:nvSpPr>
+          <p:cNvPr id="26" name="TextBox 25"/>
+          <p:cNvSpPr txBox="1"/>
+          <p:nvPr/>
+        </p:nvSpPr>
+        <p:spPr>
+          <a:xfrm>
+            <a:off x="6400800" y="2212848"/>
+            <a:ext cx="5029200" cy="411480"/>
+          </a:xfrm>
+          <a:prstGeom prst="rect">
+            <a:avLst/>
+          </a:prstGeom>
+          <a:noFill/>
+        </p:spPr>
+        <p:txBody>
+          <a:bodyPr wrap="square" anchor="t" lIns="45720" rIns="45720">
             <a:spAutoFit/>
           </a:bodyPr>
           <a:lstStyle/>
@@ -14918,13 +16704,607 @@
               </a:spcAft>
             </a:pPr>
             <a:r>
+              <a:rPr sz="1900" b="1">
+                <a:solidFill>
+                  <a:srgbClr val="3987E5"/>
+                </a:solidFill>
+                <a:latin typeface="Segoe UI"/>
+              </a:rPr>
+              <a:t>Did MedSAM2 find the piece?</a:t>
+            </a:r>
+          </a:p>
+        </p:txBody>
+      </p:sp>
+      <p:sp>
+        <p:nvSpPr>
+          <p:cNvPr id="27" name="TextBox 26"/>
+          <p:cNvSpPr txBox="1"/>
+          <p:nvPr/>
+        </p:nvSpPr>
+        <p:spPr>
+          <a:xfrm>
+            <a:off x="6400800" y="2743200"/>
+            <a:ext cx="3840480" cy="274320"/>
+          </a:xfrm>
+          <a:prstGeom prst="rect">
+            <a:avLst/>
+          </a:prstGeom>
+          <a:noFill/>
+        </p:spPr>
+        <p:txBody>
+          <a:bodyPr wrap="square" anchor="t" lIns="45720" rIns="45720">
+            <a:spAutoFit/>
+          </a:bodyPr>
+          <a:lstStyle/>
+          <a:p>
+            <a:pPr algn="l">
+              <a:spcAft>
+                <a:spcPts val="0"/>
+              </a:spcAft>
+            </a:pPr>
+            <a:r>
+              <a:rPr sz="1300" b="0">
+                <a:solidFill>
+                  <a:srgbClr val="E8EAF2"/>
+                </a:solidFill>
+                <a:latin typeface="Segoe UI"/>
+              </a:rPr>
+              <a:t>Largest piece</a:t>
+            </a:r>
+          </a:p>
+        </p:txBody>
+      </p:sp>
+      <p:sp>
+        <p:nvSpPr>
+          <p:cNvPr id="28" name="Rectangle 27"/>
+          <p:cNvSpPr/>
+          <p:nvPr/>
+        </p:nvSpPr>
+        <p:spPr>
+          <a:xfrm>
+            <a:off x="6446520" y="3044952"/>
+            <a:ext cx="3566160" cy="219456"/>
+          </a:xfrm>
+          <a:prstGeom prst="rect">
+            <a:avLst/>
+          </a:prstGeom>
+          <a:solidFill>
+            <a:srgbClr val="3A4160"/>
+          </a:solidFill>
+          <a:ln>
+            <a:noFill/>
+          </a:ln>
+          <a:effectLst/>
+        </p:spPr>
+        <p:style>
+          <a:lnRef idx="1">
+            <a:schemeClr val="accent1"/>
+          </a:lnRef>
+          <a:fillRef idx="3">
+            <a:schemeClr val="accent1"/>
+          </a:fillRef>
+          <a:effectRef idx="2">
+            <a:schemeClr val="accent1"/>
+          </a:effectRef>
+          <a:fontRef idx="minor">
+            <a:schemeClr val="lt1"/>
+          </a:fontRef>
+        </p:style>
+        <p:txBody>
+          <a:bodyPr rtlCol="0" anchor="ctr"/>
+          <a:lstStyle/>
+          <a:p>
+            <a:pPr algn="ctr"/>
+          </a:p>
+        </p:txBody>
+      </p:sp>
+      <p:sp>
+        <p:nvSpPr>
+          <p:cNvPr id="29" name="Rectangle 28"/>
+          <p:cNvSpPr/>
+          <p:nvPr/>
+        </p:nvSpPr>
+        <p:spPr>
+          <a:xfrm>
+            <a:off x="6446520" y="3044952"/>
+            <a:ext cx="3566160" cy="219456"/>
+          </a:xfrm>
+          <a:prstGeom prst="rect">
+            <a:avLst/>
+          </a:prstGeom>
+          <a:solidFill>
+            <a:srgbClr val="2FB35C"/>
+          </a:solidFill>
+          <a:ln>
+            <a:noFill/>
+          </a:ln>
+          <a:effectLst/>
+        </p:spPr>
+        <p:style>
+          <a:lnRef idx="1">
+            <a:schemeClr val="accent1"/>
+          </a:lnRef>
+          <a:fillRef idx="3">
+            <a:schemeClr val="accent1"/>
+          </a:fillRef>
+          <a:effectRef idx="2">
+            <a:schemeClr val="accent1"/>
+          </a:effectRef>
+          <a:fontRef idx="minor">
+            <a:schemeClr val="lt1"/>
+          </a:fontRef>
+        </p:style>
+        <p:txBody>
+          <a:bodyPr rtlCol="0" anchor="ctr"/>
+          <a:lstStyle/>
+          <a:p>
+            <a:pPr algn="ctr"/>
+          </a:p>
+        </p:txBody>
+      </p:sp>
+      <p:sp>
+        <p:nvSpPr>
+          <p:cNvPr id="30" name="TextBox 29"/>
+          <p:cNvSpPr txBox="1"/>
+          <p:nvPr/>
+        </p:nvSpPr>
+        <p:spPr>
+          <a:xfrm>
+            <a:off x="10104119" y="2980944"/>
+            <a:ext cx="1280160" cy="329184"/>
+          </a:xfrm>
+          <a:prstGeom prst="rect">
+            <a:avLst/>
+          </a:prstGeom>
+          <a:noFill/>
+        </p:spPr>
+        <p:txBody>
+          <a:bodyPr wrap="square" anchor="t" lIns="45720" rIns="45720">
+            <a:spAutoFit/>
+          </a:bodyPr>
+          <a:lstStyle/>
+          <a:p>
+            <a:pPr algn="l">
+              <a:spcAft>
+                <a:spcPts val="0"/>
+              </a:spcAft>
+            </a:pPr>
+            <a:r>
+              <a:rPr sz="1400" b="1">
+                <a:solidFill>
+                  <a:srgbClr val="E8EAF2"/>
+                </a:solidFill>
+                <a:latin typeface="Segoe UI"/>
+              </a:rPr>
+              <a:t>35 / 35</a:t>
+            </a:r>
+          </a:p>
+        </p:txBody>
+      </p:sp>
+      <p:sp>
+        <p:nvSpPr>
+          <p:cNvPr id="31" name="TextBox 30"/>
+          <p:cNvSpPr txBox="1"/>
+          <p:nvPr/>
+        </p:nvSpPr>
+        <p:spPr>
+          <a:xfrm>
+            <a:off x="6400800" y="3401568"/>
+            <a:ext cx="3840480" cy="274320"/>
+          </a:xfrm>
+          <a:prstGeom prst="rect">
+            <a:avLst/>
+          </a:prstGeom>
+          <a:noFill/>
+        </p:spPr>
+        <p:txBody>
+          <a:bodyPr wrap="square" anchor="t" lIns="45720" rIns="45720">
+            <a:spAutoFit/>
+          </a:bodyPr>
+          <a:lstStyle/>
+          <a:p>
+            <a:pPr algn="l">
+              <a:spcAft>
+                <a:spcPts val="0"/>
+              </a:spcAft>
+            </a:pPr>
+            <a:r>
+              <a:rPr sz="1300" b="0">
+                <a:solidFill>
+                  <a:srgbClr val="E8EAF2"/>
+                </a:solidFill>
+                <a:latin typeface="Segoe UI"/>
+              </a:rPr>
+              <a:t>Other piece, YOLO hinted it</a:t>
+            </a:r>
+          </a:p>
+        </p:txBody>
+      </p:sp>
+      <p:sp>
+        <p:nvSpPr>
+          <p:cNvPr id="32" name="Rectangle 31"/>
+          <p:cNvSpPr/>
+          <p:nvPr/>
+        </p:nvSpPr>
+        <p:spPr>
+          <a:xfrm>
+            <a:off x="6446520" y="3703320"/>
+            <a:ext cx="3566160" cy="219456"/>
+          </a:xfrm>
+          <a:prstGeom prst="rect">
+            <a:avLst/>
+          </a:prstGeom>
+          <a:solidFill>
+            <a:srgbClr val="3A4160"/>
+          </a:solidFill>
+          <a:ln>
+            <a:noFill/>
+          </a:ln>
+          <a:effectLst/>
+        </p:spPr>
+        <p:style>
+          <a:lnRef idx="1">
+            <a:schemeClr val="accent1"/>
+          </a:lnRef>
+          <a:fillRef idx="3">
+            <a:schemeClr val="accent1"/>
+          </a:fillRef>
+          <a:effectRef idx="2">
+            <a:schemeClr val="accent1"/>
+          </a:effectRef>
+          <a:fontRef idx="minor">
+            <a:schemeClr val="lt1"/>
+          </a:fontRef>
+        </p:style>
+        <p:txBody>
+          <a:bodyPr rtlCol="0" anchor="ctr"/>
+          <a:lstStyle/>
+          <a:p>
+            <a:pPr algn="ctr"/>
+          </a:p>
+        </p:txBody>
+      </p:sp>
+      <p:sp>
+        <p:nvSpPr>
+          <p:cNvPr id="33" name="Rectangle 32"/>
+          <p:cNvSpPr/>
+          <p:nvPr/>
+        </p:nvSpPr>
+        <p:spPr>
+          <a:xfrm>
+            <a:off x="6446520" y="3703320"/>
+            <a:ext cx="2773680" cy="219456"/>
+          </a:xfrm>
+          <a:prstGeom prst="rect">
+            <a:avLst/>
+          </a:prstGeom>
+          <a:solidFill>
+            <a:srgbClr val="2FB35C"/>
+          </a:solidFill>
+          <a:ln>
+            <a:noFill/>
+          </a:ln>
+          <a:effectLst/>
+        </p:spPr>
+        <p:style>
+          <a:lnRef idx="1">
+            <a:schemeClr val="accent1"/>
+          </a:lnRef>
+          <a:fillRef idx="3">
+            <a:schemeClr val="accent1"/>
+          </a:fillRef>
+          <a:effectRef idx="2">
+            <a:schemeClr val="accent1"/>
+          </a:effectRef>
+          <a:fontRef idx="minor">
+            <a:schemeClr val="lt1"/>
+          </a:fontRef>
+        </p:style>
+        <p:txBody>
+          <a:bodyPr rtlCol="0" anchor="ctr"/>
+          <a:lstStyle/>
+          <a:p>
+            <a:pPr algn="ctr"/>
+          </a:p>
+        </p:txBody>
+      </p:sp>
+      <p:sp>
+        <p:nvSpPr>
+          <p:cNvPr id="34" name="TextBox 33"/>
+          <p:cNvSpPr txBox="1"/>
+          <p:nvPr/>
+        </p:nvSpPr>
+        <p:spPr>
+          <a:xfrm>
+            <a:off x="10104119" y="3639311"/>
+            <a:ext cx="1280160" cy="329184"/>
+          </a:xfrm>
+          <a:prstGeom prst="rect">
+            <a:avLst/>
+          </a:prstGeom>
+          <a:noFill/>
+        </p:spPr>
+        <p:txBody>
+          <a:bodyPr wrap="square" anchor="t" lIns="45720" rIns="45720">
+            <a:spAutoFit/>
+          </a:bodyPr>
+          <a:lstStyle/>
+          <a:p>
+            <a:pPr algn="l">
+              <a:spcAft>
+                <a:spcPts val="0"/>
+              </a:spcAft>
+            </a:pPr>
+            <a:r>
+              <a:rPr sz="1400" b="1">
+                <a:solidFill>
+                  <a:srgbClr val="E8EAF2"/>
+                </a:solidFill>
+                <a:latin typeface="Segoe UI"/>
+              </a:rPr>
+              <a:t>7 / 9</a:t>
+            </a:r>
+          </a:p>
+        </p:txBody>
+      </p:sp>
+      <p:sp>
+        <p:nvSpPr>
+          <p:cNvPr id="35" name="TextBox 34"/>
+          <p:cNvSpPr txBox="1"/>
+          <p:nvPr/>
+        </p:nvSpPr>
+        <p:spPr>
+          <a:xfrm>
+            <a:off x="6400800" y="4059935"/>
+            <a:ext cx="3840480" cy="274320"/>
+          </a:xfrm>
+          <a:prstGeom prst="rect">
+            <a:avLst/>
+          </a:prstGeom>
+          <a:noFill/>
+        </p:spPr>
+        <p:txBody>
+          <a:bodyPr wrap="square" anchor="t" lIns="45720" rIns="45720">
+            <a:spAutoFit/>
+          </a:bodyPr>
+          <a:lstStyle/>
+          <a:p>
+            <a:pPr algn="l">
+              <a:spcAft>
+                <a:spcPts val="0"/>
+              </a:spcAft>
+            </a:pPr>
+            <a:r>
+              <a:rPr sz="1300" b="0">
+                <a:solidFill>
+                  <a:srgbClr val="E8EAF2"/>
+                </a:solidFill>
+                <a:latin typeface="Segoe UI"/>
+              </a:rPr>
+              <a:t>Other piece, YOLO missed it</a:t>
+            </a:r>
+          </a:p>
+        </p:txBody>
+      </p:sp>
+      <p:sp>
+        <p:nvSpPr>
+          <p:cNvPr id="36" name="Rectangle 35"/>
+          <p:cNvSpPr/>
+          <p:nvPr/>
+        </p:nvSpPr>
+        <p:spPr>
+          <a:xfrm>
+            <a:off x="6446520" y="4361688"/>
+            <a:ext cx="3566160" cy="219456"/>
+          </a:xfrm>
+          <a:prstGeom prst="rect">
+            <a:avLst/>
+          </a:prstGeom>
+          <a:solidFill>
+            <a:srgbClr val="3A4160"/>
+          </a:solidFill>
+          <a:ln>
+            <a:noFill/>
+          </a:ln>
+          <a:effectLst/>
+        </p:spPr>
+        <p:style>
+          <a:lnRef idx="1">
+            <a:schemeClr val="accent1"/>
+          </a:lnRef>
+          <a:fillRef idx="3">
+            <a:schemeClr val="accent1"/>
+          </a:fillRef>
+          <a:effectRef idx="2">
+            <a:schemeClr val="accent1"/>
+          </a:effectRef>
+          <a:fontRef idx="minor">
+            <a:schemeClr val="lt1"/>
+          </a:fontRef>
+        </p:style>
+        <p:txBody>
+          <a:bodyPr rtlCol="0" anchor="ctr"/>
+          <a:lstStyle/>
+          <a:p>
+            <a:pPr algn="ctr"/>
+          </a:p>
+        </p:txBody>
+      </p:sp>
+      <p:sp>
+        <p:nvSpPr>
+          <p:cNvPr id="37" name="TextBox 36"/>
+          <p:cNvSpPr txBox="1"/>
+          <p:nvPr/>
+        </p:nvSpPr>
+        <p:spPr>
+          <a:xfrm>
+            <a:off x="10104119" y="4297679"/>
+            <a:ext cx="1280160" cy="329184"/>
+          </a:xfrm>
+          <a:prstGeom prst="rect">
+            <a:avLst/>
+          </a:prstGeom>
+          <a:noFill/>
+        </p:spPr>
+        <p:txBody>
+          <a:bodyPr wrap="square" anchor="t" lIns="45720" rIns="45720">
+            <a:spAutoFit/>
+          </a:bodyPr>
+          <a:lstStyle/>
+          <a:p>
+            <a:pPr algn="l">
+              <a:spcAft>
+                <a:spcPts val="0"/>
+              </a:spcAft>
+            </a:pPr>
+            <a:r>
+              <a:rPr sz="1400" b="1">
+                <a:solidFill>
+                  <a:srgbClr val="E8EAF2"/>
+                </a:solidFill>
+                <a:latin typeface="Segoe UI"/>
+              </a:rPr>
+              <a:t>0 / 7</a:t>
+            </a:r>
+          </a:p>
+        </p:txBody>
+      </p:sp>
+      <p:sp>
+        <p:nvSpPr>
+          <p:cNvPr id="38" name="TextBox 37"/>
+          <p:cNvSpPr txBox="1"/>
+          <p:nvPr/>
+        </p:nvSpPr>
+        <p:spPr>
+          <a:xfrm>
+            <a:off x="6400800" y="4754880"/>
+            <a:ext cx="5029200" cy="777240"/>
+          </a:xfrm>
+          <a:prstGeom prst="rect">
+            <a:avLst/>
+          </a:prstGeom>
+          <a:noFill/>
+        </p:spPr>
+        <p:txBody>
+          <a:bodyPr wrap="square" anchor="t" lIns="45720" rIns="45720">
+            <a:spAutoFit/>
+          </a:bodyPr>
+          <a:lstStyle/>
+          <a:p>
+            <a:pPr algn="l">
+              <a:spcAft>
+                <a:spcPts val="200"/>
+              </a:spcAft>
+            </a:pPr>
+            <a:r>
+              <a:rPr sz="1100" b="0">
+                <a:solidFill>
+                  <a:srgbClr val="B8BED3"/>
+                </a:solidFill>
+                <a:latin typeface="Segoe UI"/>
+              </a:rPr>
+              <a:t>Other pieces of 100+ voxels only; 26 specks under 100 voxels left out.</a:t>
+            </a:r>
+          </a:p>
+          <a:p>
+            <a:pPr algn="l">
+              <a:spcAft>
+                <a:spcPts val="200"/>
+              </a:spcAft>
+            </a:pPr>
+            <a:r>
+              <a:rPr sz="1100" b="0">
+                <a:solidFill>
+                  <a:srgbClr val="B8BED3"/>
+                </a:solidFill>
+                <a:latin typeface="Segoe UI"/>
+              </a:rPr>
+              <a:t>Lost 2 that YOLO found well (707 and 277 voxels).</a:t>
+            </a:r>
+          </a:p>
+        </p:txBody>
+      </p:sp>
+      <p:sp>
+        <p:nvSpPr>
+          <p:cNvPr id="39" name="Rounded Rectangle 38"/>
+          <p:cNvSpPr/>
+          <p:nvPr/>
+        </p:nvSpPr>
+        <p:spPr>
+          <a:xfrm>
+            <a:off x="548640" y="5806440"/>
+            <a:ext cx="11064240" cy="566928"/>
+          </a:xfrm>
+          <a:prstGeom prst="roundRect">
+            <a:avLst>
+              <a:gd name="adj" fmla="val 15000"/>
+            </a:avLst>
+          </a:prstGeom>
+          <a:solidFill>
+            <a:srgbClr val="1A1F33"/>
+          </a:solidFill>
+          <a:ln>
+            <a:noFill/>
+          </a:ln>
+          <a:effectLst/>
+        </p:spPr>
+        <p:style>
+          <a:lnRef idx="1">
+            <a:schemeClr val="accent1"/>
+          </a:lnRef>
+          <a:fillRef idx="3">
+            <a:schemeClr val="accent1"/>
+          </a:fillRef>
+          <a:effectRef idx="2">
+            <a:schemeClr val="accent1"/>
+          </a:effectRef>
+          <a:fontRef idx="minor">
+            <a:schemeClr val="lt1"/>
+          </a:fontRef>
+        </p:style>
+        <p:txBody>
+          <a:bodyPr rtlCol="0" anchor="ctr"/>
+          <a:lstStyle/>
+          <a:p>
+            <a:pPr algn="ctr"/>
+          </a:p>
+        </p:txBody>
+      </p:sp>
+      <p:sp>
+        <p:nvSpPr>
+          <p:cNvPr id="40" name="TextBox 39"/>
+          <p:cNvSpPr txBox="1"/>
+          <p:nvPr/>
+        </p:nvSpPr>
+        <p:spPr>
+          <a:xfrm>
+            <a:off x="777240" y="5806440"/>
+            <a:ext cx="10744200" cy="566928"/>
+          </a:xfrm>
+          <a:prstGeom prst="rect">
+            <a:avLst/>
+          </a:prstGeom>
+          <a:noFill/>
+        </p:spPr>
+        <p:txBody>
+          <a:bodyPr wrap="square" anchor="ctr" lIns="45720" rIns="45720">
+            <a:spAutoFit/>
+          </a:bodyPr>
+          <a:lstStyle/>
+          <a:p>
+            <a:pPr algn="l">
+              <a:spcAft>
+                <a:spcPts val="0"/>
+              </a:spcAft>
+            </a:pPr>
+            <a:r>
               <a:rPr sz="1600" b="1">
                 <a:solidFill>
                   <a:srgbClr val="E8EAF2"/>
                 </a:solidFill>
                 <a:latin typeface="Segoe UI"/>
               </a:rPr>
-              <a:t>The problem (test): </a:t>
+              <a:t>Key takeaway:</a:t>
             </a:r>
             <a:r>
               <a:rPr sz="1600" b="0">
@@ -14933,7 +17313,7 @@
                 </a:solidFill>
                 <a:latin typeface="Segoe UI"/>
               </a:rPr>
-              <a:t>672 of 21,910 tumour slices missed (3.1%) · 815 of 22,663 empty slices drawn on (3.6%).</a:t>
+              <a:t> MedSAM2 finds a separate piece only when YOLO hints it; memory can't jump across empty slices.</a:t>
             </a:r>
           </a:p>
         </p:txBody>
@@ -14971,8 +17351,8 @@
         </p:nvSpPr>
         <p:spPr>
           <a:xfrm>
-            <a:off x="640080" y="914400"/>
-            <a:ext cx="7315200" cy="292388"/>
+            <a:off x="548640" y="256032"/>
+            <a:ext cx="8229600" cy="320040"/>
           </a:xfrm>
           <a:prstGeom prst="rect">
             <a:avLst/>
@@ -14991,13 +17371,13 @@
               </a:spcAft>
             </a:pPr>
             <a:r>
-              <a:rPr sz="1300" b="0">
-                <a:solidFill>
-                  <a:schemeClr val="bg1"/>
-                </a:solidFill>
-                <a:latin typeface="Segoe UI"/>
-              </a:rPr>
-              <a:t>BRAIN TUMOUR SEGMENTATION · YOLO + MEDSAM2</a:t>
+              <a:rPr sz="1200" b="0">
+                <a:solidFill>
+                  <a:srgbClr val="E06A2E"/>
+                </a:solidFill>
+                <a:latin typeface="Segoe UI"/>
+              </a:rPr>
+              <a:t>NEXT STEPS</a:t>
             </a:r>
           </a:p>
         </p:txBody>
@@ -15010,8 +17390,8 @@
         </p:nvSpPr>
         <p:spPr>
           <a:xfrm>
-            <a:off x="640080" y="1371600"/>
-            <a:ext cx="6583680" cy="1015663"/>
+            <a:off x="548640" y="475488"/>
+            <a:ext cx="11064240" cy="731520"/>
           </a:xfrm>
           <a:prstGeom prst="rect">
             <a:avLst/>
@@ -15030,13 +17410,13 @@
               </a:spcAft>
             </a:pPr>
             <a:r>
-              <a:rPr sz="6000" b="0">
-                <a:solidFill>
-                  <a:schemeClr val="bg1"/>
-                </a:solidFill>
-                <a:latin typeface="Segoe UI"/>
-              </a:rPr>
-              <a:t>Thank you</a:t>
+              <a:rPr sz="3200" b="0">
+                <a:solidFill>
+                  <a:srgbClr val="E8EAF2"/>
+                </a:solidFill>
+                <a:latin typeface="Segoe UI"/>
+              </a:rPr>
+              <a:t>Future work</a:t>
             </a:r>
           </a:p>
         </p:txBody>
@@ -15049,8 +17429,8 @@
         </p:nvSpPr>
         <p:spPr>
           <a:xfrm>
-            <a:off x="640080" y="2514600"/>
-            <a:ext cx="6583680" cy="553998"/>
+            <a:off x="10972800" y="6446520"/>
+            <a:ext cx="914400" cy="261610"/>
           </a:xfrm>
           <a:prstGeom prst="rect">
             <a:avLst/>
@@ -15059,6 +17439,579 @@
         </p:spPr>
         <p:txBody>
           <a:bodyPr wrap="square" lIns="45720" rIns="45720" anchor="t">
+            <a:spAutoFit/>
+          </a:bodyPr>
+          <a:lstStyle/>
+          <a:p>
+            <a:pPr algn="r">
+              <a:spcAft>
+                <a:spcPts val="600"/>
+              </a:spcAft>
+            </a:pPr>
+            <a:r>
+              <a:rPr lang="en-US" sz="1100" b="0" dirty="0">
+                <a:solidFill>
+                  <a:schemeClr val="bg1"/>
+                </a:solidFill>
+                <a:latin typeface="Segoe UI"/>
+              </a:rPr>
+              <a:t>18</a:t>
+            </a:r>
+            <a:endParaRPr sz="1100" b="0" dirty="0">
+              <a:solidFill>
+                <a:schemeClr val="bg1"/>
+              </a:solidFill>
+              <a:latin typeface="Segoe UI"/>
+            </a:endParaRPr>
+          </a:p>
+        </p:txBody>
+      </p:sp>
+      <p:sp>
+        <p:nvSpPr>
+          <p:cNvPr id="5" name="Rectangle 4"/>
+          <p:cNvSpPr/>
+          <p:nvPr/>
+        </p:nvSpPr>
+        <p:spPr>
+          <a:xfrm>
+            <a:off x="548640" y="1463040"/>
+            <a:ext cx="3566160" cy="4023360"/>
+          </a:xfrm>
+          <a:prstGeom prst="rect">
+            <a:avLst/>
+          </a:prstGeom>
+          <a:solidFill>
+            <a:srgbClr val="1A1F33"/>
+          </a:solidFill>
+          <a:ln>
+            <a:noFill/>
+          </a:ln>
+          <a:effectLst/>
+        </p:spPr>
+        <p:style>
+          <a:lnRef idx="1">
+            <a:schemeClr val="accent1"/>
+          </a:lnRef>
+          <a:fillRef idx="3">
+            <a:schemeClr val="accent1"/>
+          </a:fillRef>
+          <a:effectRef idx="2">
+            <a:schemeClr val="accent1"/>
+          </a:effectRef>
+          <a:fontRef idx="minor">
+            <a:schemeClr val="lt1"/>
+          </a:fontRef>
+        </p:style>
+        <p:txBody>
+          <a:bodyPr rtlCol="0" anchor="ctr"/>
+          <a:lstStyle/>
+          <a:p>
+            <a:pPr algn="ctr"/>
+            <a:endParaRPr/>
+          </a:p>
+        </p:txBody>
+      </p:sp>
+      <p:sp>
+        <p:nvSpPr>
+          <p:cNvPr id="6" name="TextBox 5"/>
+          <p:cNvSpPr txBox="1"/>
+          <p:nvPr/>
+        </p:nvSpPr>
+        <p:spPr>
+          <a:xfrm>
+            <a:off x="731520" y="1645920"/>
+            <a:ext cx="3200400" cy="457200"/>
+          </a:xfrm>
+          <a:prstGeom prst="rect">
+            <a:avLst/>
+          </a:prstGeom>
+          <a:noFill/>
+        </p:spPr>
+        <p:txBody>
+          <a:bodyPr wrap="square" lIns="45720" rIns="45720" anchor="t">
+            <a:spAutoFit/>
+          </a:bodyPr>
+          <a:lstStyle/>
+          <a:p>
+            <a:pPr algn="l">
+              <a:spcAft>
+                <a:spcPts val="600"/>
+              </a:spcAft>
+            </a:pPr>
+            <a:r>
+              <a:rPr sz="1900" b="1">
+                <a:solidFill>
+                  <a:srgbClr val="E06A2E"/>
+                </a:solidFill>
+                <a:latin typeface="Segoe UI"/>
+              </a:rPr>
+              <a:t>Sharper edges</a:t>
+            </a:r>
+          </a:p>
+        </p:txBody>
+      </p:sp>
+      <p:sp>
+        <p:nvSpPr>
+          <p:cNvPr id="7" name="TextBox 6"/>
+          <p:cNvSpPr txBox="1"/>
+          <p:nvPr/>
+        </p:nvSpPr>
+        <p:spPr>
+          <a:xfrm>
+            <a:off x="731520" y="2240280"/>
+            <a:ext cx="3200400" cy="3200400"/>
+          </a:xfrm>
+          <a:prstGeom prst="rect">
+            <a:avLst/>
+          </a:prstGeom>
+          <a:noFill/>
+        </p:spPr>
+        <p:txBody>
+          <a:bodyPr wrap="square" lIns="45720" rIns="45720" anchor="t">
+            <a:spAutoFit/>
+          </a:bodyPr>
+          <a:lstStyle/>
+          <a:p>
+            <a:pPr algn="l">
+              <a:spcAft>
+                <a:spcPts val="1200"/>
+              </a:spcAft>
+            </a:pPr>
+            <a:r>
+              <a:rPr sz="1600" b="0">
+                <a:solidFill>
+                  <a:srgbClr val="E8EAF2"/>
+                </a:solidFill>
+                <a:latin typeface="Segoe UI"/>
+              </a:rPr>
+              <a:t>•  Average several trained MedSAM2 runs (an ensemble), with no new training.</a:t>
+            </a:r>
+          </a:p>
+          <a:p>
+            <a:pPr algn="l">
+              <a:spcAft>
+                <a:spcPts val="1200"/>
+              </a:spcAft>
+            </a:pPr>
+            <a:r>
+              <a:rPr sz="1600" b="0">
+                <a:solidFill>
+                  <a:srgbClr val="E8EAF2"/>
+                </a:solidFill>
+                <a:latin typeface="Segoe UI"/>
+              </a:rPr>
+              <a:t>•  Edge-focused training loss.</a:t>
+            </a:r>
+          </a:p>
+          <a:p>
+            <a:pPr algn="l">
+              <a:spcAft>
+                <a:spcPts val="1200"/>
+              </a:spcAft>
+            </a:pPr>
+            <a:r>
+              <a:rPr sz="1600" b="0">
+                <a:solidFill>
+                  <a:srgbClr val="E8EAF2"/>
+                </a:solidFill>
+                <a:latin typeface="Segoe UI"/>
+              </a:rPr>
+              <a:t>•  Finer output: scans are 182 × 218, the model works at 512 × 512.</a:t>
+            </a:r>
+          </a:p>
+        </p:txBody>
+      </p:sp>
+      <p:sp>
+        <p:nvSpPr>
+          <p:cNvPr id="8" name="Rectangle 7"/>
+          <p:cNvSpPr/>
+          <p:nvPr/>
+        </p:nvSpPr>
+        <p:spPr>
+          <a:xfrm>
+            <a:off x="4297679" y="1463040"/>
+            <a:ext cx="3566160" cy="4023360"/>
+          </a:xfrm>
+          <a:prstGeom prst="rect">
+            <a:avLst/>
+          </a:prstGeom>
+          <a:solidFill>
+            <a:srgbClr val="1A1F33"/>
+          </a:solidFill>
+          <a:ln>
+            <a:noFill/>
+          </a:ln>
+          <a:effectLst/>
+        </p:spPr>
+        <p:style>
+          <a:lnRef idx="1">
+            <a:schemeClr val="accent1"/>
+          </a:lnRef>
+          <a:fillRef idx="3">
+            <a:schemeClr val="accent1"/>
+          </a:fillRef>
+          <a:effectRef idx="2">
+            <a:schemeClr val="accent1"/>
+          </a:effectRef>
+          <a:fontRef idx="minor">
+            <a:schemeClr val="lt1"/>
+          </a:fontRef>
+        </p:style>
+        <p:txBody>
+          <a:bodyPr rtlCol="0" anchor="ctr"/>
+          <a:lstStyle/>
+          <a:p>
+            <a:pPr algn="ctr"/>
+            <a:endParaRPr/>
+          </a:p>
+        </p:txBody>
+      </p:sp>
+      <p:sp>
+        <p:nvSpPr>
+          <p:cNvPr id="9" name="TextBox 8"/>
+          <p:cNvSpPr txBox="1"/>
+          <p:nvPr/>
+        </p:nvSpPr>
+        <p:spPr>
+          <a:xfrm>
+            <a:off x="4480559" y="1645920"/>
+            <a:ext cx="3200400" cy="457200"/>
+          </a:xfrm>
+          <a:prstGeom prst="rect">
+            <a:avLst/>
+          </a:prstGeom>
+          <a:noFill/>
+        </p:spPr>
+        <p:txBody>
+          <a:bodyPr wrap="square" lIns="45720" rIns="45720" anchor="t">
+            <a:spAutoFit/>
+          </a:bodyPr>
+          <a:lstStyle/>
+          <a:p>
+            <a:pPr algn="l">
+              <a:spcAft>
+                <a:spcPts val="600"/>
+              </a:spcAft>
+            </a:pPr>
+            <a:r>
+              <a:rPr sz="1900" b="1">
+                <a:solidFill>
+                  <a:srgbClr val="3987E5"/>
+                </a:solidFill>
+                <a:latin typeface="Segoe UI"/>
+              </a:rPr>
+              <a:t>Hints &amp; small tumours</a:t>
+            </a:r>
+          </a:p>
+        </p:txBody>
+      </p:sp>
+      <p:sp>
+        <p:nvSpPr>
+          <p:cNvPr id="10" name="TextBox 9"/>
+          <p:cNvSpPr txBox="1"/>
+          <p:nvPr/>
+        </p:nvSpPr>
+        <p:spPr>
+          <a:xfrm>
+            <a:off x="4480559" y="2240280"/>
+            <a:ext cx="3200400" cy="3200400"/>
+          </a:xfrm>
+          <a:prstGeom prst="rect">
+            <a:avLst/>
+          </a:prstGeom>
+          <a:noFill/>
+        </p:spPr>
+        <p:txBody>
+          <a:bodyPr wrap="square" lIns="45720" rIns="45720" anchor="t">
+            <a:spAutoFit/>
+          </a:bodyPr>
+          <a:lstStyle/>
+          <a:p>
+            <a:pPr algn="l">
+              <a:spcAft>
+                <a:spcPts val="1200"/>
+              </a:spcAft>
+            </a:pPr>
+            <a:r>
+              <a:rPr sz="1600" b="0">
+                <a:solidFill>
+                  <a:srgbClr val="E8EAF2"/>
+                </a:solidFill>
+                <a:latin typeface="Segoe UI"/>
+              </a:rPr>
+              <a:t>•  Replace YOLO with a 3D nnU‑Net as the hint maker: the final score follows the hint quality.</a:t>
+            </a:r>
+          </a:p>
+          <a:p>
+            <a:pPr algn="l">
+              <a:spcAft>
+                <a:spcPts val="1200"/>
+              </a:spcAft>
+            </a:pPr>
+            <a:r>
+              <a:rPr sz="1600" b="0">
+                <a:solidFill>
+                  <a:srgbClr val="E8EAF2"/>
+                </a:solidFill>
+                <a:latin typeface="Segoe UI"/>
+              </a:rPr>
+              <a:t>•  Weigh hint pixels by shape confidence ('max_weighted').</a:t>
+            </a:r>
+          </a:p>
+          <a:p>
+            <a:pPr algn="l">
+              <a:spcAft>
+                <a:spcPts val="1200"/>
+              </a:spcAft>
+            </a:pPr>
+            <a:r>
+              <a:rPr sz="1600" b="0">
+                <a:solidFill>
+                  <a:srgbClr val="E8EAF2"/>
+                </a:solidFill>
+                <a:latin typeface="Segoe UI"/>
+              </a:rPr>
+              <a:t>•  Give YOLO 3D context (neighbouring slices).</a:t>
+            </a:r>
+          </a:p>
+          <a:p>
+            <a:pPr algn="l">
+              <a:spcAft>
+                <a:spcPts val="1200"/>
+              </a:spcAft>
+            </a:pPr>
+            <a:r>
+              <a:rPr sz="1600" b="0">
+                <a:solidFill>
+                  <a:srgbClr val="E8EAF2"/>
+                </a:solidFill>
+                <a:latin typeface="Segoe UI"/>
+              </a:rPr>
+              <a:t>•  Train more on tumours under 10 mL.</a:t>
+            </a:r>
+          </a:p>
+        </p:txBody>
+      </p:sp>
+      <p:sp>
+        <p:nvSpPr>
+          <p:cNvPr id="11" name="Rectangle 10"/>
+          <p:cNvSpPr/>
+          <p:nvPr/>
+        </p:nvSpPr>
+        <p:spPr>
+          <a:xfrm>
+            <a:off x="8046719" y="1463040"/>
+            <a:ext cx="3566160" cy="4023360"/>
+          </a:xfrm>
+          <a:prstGeom prst="rect">
+            <a:avLst/>
+          </a:prstGeom>
+          <a:solidFill>
+            <a:srgbClr val="1A1F33"/>
+          </a:solidFill>
+          <a:ln>
+            <a:noFill/>
+          </a:ln>
+          <a:effectLst/>
+        </p:spPr>
+        <p:style>
+          <a:lnRef idx="1">
+            <a:schemeClr val="accent1"/>
+          </a:lnRef>
+          <a:fillRef idx="3">
+            <a:schemeClr val="accent1"/>
+          </a:fillRef>
+          <a:effectRef idx="2">
+            <a:schemeClr val="accent1"/>
+          </a:effectRef>
+          <a:fontRef idx="minor">
+            <a:schemeClr val="lt1"/>
+          </a:fontRef>
+        </p:style>
+        <p:txBody>
+          <a:bodyPr rtlCol="0" anchor="ctr"/>
+          <a:lstStyle/>
+          <a:p>
+            <a:pPr algn="ctr"/>
+            <a:endParaRPr/>
+          </a:p>
+        </p:txBody>
+      </p:sp>
+      <p:sp>
+        <p:nvSpPr>
+          <p:cNvPr id="12" name="TextBox 11"/>
+          <p:cNvSpPr txBox="1"/>
+          <p:nvPr/>
+        </p:nvSpPr>
+        <p:spPr>
+          <a:xfrm>
+            <a:off x="8229599" y="1645920"/>
+            <a:ext cx="3200400" cy="457200"/>
+          </a:xfrm>
+          <a:prstGeom prst="rect">
+            <a:avLst/>
+          </a:prstGeom>
+          <a:noFill/>
+        </p:spPr>
+        <p:txBody>
+          <a:bodyPr wrap="square" lIns="45720" rIns="45720" anchor="t">
+            <a:spAutoFit/>
+          </a:bodyPr>
+          <a:lstStyle/>
+          <a:p>
+            <a:pPr algn="l">
+              <a:spcAft>
+                <a:spcPts val="600"/>
+              </a:spcAft>
+            </a:pPr>
+            <a:r>
+              <a:rPr sz="1900" b="1">
+                <a:solidFill>
+                  <a:srgbClr val="2FB35C"/>
+                </a:solidFill>
+                <a:latin typeface="Segoe UI"/>
+              </a:rPr>
+              <a:t>Beyond this project</a:t>
+            </a:r>
+          </a:p>
+        </p:txBody>
+      </p:sp>
+      <p:sp>
+        <p:nvSpPr>
+          <p:cNvPr id="13" name="TextBox 12"/>
+          <p:cNvSpPr txBox="1"/>
+          <p:nvPr/>
+        </p:nvSpPr>
+        <p:spPr>
+          <a:xfrm>
+            <a:off x="8229599" y="2240280"/>
+            <a:ext cx="3200400" cy="3200400"/>
+          </a:xfrm>
+          <a:prstGeom prst="rect">
+            <a:avLst/>
+          </a:prstGeom>
+          <a:noFill/>
+        </p:spPr>
+        <p:txBody>
+          <a:bodyPr wrap="square" lIns="45720" rIns="45720" anchor="t">
+            <a:spAutoFit/>
+          </a:bodyPr>
+          <a:lstStyle/>
+          <a:p>
+            <a:pPr algn="l">
+              <a:spcAft>
+                <a:spcPts val="1200"/>
+              </a:spcAft>
+            </a:pPr>
+            <a:r>
+              <a:rPr sz="1600" b="0">
+                <a:solidFill>
+                  <a:srgbClr val="E8EAF2"/>
+                </a:solidFill>
+                <a:latin typeface="Segoe UI"/>
+              </a:rPr>
+              <a:t>•  Predict the tumour parts (ET, NETC, SNFH), not only the whole tumour.</a:t>
+            </a:r>
+          </a:p>
+          <a:p>
+            <a:pPr algn="l">
+              <a:spcAft>
+                <a:spcPts val="1200"/>
+              </a:spcAft>
+            </a:pPr>
+            <a:r>
+              <a:rPr sz="1600" b="0">
+                <a:solidFill>
+                  <a:srgbClr val="E8EAF2"/>
+                </a:solidFill>
+                <a:latin typeface="Segoe UI"/>
+              </a:rPr>
+              <a:t>•  Test on other hospitals' scans.</a:t>
+            </a:r>
+          </a:p>
+          <a:p>
+            <a:pPr algn="l">
+              <a:spcAft>
+                <a:spcPts val="1200"/>
+              </a:spcAft>
+            </a:pPr>
+            <a:r>
+              <a:rPr sz="1600" b="0">
+                <a:solidFill>
+                  <a:srgbClr val="E8EAF2"/>
+                </a:solidFill>
+                <a:latin typeface="Segoe UI"/>
+              </a:rPr>
+              <a:t>•  Remove the test/train people overlap; measure speed.</a:t>
+            </a:r>
+          </a:p>
+        </p:txBody>
+      </p:sp>
+      <p:sp>
+        <p:nvSpPr>
+          <p:cNvPr id="14" name="Rounded Rectangle 13"/>
+          <p:cNvSpPr/>
+          <p:nvPr/>
+        </p:nvSpPr>
+        <p:spPr>
+          <a:xfrm>
+            <a:off x="548640" y="5806440"/>
+            <a:ext cx="11064240" cy="566928"/>
+          </a:xfrm>
+          <a:prstGeom prst="roundRect">
+            <a:avLst>
+              <a:gd name="adj" fmla="val 15000"/>
+            </a:avLst>
+          </a:prstGeom>
+          <a:solidFill>
+            <a:srgbClr val="1A1F33"/>
+          </a:solidFill>
+          <a:ln>
+            <a:noFill/>
+          </a:ln>
+          <a:effectLst/>
+        </p:spPr>
+        <p:style>
+          <a:lnRef idx="1">
+            <a:schemeClr val="accent1"/>
+          </a:lnRef>
+          <a:fillRef idx="3">
+            <a:schemeClr val="accent1"/>
+          </a:fillRef>
+          <a:effectRef idx="2">
+            <a:schemeClr val="accent1"/>
+          </a:effectRef>
+          <a:fontRef idx="minor">
+            <a:schemeClr val="lt1"/>
+          </a:fontRef>
+        </p:style>
+        <p:txBody>
+          <a:bodyPr rtlCol="0" anchor="ctr"/>
+          <a:lstStyle/>
+          <a:p>
+            <a:pPr algn="ctr"/>
+            <a:endParaRPr/>
+          </a:p>
+        </p:txBody>
+      </p:sp>
+      <p:sp>
+        <p:nvSpPr>
+          <p:cNvPr id="15" name="TextBox 14"/>
+          <p:cNvSpPr txBox="1"/>
+          <p:nvPr/>
+        </p:nvSpPr>
+        <p:spPr>
+          <a:xfrm>
+            <a:off x="777240" y="5806440"/>
+            <a:ext cx="10744200" cy="566928"/>
+          </a:xfrm>
+          <a:prstGeom prst="rect">
+            <a:avLst/>
+          </a:prstGeom>
+          <a:noFill/>
+        </p:spPr>
+        <p:txBody>
+          <a:bodyPr wrap="square" lIns="45720" rIns="45720" anchor="ctr">
             <a:spAutoFit/>
           </a:bodyPr>
           <a:lstStyle/>
@@ -15069,46 +18022,26 @@
               </a:spcAft>
             </a:pPr>
             <a:r>
-              <a:rPr sz="3000" b="0">
-                <a:solidFill>
-                  <a:schemeClr val="bg1"/>
-                </a:solidFill>
-                <a:latin typeface="Segoe UI"/>
-              </a:rPr>
-              <a:t>Questions?</a:t>
-            </a:r>
-          </a:p>
-        </p:txBody>
-      </p:sp>
-      <p:pic>
-        <p:nvPicPr>
-          <p:cNvPr id="14" name="Picture 13" descr="mod_labels.png"/>
-          <p:cNvPicPr>
-            <a:picLocks noChangeAspect="1"/>
-          </p:cNvPicPr>
-          <p:nvPr/>
-        </p:nvPicPr>
-        <p:blipFill>
-          <a:blip r:embed="rId3"/>
-          <a:stretch>
-            <a:fillRect/>
-          </a:stretch>
-        </p:blipFill>
-        <p:spPr>
-          <a:xfrm>
-            <a:off x="8011223" y="914400"/>
-            <a:ext cx="3271393" cy="4937760"/>
-          </a:xfrm>
-          <a:prstGeom prst="rect">
-            <a:avLst/>
-          </a:prstGeom>
-          <a:ln w="9525">
-            <a:solidFill>
-              <a:srgbClr val="2A2F47"/>
-            </a:solidFill>
-          </a:ln>
-        </p:spPr>
-      </p:pic>
+              <a:rPr sz="1600" b="1">
+                <a:solidFill>
+                  <a:srgbClr val="E8EAF2"/>
+                </a:solidFill>
+                <a:latin typeface="Segoe UI"/>
+              </a:rPr>
+              <a:t>Key takeaway:</a:t>
+            </a:r>
+            <a:r>
+              <a:rPr sz="1600" b="0">
+                <a:solidFill>
+                  <a:srgbClr val="E8EAF2"/>
+                </a:solidFill>
+                <a:latin typeface="Segoe UI"/>
+              </a:rPr>
+              <a:t> Next gains come from sharper edges and small tumours, then proving it on outside data.</a:t>
+            </a:r>
+          </a:p>
+        </p:txBody>
+      </p:sp>
     </p:spTree>
   </p:cSld>
   <p:clrMapOvr>
@@ -15136,7 +18069,7 @@
         <p:spPr>
           <a:xfrm>
             <a:off x="548640" y="256032"/>
-            <a:ext cx="8229600" cy="274320"/>
+            <a:ext cx="8229600" cy="320040"/>
           </a:xfrm>
           <a:prstGeom prst="rect">
             <a:avLst/>
@@ -15144,7 +18077,7 @@
           <a:noFill/>
         </p:spPr>
         <p:txBody>
-          <a:bodyPr wrap="square" anchor="t" lIns="45720" rIns="45720">
+          <a:bodyPr wrap="square" lIns="45720" rIns="45720" anchor="t">
             <a:spAutoFit/>
           </a:bodyPr>
           <a:lstStyle/>
@@ -15157,11 +18090,11 @@
             <a:r>
               <a:rPr sz="1200" b="0">
                 <a:solidFill>
-                  <a:srgbClr val="FFFFFF"/>
-                </a:solidFill>
-                <a:latin typeface="Segoe UI"/>
-              </a:rPr>
-              <a:t>EXPERIMENTS · WHAT-IF TEST (VAL, 245 PATIENTS)</a:t>
+                  <a:srgbClr val="E06A2E"/>
+                </a:solidFill>
+                <a:latin typeface="Segoe UI"/>
+              </a:rPr>
+              <a:t>NEXT STEPS</a:t>
             </a:r>
           </a:p>
         </p:txBody>
@@ -15175,7 +18108,7 @@
         <p:spPr>
           <a:xfrm>
             <a:off x="548640" y="475488"/>
-            <a:ext cx="11064240" cy="585216"/>
+            <a:ext cx="11064240" cy="731520"/>
           </a:xfrm>
           <a:prstGeom prst="rect">
             <a:avLst/>
@@ -15183,7 +18116,7 @@
           <a:noFill/>
         </p:spPr>
         <p:txBody>
-          <a:bodyPr wrap="square" anchor="t" lIns="45720" rIns="45720">
+          <a:bodyPr wrap="square" lIns="45720" rIns="45720" anchor="t">
             <a:spAutoFit/>
           </a:bodyPr>
           <a:lstStyle/>
@@ -15196,11 +18129,11 @@
             <a:r>
               <a:rPr sz="3200" b="0">
                 <a:solidFill>
-                  <a:srgbClr val="FFFFFF"/>
-                </a:solidFill>
-                <a:latin typeface="Segoe UI"/>
-              </a:rPr>
-              <a:t>What if the start slice were perfect?</a:t>
+                  <a:srgbClr val="E8EAF2"/>
+                </a:solidFill>
+                <a:latin typeface="Segoe UI"/>
+              </a:rPr>
+              <a:t>Future work: fewer missed and false slices</a:t>
             </a:r>
           </a:p>
         </p:txBody>
@@ -15214,7 +18147,7 @@
         <p:spPr>
           <a:xfrm>
             <a:off x="10972800" y="6446520"/>
-            <a:ext cx="914400" cy="265176"/>
+            <a:ext cx="914400" cy="261610"/>
           </a:xfrm>
           <a:prstGeom prst="rect">
             <a:avLst/>
@@ -15222,7 +18155,7 @@
           <a:noFill/>
         </p:spPr>
         <p:txBody>
-          <a:bodyPr wrap="square" anchor="t" lIns="45720" rIns="45720">
+          <a:bodyPr wrap="square" lIns="45720" rIns="45720" anchor="t">
             <a:spAutoFit/>
           </a:bodyPr>
           <a:lstStyle/>
@@ -15233,32 +18166,36 @@
               </a:spcAft>
             </a:pPr>
             <a:r>
-              <a:rPr sz="1100" b="0">
-                <a:solidFill>
-                  <a:srgbClr val="FFFFFF"/>
-                </a:solidFill>
-                <a:latin typeface="Segoe UI"/>
-              </a:rPr>
-              <a:t>15</a:t>
-            </a:r>
-          </a:p>
-        </p:txBody>
-      </p:sp>
-      <p:sp>
-        <p:nvSpPr>
-          <p:cNvPr id="5" name="Rounded Rectangle 4"/>
+              <a:rPr lang="en-US" sz="1100" b="0" dirty="0">
+                <a:solidFill>
+                  <a:schemeClr val="bg1"/>
+                </a:solidFill>
+                <a:latin typeface="Segoe UI"/>
+              </a:rPr>
+              <a:t>19</a:t>
+            </a:r>
+            <a:endParaRPr sz="1100" b="0" dirty="0">
+              <a:solidFill>
+                <a:schemeClr val="bg1"/>
+              </a:solidFill>
+              <a:latin typeface="Segoe UI"/>
+            </a:endParaRPr>
+          </a:p>
+        </p:txBody>
+      </p:sp>
+      <p:sp>
+        <p:nvSpPr>
+          <p:cNvPr id="5" name="Rectangle 4"/>
           <p:cNvSpPr/>
           <p:nvPr/>
         </p:nvSpPr>
         <p:spPr>
           <a:xfrm>
-            <a:off x="548640" y="1325880"/>
-            <a:ext cx="11064240" cy="566928"/>
-          </a:xfrm>
-          <a:prstGeom prst="roundRect">
-            <a:avLst>
-              <a:gd name="adj" fmla="val 15000"/>
-            </a:avLst>
+            <a:off x="548640" y="2103120"/>
+            <a:ext cx="3566160" cy="3520440"/>
+          </a:xfrm>
+          <a:prstGeom prst="rect">
+            <a:avLst/>
           </a:prstGeom>
           <a:solidFill>
             <a:srgbClr val="1A1F33"/>
@@ -15287,6 +18224,7 @@
           <a:lstStyle/>
           <a:p>
             <a:pPr algn="ctr"/>
+            <a:endParaRPr/>
           </a:p>
         </p:txBody>
       </p:sp>
@@ -15298,8 +18236,8 @@
         </p:nvSpPr>
         <p:spPr>
           <a:xfrm>
-            <a:off x="777240" y="1325880"/>
-            <a:ext cx="10744200" cy="566928"/>
+            <a:off x="731520" y="2240280"/>
+            <a:ext cx="3200400" cy="457200"/>
           </a:xfrm>
           <a:prstGeom prst="rect">
             <a:avLst/>
@@ -15307,25 +18245,71 @@
           <a:noFill/>
         </p:spPr>
         <p:txBody>
-          <a:bodyPr wrap="square" anchor="ctr" lIns="45720" rIns="45720">
+          <a:bodyPr wrap="square" lIns="45720" rIns="45720" anchor="t">
             <a:spAutoFit/>
           </a:bodyPr>
           <a:lstStyle/>
           <a:p>
             <a:pPr algn="l">
               <a:spcAft>
-                <a:spcPts val="0"/>
+                <a:spcPts val="600"/>
               </a:spcAft>
             </a:pPr>
             <a:r>
-              <a:rPr sz="1600" b="1">
+              <a:rPr sz="1900" b="1">
+                <a:solidFill>
+                  <a:srgbClr val="E06A2E"/>
+                </a:solidFill>
+                <a:latin typeface="Segoe UI"/>
+              </a:rPr>
+              <a:t>Fewer false slices</a:t>
+            </a:r>
+          </a:p>
+        </p:txBody>
+      </p:sp>
+      <p:sp>
+        <p:nvSpPr>
+          <p:cNvPr id="7" name="TextBox 6"/>
+          <p:cNvSpPr txBox="1"/>
+          <p:nvPr/>
+        </p:nvSpPr>
+        <p:spPr>
+          <a:xfrm>
+            <a:off x="731520" y="2788920"/>
+            <a:ext cx="3200400" cy="2743200"/>
+          </a:xfrm>
+          <a:prstGeom prst="rect">
+            <a:avLst/>
+          </a:prstGeom>
+          <a:noFill/>
+        </p:spPr>
+        <p:txBody>
+          <a:bodyPr wrap="square" lIns="45720" rIns="45720" anchor="t">
+            <a:spAutoFit/>
+          </a:bodyPr>
+          <a:lstStyle/>
+          <a:p>
+            <a:pPr algn="l">
+              <a:spcAft>
+                <a:spcPts val="1200"/>
+              </a:spcAft>
+            </a:pPr>
+            <a:r>
+              <a:rPr sz="1600" b="0">
                 <a:solidFill>
                   <a:srgbClr val="E8EAF2"/>
                 </a:solidFill>
                 <a:latin typeface="Segoe UI"/>
               </a:rPr>
-              <a:t>The test:</a:t>
-            </a:r>
+              <a:t>•  Smooth YOLO across neighbouring slices, so a one-slice false alarm fades before it becomes a hint.</a:t>
+            </a:r>
+          </a:p>
+          <a:p>
+            <a:pPr algn="l">
+              <a:spcAft>
+                <a:spcPts val="1200"/>
+              </a:spcAft>
+            </a:pPr>
             <a:r>
               <a:rPr sz="1600" b="0">
                 <a:solidFill>
@@ -15333,21 +18317,21 @@
                 </a:solidFill>
                 <a:latin typeface="Segoe UI"/>
               </a:rPr>
-              <a:t> same trained MedSAM2, no retraining. Start slice gets the expert mask; all other slices keep YOLO's hint.</a:t>
-            </a:r>
-          </a:p>
-        </p:txBody>
-      </p:sp>
-      <p:sp>
-        <p:nvSpPr>
-          <p:cNvPr id="7" name="Rectangle 6"/>
+              <a:t>•  Let MedSAM2's 'tumour here?' score wipe empty slices (the switch is in the code, not yet tested).</a:t>
+            </a:r>
+          </a:p>
+        </p:txBody>
+      </p:sp>
+      <p:sp>
+        <p:nvSpPr>
+          <p:cNvPr id="8" name="Rectangle 7"/>
           <p:cNvSpPr/>
           <p:nvPr/>
         </p:nvSpPr>
         <p:spPr>
           <a:xfrm>
-            <a:off x="548640" y="2103120"/>
-            <a:ext cx="6035040" cy="3520440"/>
+            <a:off x="4297679" y="2103120"/>
+            <a:ext cx="3566160" cy="3520440"/>
           </a:xfrm>
           <a:prstGeom prst="rect">
             <a:avLst/>
@@ -15379,19 +18363,20 @@
           <a:lstStyle/>
           <a:p>
             <a:pPr algn="ctr"/>
-          </a:p>
-        </p:txBody>
-      </p:sp>
-      <p:sp>
-        <p:nvSpPr>
-          <p:cNvPr id="8" name="TextBox 7"/>
+            <a:endParaRPr/>
+          </a:p>
+        </p:txBody>
+      </p:sp>
+      <p:sp>
+        <p:nvSpPr>
+          <p:cNvPr id="9" name="TextBox 8"/>
           <p:cNvSpPr txBox="1"/>
           <p:nvPr/>
         </p:nvSpPr>
         <p:spPr>
           <a:xfrm>
-            <a:off x="731520" y="2212848"/>
-            <a:ext cx="5669280" cy="411480"/>
+            <a:off x="4480559" y="2240280"/>
+            <a:ext cx="3200400" cy="457200"/>
           </a:xfrm>
           <a:prstGeom prst="rect">
             <a:avLst/>
@@ -15399,46 +18384,99 @@
           <a:noFill/>
         </p:spPr>
         <p:txBody>
-          <a:bodyPr wrap="square" anchor="t" lIns="45720" rIns="45720">
+          <a:bodyPr wrap="square" lIns="45720" rIns="45720" anchor="t">
             <a:spAutoFit/>
           </a:bodyPr>
           <a:lstStyle/>
           <a:p>
             <a:pPr algn="l">
               <a:spcAft>
-                <a:spcPts val="0"/>
+                <a:spcPts val="600"/>
               </a:spcAft>
             </a:pPr>
             <a:r>
               <a:rPr sz="1900" b="1">
                 <a:solidFill>
-                  <a:srgbClr val="E06A2E"/>
-                </a:solidFill>
-                <a:latin typeface="Segoe UI"/>
-              </a:rPr>
-              <a:t>How it runs</a:t>
-            </a:r>
-          </a:p>
-        </p:txBody>
-      </p:sp>
-      <p:sp>
-        <p:nvSpPr>
-          <p:cNvPr id="9" name="Rounded Rectangle 8"/>
+                  <a:srgbClr val="3987E5"/>
+                </a:solidFill>
+                <a:latin typeface="Segoe UI"/>
+              </a:rPr>
+              <a:t>Hints &amp; small tumours</a:t>
+            </a:r>
+          </a:p>
+        </p:txBody>
+      </p:sp>
+      <p:sp>
+        <p:nvSpPr>
+          <p:cNvPr id="10" name="TextBox 9"/>
+          <p:cNvSpPr txBox="1"/>
+          <p:nvPr/>
+        </p:nvSpPr>
+        <p:spPr>
+          <a:xfrm>
+            <a:off x="4480559" y="2788920"/>
+            <a:ext cx="3200400" cy="2743200"/>
+          </a:xfrm>
+          <a:prstGeom prst="rect">
+            <a:avLst/>
+          </a:prstGeom>
+          <a:noFill/>
+        </p:spPr>
+        <p:txBody>
+          <a:bodyPr wrap="square" lIns="45720" rIns="45720" anchor="t">
+            <a:spAutoFit/>
+          </a:bodyPr>
+          <a:lstStyle/>
+          <a:p>
+            <a:pPr algn="l">
+              <a:spcAft>
+                <a:spcPts val="1200"/>
+              </a:spcAft>
+            </a:pPr>
+            <a:r>
+              <a:rPr sz="1600" b="0">
+                <a:solidFill>
+                  <a:srgbClr val="E8EAF2"/>
+                </a:solidFill>
+                <a:latin typeface="Segoe UI"/>
+              </a:rPr>
+              <a:t>•  Multiply each pixel of the hint by its shape’s confidence, so a 0.06 shape becomes faint instead of as loud as a 0.90 one.</a:t>
+            </a:r>
+          </a:p>
+          <a:p>
+            <a:pPr algn="l">
+              <a:spcAft>
+                <a:spcPts val="1200"/>
+              </a:spcAft>
+            </a:pPr>
+            <a:r>
+              <a:rPr sz="1600" b="0">
+                <a:solidFill>
+                  <a:srgbClr val="E8EAF2"/>
+                </a:solidFill>
+                <a:latin typeface="Segoe UI"/>
+              </a:rPr>
+              <a:t>•  Train more on tumours under 10 mL.</a:t>
+            </a:r>
+          </a:p>
+        </p:txBody>
+      </p:sp>
+      <p:sp>
+        <p:nvSpPr>
+          <p:cNvPr id="11" name="Rectangle 10"/>
           <p:cNvSpPr/>
           <p:nvPr/>
         </p:nvSpPr>
         <p:spPr>
           <a:xfrm>
-            <a:off x="864107" y="2788920"/>
-            <a:ext cx="502920" cy="1051560"/>
-          </a:xfrm>
-          <a:prstGeom prst="roundRect">
-            <a:avLst>
-              <a:gd name="adj" fmla="val 12000"/>
-            </a:avLst>
+            <a:off x="8046719" y="2103120"/>
+            <a:ext cx="3566160" cy="3520440"/>
+          </a:xfrm>
+          <a:prstGeom prst="rect">
+            <a:avLst/>
           </a:prstGeom>
           <a:solidFill>
-            <a:srgbClr val="3987E5"/>
+            <a:srgbClr val="1A1F33"/>
           </a:solidFill>
           <a:ln>
             <a:noFill/>
@@ -15464,19 +18502,20 @@
           <a:lstStyle/>
           <a:p>
             <a:pPr algn="ctr"/>
-          </a:p>
-        </p:txBody>
-      </p:sp>
-      <p:sp>
-        <p:nvSpPr>
-          <p:cNvPr id="10" name="TextBox 9"/>
+            <a:endParaRPr/>
+          </a:p>
+        </p:txBody>
+      </p:sp>
+      <p:sp>
+        <p:nvSpPr>
+          <p:cNvPr id="12" name="TextBox 11"/>
           <p:cNvSpPr txBox="1"/>
           <p:nvPr/>
         </p:nvSpPr>
         <p:spPr>
           <a:xfrm>
-            <a:off x="864107" y="2788920"/>
-            <a:ext cx="502920" cy="1051560"/>
+            <a:off x="8229599" y="2240280"/>
+            <a:ext cx="3200400" cy="457200"/>
           </a:xfrm>
           <a:prstGeom prst="rect">
             <a:avLst/>
@@ -15484,46 +18523,101 @@
           <a:noFill/>
         </p:spPr>
         <p:txBody>
-          <a:bodyPr wrap="square" anchor="ctr" lIns="45720" rIns="45720">
+          <a:bodyPr wrap="square" lIns="45720" rIns="45720" anchor="t">
             <a:spAutoFit/>
           </a:bodyPr>
           <a:lstStyle/>
           <a:p>
-            <a:pPr algn="ctr">
+            <a:pPr algn="l">
               <a:spcAft>
-                <a:spcPts val="0"/>
+                <a:spcPts val="600"/>
               </a:spcAft>
             </a:pPr>
             <a:r>
-              <a:rPr sz="1000" b="0">
-                <a:solidFill>
-                  <a:srgbClr val="FFFFFF"/>
-                </a:solidFill>
-                <a:latin typeface="Segoe UI"/>
-              </a:rPr>
-              <a:t>YOLO</a:t>
-            </a:r>
-          </a:p>
-        </p:txBody>
-      </p:sp>
-      <p:sp>
-        <p:nvSpPr>
-          <p:cNvPr id="11" name="Rounded Rectangle 10"/>
+              <a:rPr sz="1900" b="1">
+                <a:solidFill>
+                  <a:srgbClr val="2FB35C"/>
+                </a:solidFill>
+                <a:latin typeface="Segoe UI"/>
+              </a:rPr>
+              <a:t>Much more data</a:t>
+            </a:r>
+          </a:p>
+        </p:txBody>
+      </p:sp>
+      <p:sp>
+        <p:nvSpPr>
+          <p:cNvPr id="13" name="TextBox 12"/>
+          <p:cNvSpPr txBox="1"/>
+          <p:nvPr/>
+        </p:nvSpPr>
+        <p:spPr>
+          <a:xfrm>
+            <a:off x="8229599" y="2788920"/>
+            <a:ext cx="3200400" cy="2743200"/>
+          </a:xfrm>
+          <a:prstGeom prst="rect">
+            <a:avLst/>
+          </a:prstGeom>
+          <a:noFill/>
+        </p:spPr>
+        <p:txBody>
+          <a:bodyPr wrap="square" lIns="45720" rIns="45720" anchor="t">
+            <a:spAutoFit/>
+          </a:bodyPr>
+          <a:lstStyle/>
+          <a:p>
+            <a:pPr algn="l">
+              <a:spcAft>
+                <a:spcPts val="1200"/>
+              </a:spcAft>
+            </a:pPr>
+            <a:r>
+              <a:rPr sz="1600" b="0">
+                <a:solidFill>
+                  <a:srgbClr val="E8EAF2"/>
+                </a:solidFill>
+                <a:latin typeface="Segoe UI"/>
+              </a:rPr>
+              <a:t>•  Train on much more data sets: other BraTS collections and other hospitals' scans.</a:t>
+            </a:r>
+          </a:p>
+          <a:p>
+            <a:pPr algn="l">
+              <a:spcAft>
+                <a:spcPts val="1200"/>
+              </a:spcAft>
+            </a:pPr>
+            <a:r>
+              <a:rPr sz="1600" b="0">
+                <a:solidFill>
+                  <a:srgbClr val="E8EAF2"/>
+                </a:solidFill>
+                <a:latin typeface="Segoe UI"/>
+              </a:rPr>
+              <a:t>•  YOLO still improved with more data; MedSAM2 had levelled off.</a:t>
+            </a:r>
+          </a:p>
+        </p:txBody>
+      </p:sp>
+      <p:sp>
+        <p:nvSpPr>
+          <p:cNvPr id="14" name="Rounded Rectangle 13"/>
           <p:cNvSpPr/>
           <p:nvPr/>
         </p:nvSpPr>
         <p:spPr>
           <a:xfrm>
-            <a:off x="1476755" y="2788920"/>
-            <a:ext cx="502920" cy="1051560"/>
+            <a:off x="548640" y="5806440"/>
+            <a:ext cx="11064240" cy="566928"/>
           </a:xfrm>
           <a:prstGeom prst="roundRect">
             <a:avLst>
-              <a:gd name="adj" fmla="val 12000"/>
+              <a:gd name="adj" fmla="val 15000"/>
             </a:avLst>
           </a:prstGeom>
           <a:solidFill>
-            <a:srgbClr val="3987E5"/>
+            <a:srgbClr val="1A1F33"/>
           </a:solidFill>
           <a:ln>
             <a:noFill/>
@@ -15549,19 +18643,20 @@
           <a:lstStyle/>
           <a:p>
             <a:pPr algn="ctr"/>
-          </a:p>
-        </p:txBody>
-      </p:sp>
-      <p:sp>
-        <p:nvSpPr>
-          <p:cNvPr id="12" name="TextBox 11"/>
+            <a:endParaRPr/>
+          </a:p>
+        </p:txBody>
+      </p:sp>
+      <p:sp>
+        <p:nvSpPr>
+          <p:cNvPr id="15" name="TextBox 14"/>
           <p:cNvSpPr txBox="1"/>
           <p:nvPr/>
         </p:nvSpPr>
         <p:spPr>
           <a:xfrm>
-            <a:off x="1476755" y="2788920"/>
-            <a:ext cx="502920" cy="1051560"/>
+            <a:off x="777240" y="5806440"/>
+            <a:ext cx="10744200" cy="566928"/>
           </a:xfrm>
           <a:prstGeom prst="rect">
             <a:avLst/>
@@ -15569,46 +18664,55 @@
           <a:noFill/>
         </p:spPr>
         <p:txBody>
-          <a:bodyPr wrap="square" anchor="ctr" lIns="45720" rIns="45720">
+          <a:bodyPr wrap="square" lIns="45720" rIns="45720" anchor="ctr">
             <a:spAutoFit/>
           </a:bodyPr>
           <a:lstStyle/>
           <a:p>
-            <a:pPr algn="ctr">
+            <a:pPr algn="l">
               <a:spcAft>
                 <a:spcPts val="0"/>
               </a:spcAft>
             </a:pPr>
             <a:r>
-              <a:rPr sz="1000" b="0">
-                <a:solidFill>
-                  <a:srgbClr val="FFFFFF"/>
-                </a:solidFill>
-                <a:latin typeface="Segoe UI"/>
-              </a:rPr>
-              <a:t>YOLO</a:t>
-            </a:r>
-          </a:p>
-        </p:txBody>
-      </p:sp>
-      <p:sp>
-        <p:nvSpPr>
-          <p:cNvPr id="13" name="Rounded Rectangle 12"/>
+              <a:rPr sz="1600" b="1">
+                <a:solidFill>
+                  <a:srgbClr val="E8EAF2"/>
+                </a:solidFill>
+                <a:latin typeface="Segoe UI"/>
+              </a:rPr>
+              <a:t>Key takeaway: </a:t>
+            </a:r>
+            <a:r>
+              <a:rPr sz="1600" b="0">
+                <a:solidFill>
+                  <a:srgbClr val="E8EAF2"/>
+                </a:solidFill>
+                <a:latin typeface="Segoe UI"/>
+              </a:rPr>
+              <a:t>cleaner hints, more small tumours and much more data should cut missed and false slices.</a:t>
+            </a:r>
+          </a:p>
+        </p:txBody>
+      </p:sp>
+      <p:sp>
+        <p:nvSpPr>
+          <p:cNvPr id="14" name="Rounded Rectangle 13"/>
           <p:cNvSpPr/>
           <p:nvPr/>
         </p:nvSpPr>
         <p:spPr>
           <a:xfrm>
-            <a:off x="2089403" y="2788920"/>
-            <a:ext cx="502920" cy="1051560"/>
+            <a:off x="548640" y="1325880"/>
+            <a:ext cx="11064240" cy="566928"/>
           </a:xfrm>
           <a:prstGeom prst="roundRect">
             <a:avLst>
-              <a:gd name="adj" fmla="val 12000"/>
+              <a:gd name="adj" fmla="val 15000"/>
             </a:avLst>
           </a:prstGeom>
           <a:solidFill>
-            <a:srgbClr val="3987E5"/>
+            <a:srgbClr val="1A1F33"/>
           </a:solidFill>
           <a:ln>
             <a:noFill/>
@@ -15634,19 +18738,20 @@
           <a:lstStyle/>
           <a:p>
             <a:pPr algn="ctr"/>
-          </a:p>
-        </p:txBody>
-      </p:sp>
-      <p:sp>
-        <p:nvSpPr>
-          <p:cNvPr id="14" name="TextBox 13"/>
+            <a:endParaRPr/>
+          </a:p>
+        </p:txBody>
+      </p:sp>
+      <p:sp>
+        <p:nvSpPr>
+          <p:cNvPr id="15" name="TextBox 14"/>
           <p:cNvSpPr txBox="1"/>
           <p:nvPr/>
         </p:nvSpPr>
         <p:spPr>
           <a:xfrm>
-            <a:off x="2089403" y="2788920"/>
-            <a:ext cx="502920" cy="1051560"/>
+            <a:off x="777240" y="1325880"/>
+            <a:ext cx="10744200" cy="566928"/>
           </a:xfrm>
           <a:prstGeom prst="rect">
             <a:avLst/>
@@ -15654,556 +18759,7 @@
           <a:noFill/>
         </p:spPr>
         <p:txBody>
-          <a:bodyPr wrap="square" anchor="ctr" lIns="45720" rIns="45720">
-            <a:spAutoFit/>
-          </a:bodyPr>
-          <a:lstStyle/>
-          <a:p>
-            <a:pPr algn="ctr">
-              <a:spcAft>
-                <a:spcPts val="0"/>
-              </a:spcAft>
-            </a:pPr>
-            <a:r>
-              <a:rPr sz="1000" b="0">
-                <a:solidFill>
-                  <a:srgbClr val="FFFFFF"/>
-                </a:solidFill>
-                <a:latin typeface="Segoe UI"/>
-              </a:rPr>
-              <a:t>YOLO</a:t>
-            </a:r>
-          </a:p>
-        </p:txBody>
-      </p:sp>
-      <p:sp>
-        <p:nvSpPr>
-          <p:cNvPr id="15" name="Rounded Rectangle 14"/>
-          <p:cNvSpPr/>
-          <p:nvPr/>
-        </p:nvSpPr>
-        <p:spPr>
-          <a:xfrm>
-            <a:off x="2702052" y="2788920"/>
-            <a:ext cx="502920" cy="1051560"/>
-          </a:xfrm>
-          <a:prstGeom prst="roundRect">
-            <a:avLst>
-              <a:gd name="adj" fmla="val 12000"/>
-            </a:avLst>
-          </a:prstGeom>
-          <a:solidFill>
-            <a:srgbClr val="3987E5"/>
-          </a:solidFill>
-          <a:ln>
-            <a:noFill/>
-          </a:ln>
-          <a:effectLst/>
-        </p:spPr>
-        <p:style>
-          <a:lnRef idx="1">
-            <a:schemeClr val="accent1"/>
-          </a:lnRef>
-          <a:fillRef idx="3">
-            <a:schemeClr val="accent1"/>
-          </a:fillRef>
-          <a:effectRef idx="2">
-            <a:schemeClr val="accent1"/>
-          </a:effectRef>
-          <a:fontRef idx="minor">
-            <a:schemeClr val="lt1"/>
-          </a:fontRef>
-        </p:style>
-        <p:txBody>
-          <a:bodyPr rtlCol="0" anchor="ctr"/>
-          <a:lstStyle/>
-          <a:p>
-            <a:pPr algn="ctr"/>
-          </a:p>
-        </p:txBody>
-      </p:sp>
-      <p:sp>
-        <p:nvSpPr>
-          <p:cNvPr id="16" name="TextBox 15"/>
-          <p:cNvSpPr txBox="1"/>
-          <p:nvPr/>
-        </p:nvSpPr>
-        <p:spPr>
-          <a:xfrm>
-            <a:off x="2702052" y="2788920"/>
-            <a:ext cx="502920" cy="1051560"/>
-          </a:xfrm>
-          <a:prstGeom prst="rect">
-            <a:avLst/>
-          </a:prstGeom>
-          <a:noFill/>
-        </p:spPr>
-        <p:txBody>
-          <a:bodyPr wrap="square" anchor="ctr" lIns="45720" rIns="45720">
-            <a:spAutoFit/>
-          </a:bodyPr>
-          <a:lstStyle/>
-          <a:p>
-            <a:pPr algn="ctr">
-              <a:spcAft>
-                <a:spcPts val="0"/>
-              </a:spcAft>
-            </a:pPr>
-            <a:r>
-              <a:rPr sz="1000" b="0">
-                <a:solidFill>
-                  <a:srgbClr val="FFFFFF"/>
-                </a:solidFill>
-                <a:latin typeface="Segoe UI"/>
-              </a:rPr>
-              <a:t>YOLO</a:t>
-            </a:r>
-          </a:p>
-        </p:txBody>
-      </p:sp>
-      <p:sp>
-        <p:nvSpPr>
-          <p:cNvPr id="17" name="Rounded Rectangle 16"/>
-          <p:cNvSpPr/>
-          <p:nvPr/>
-        </p:nvSpPr>
-        <p:spPr>
-          <a:xfrm>
-            <a:off x="3314700" y="2788920"/>
-            <a:ext cx="502920" cy="1051560"/>
-          </a:xfrm>
-          <a:prstGeom prst="roundRect">
-            <a:avLst>
-              <a:gd name="adj" fmla="val 12000"/>
-            </a:avLst>
-          </a:prstGeom>
-          <a:solidFill>
-            <a:srgbClr val="2FB35C"/>
-          </a:solidFill>
-          <a:ln>
-            <a:noFill/>
-          </a:ln>
-          <a:effectLst/>
-        </p:spPr>
-        <p:style>
-          <a:lnRef idx="1">
-            <a:schemeClr val="accent1"/>
-          </a:lnRef>
-          <a:fillRef idx="3">
-            <a:schemeClr val="accent1"/>
-          </a:fillRef>
-          <a:effectRef idx="2">
-            <a:schemeClr val="accent1"/>
-          </a:effectRef>
-          <a:fontRef idx="minor">
-            <a:schemeClr val="lt1"/>
-          </a:fontRef>
-        </p:style>
-        <p:txBody>
-          <a:bodyPr rtlCol="0" anchor="ctr"/>
-          <a:lstStyle/>
-          <a:p>
-            <a:pPr algn="ctr"/>
-          </a:p>
-        </p:txBody>
-      </p:sp>
-      <p:sp>
-        <p:nvSpPr>
-          <p:cNvPr id="18" name="TextBox 17"/>
-          <p:cNvSpPr txBox="1"/>
-          <p:nvPr/>
-        </p:nvSpPr>
-        <p:spPr>
-          <a:xfrm>
-            <a:off x="3314700" y="2788920"/>
-            <a:ext cx="502920" cy="1051560"/>
-          </a:xfrm>
-          <a:prstGeom prst="rect">
-            <a:avLst/>
-          </a:prstGeom>
-          <a:noFill/>
-        </p:spPr>
-        <p:txBody>
-          <a:bodyPr wrap="square" anchor="ctr" lIns="45720" rIns="45720">
-            <a:spAutoFit/>
-          </a:bodyPr>
-          <a:lstStyle/>
-          <a:p>
-            <a:pPr algn="ctr">
-              <a:spcAft>
-                <a:spcPts val="0"/>
-              </a:spcAft>
-            </a:pPr>
-            <a:r>
-              <a:rPr sz="1000" b="1">
-                <a:solidFill>
-                  <a:srgbClr val="FFFFFF"/>
-                </a:solidFill>
-                <a:latin typeface="Segoe UI"/>
-              </a:rPr>
-              <a:t>Expert</a:t>
-            </a:r>
-          </a:p>
-        </p:txBody>
-      </p:sp>
-      <p:sp>
-        <p:nvSpPr>
-          <p:cNvPr id="19" name="Rounded Rectangle 18"/>
-          <p:cNvSpPr/>
-          <p:nvPr/>
-        </p:nvSpPr>
-        <p:spPr>
-          <a:xfrm>
-            <a:off x="3927348" y="2788920"/>
-            <a:ext cx="502920" cy="1051560"/>
-          </a:xfrm>
-          <a:prstGeom prst="roundRect">
-            <a:avLst>
-              <a:gd name="adj" fmla="val 12000"/>
-            </a:avLst>
-          </a:prstGeom>
-          <a:solidFill>
-            <a:srgbClr val="3987E5"/>
-          </a:solidFill>
-          <a:ln>
-            <a:noFill/>
-          </a:ln>
-          <a:effectLst/>
-        </p:spPr>
-        <p:style>
-          <a:lnRef idx="1">
-            <a:schemeClr val="accent1"/>
-          </a:lnRef>
-          <a:fillRef idx="3">
-            <a:schemeClr val="accent1"/>
-          </a:fillRef>
-          <a:effectRef idx="2">
-            <a:schemeClr val="accent1"/>
-          </a:effectRef>
-          <a:fontRef idx="minor">
-            <a:schemeClr val="lt1"/>
-          </a:fontRef>
-        </p:style>
-        <p:txBody>
-          <a:bodyPr rtlCol="0" anchor="ctr"/>
-          <a:lstStyle/>
-          <a:p>
-            <a:pPr algn="ctr"/>
-          </a:p>
-        </p:txBody>
-      </p:sp>
-      <p:sp>
-        <p:nvSpPr>
-          <p:cNvPr id="20" name="TextBox 19"/>
-          <p:cNvSpPr txBox="1"/>
-          <p:nvPr/>
-        </p:nvSpPr>
-        <p:spPr>
-          <a:xfrm>
-            <a:off x="3927348" y="2788920"/>
-            <a:ext cx="502920" cy="1051560"/>
-          </a:xfrm>
-          <a:prstGeom prst="rect">
-            <a:avLst/>
-          </a:prstGeom>
-          <a:noFill/>
-        </p:spPr>
-        <p:txBody>
-          <a:bodyPr wrap="square" anchor="ctr" lIns="45720" rIns="45720">
-            <a:spAutoFit/>
-          </a:bodyPr>
-          <a:lstStyle/>
-          <a:p>
-            <a:pPr algn="ctr">
-              <a:spcAft>
-                <a:spcPts val="0"/>
-              </a:spcAft>
-            </a:pPr>
-            <a:r>
-              <a:rPr sz="1000" b="0">
-                <a:solidFill>
-                  <a:srgbClr val="FFFFFF"/>
-                </a:solidFill>
-                <a:latin typeface="Segoe UI"/>
-              </a:rPr>
-              <a:t>YOLO</a:t>
-            </a:r>
-          </a:p>
-        </p:txBody>
-      </p:sp>
-      <p:sp>
-        <p:nvSpPr>
-          <p:cNvPr id="21" name="Rounded Rectangle 20"/>
-          <p:cNvSpPr/>
-          <p:nvPr/>
-        </p:nvSpPr>
-        <p:spPr>
-          <a:xfrm>
-            <a:off x="4539996" y="2788920"/>
-            <a:ext cx="502920" cy="1051560"/>
-          </a:xfrm>
-          <a:prstGeom prst="roundRect">
-            <a:avLst>
-              <a:gd name="adj" fmla="val 12000"/>
-            </a:avLst>
-          </a:prstGeom>
-          <a:solidFill>
-            <a:srgbClr val="3987E5"/>
-          </a:solidFill>
-          <a:ln>
-            <a:noFill/>
-          </a:ln>
-          <a:effectLst/>
-        </p:spPr>
-        <p:style>
-          <a:lnRef idx="1">
-            <a:schemeClr val="accent1"/>
-          </a:lnRef>
-          <a:fillRef idx="3">
-            <a:schemeClr val="accent1"/>
-          </a:fillRef>
-          <a:effectRef idx="2">
-            <a:schemeClr val="accent1"/>
-          </a:effectRef>
-          <a:fontRef idx="minor">
-            <a:schemeClr val="lt1"/>
-          </a:fontRef>
-        </p:style>
-        <p:txBody>
-          <a:bodyPr rtlCol="0" anchor="ctr"/>
-          <a:lstStyle/>
-          <a:p>
-            <a:pPr algn="ctr"/>
-          </a:p>
-        </p:txBody>
-      </p:sp>
-      <p:sp>
-        <p:nvSpPr>
-          <p:cNvPr id="22" name="TextBox 21"/>
-          <p:cNvSpPr txBox="1"/>
-          <p:nvPr/>
-        </p:nvSpPr>
-        <p:spPr>
-          <a:xfrm>
-            <a:off x="4539996" y="2788920"/>
-            <a:ext cx="502920" cy="1051560"/>
-          </a:xfrm>
-          <a:prstGeom prst="rect">
-            <a:avLst/>
-          </a:prstGeom>
-          <a:noFill/>
-        </p:spPr>
-        <p:txBody>
-          <a:bodyPr wrap="square" anchor="ctr" lIns="45720" rIns="45720">
-            <a:spAutoFit/>
-          </a:bodyPr>
-          <a:lstStyle/>
-          <a:p>
-            <a:pPr algn="ctr">
-              <a:spcAft>
-                <a:spcPts val="0"/>
-              </a:spcAft>
-            </a:pPr>
-            <a:r>
-              <a:rPr sz="1000" b="0">
-                <a:solidFill>
-                  <a:srgbClr val="FFFFFF"/>
-                </a:solidFill>
-                <a:latin typeface="Segoe UI"/>
-              </a:rPr>
-              <a:t>YOLO</a:t>
-            </a:r>
-          </a:p>
-        </p:txBody>
-      </p:sp>
-      <p:sp>
-        <p:nvSpPr>
-          <p:cNvPr id="23" name="Rounded Rectangle 22"/>
-          <p:cNvSpPr/>
-          <p:nvPr/>
-        </p:nvSpPr>
-        <p:spPr>
-          <a:xfrm>
-            <a:off x="5152644" y="2788920"/>
-            <a:ext cx="502920" cy="1051560"/>
-          </a:xfrm>
-          <a:prstGeom prst="roundRect">
-            <a:avLst>
-              <a:gd name="adj" fmla="val 12000"/>
-            </a:avLst>
-          </a:prstGeom>
-          <a:solidFill>
-            <a:srgbClr val="3987E5"/>
-          </a:solidFill>
-          <a:ln>
-            <a:noFill/>
-          </a:ln>
-          <a:effectLst/>
-        </p:spPr>
-        <p:style>
-          <a:lnRef idx="1">
-            <a:schemeClr val="accent1"/>
-          </a:lnRef>
-          <a:fillRef idx="3">
-            <a:schemeClr val="accent1"/>
-          </a:fillRef>
-          <a:effectRef idx="2">
-            <a:schemeClr val="accent1"/>
-          </a:effectRef>
-          <a:fontRef idx="minor">
-            <a:schemeClr val="lt1"/>
-          </a:fontRef>
-        </p:style>
-        <p:txBody>
-          <a:bodyPr rtlCol="0" anchor="ctr"/>
-          <a:lstStyle/>
-          <a:p>
-            <a:pPr algn="ctr"/>
-          </a:p>
-        </p:txBody>
-      </p:sp>
-      <p:sp>
-        <p:nvSpPr>
-          <p:cNvPr id="24" name="TextBox 23"/>
-          <p:cNvSpPr txBox="1"/>
-          <p:nvPr/>
-        </p:nvSpPr>
-        <p:spPr>
-          <a:xfrm>
-            <a:off x="5152644" y="2788920"/>
-            <a:ext cx="502920" cy="1051560"/>
-          </a:xfrm>
-          <a:prstGeom prst="rect">
-            <a:avLst/>
-          </a:prstGeom>
-          <a:noFill/>
-        </p:spPr>
-        <p:txBody>
-          <a:bodyPr wrap="square" anchor="ctr" lIns="45720" rIns="45720">
-            <a:spAutoFit/>
-          </a:bodyPr>
-          <a:lstStyle/>
-          <a:p>
-            <a:pPr algn="ctr">
-              <a:spcAft>
-                <a:spcPts val="0"/>
-              </a:spcAft>
-            </a:pPr>
-            <a:r>
-              <a:rPr sz="1000" b="0">
-                <a:solidFill>
-                  <a:srgbClr val="FFFFFF"/>
-                </a:solidFill>
-                <a:latin typeface="Segoe UI"/>
-              </a:rPr>
-              <a:t>YOLO</a:t>
-            </a:r>
-          </a:p>
-        </p:txBody>
-      </p:sp>
-      <p:sp>
-        <p:nvSpPr>
-          <p:cNvPr id="25" name="Rounded Rectangle 24"/>
-          <p:cNvSpPr/>
-          <p:nvPr/>
-        </p:nvSpPr>
-        <p:spPr>
-          <a:xfrm>
-            <a:off x="5765292" y="2788920"/>
-            <a:ext cx="502920" cy="1051560"/>
-          </a:xfrm>
-          <a:prstGeom prst="roundRect">
-            <a:avLst>
-              <a:gd name="adj" fmla="val 12000"/>
-            </a:avLst>
-          </a:prstGeom>
-          <a:solidFill>
-            <a:srgbClr val="3987E5"/>
-          </a:solidFill>
-          <a:ln>
-            <a:noFill/>
-          </a:ln>
-          <a:effectLst/>
-        </p:spPr>
-        <p:style>
-          <a:lnRef idx="1">
-            <a:schemeClr val="accent1"/>
-          </a:lnRef>
-          <a:fillRef idx="3">
-            <a:schemeClr val="accent1"/>
-          </a:fillRef>
-          <a:effectRef idx="2">
-            <a:schemeClr val="accent1"/>
-          </a:effectRef>
-          <a:fontRef idx="minor">
-            <a:schemeClr val="lt1"/>
-          </a:fontRef>
-        </p:style>
-        <p:txBody>
-          <a:bodyPr rtlCol="0" anchor="ctr"/>
-          <a:lstStyle/>
-          <a:p>
-            <a:pPr algn="ctr"/>
-          </a:p>
-        </p:txBody>
-      </p:sp>
-      <p:sp>
-        <p:nvSpPr>
-          <p:cNvPr id="26" name="TextBox 25"/>
-          <p:cNvSpPr txBox="1"/>
-          <p:nvPr/>
-        </p:nvSpPr>
-        <p:spPr>
-          <a:xfrm>
-            <a:off x="5765292" y="2788920"/>
-            <a:ext cx="502920" cy="1051560"/>
-          </a:xfrm>
-          <a:prstGeom prst="rect">
-            <a:avLst/>
-          </a:prstGeom>
-          <a:noFill/>
-        </p:spPr>
-        <p:txBody>
-          <a:bodyPr wrap="square" anchor="ctr" lIns="45720" rIns="45720">
-            <a:spAutoFit/>
-          </a:bodyPr>
-          <a:lstStyle/>
-          <a:p>
-            <a:pPr algn="ctr">
-              <a:spcAft>
-                <a:spcPts val="0"/>
-              </a:spcAft>
-            </a:pPr>
-            <a:r>
-              <a:rPr sz="1000" b="0">
-                <a:solidFill>
-                  <a:srgbClr val="FFFFFF"/>
-                </a:solidFill>
-                <a:latin typeface="Segoe UI"/>
-              </a:rPr>
-              <a:t>YOLO</a:t>
-            </a:r>
-          </a:p>
-        </p:txBody>
-      </p:sp>
-      <p:sp>
-        <p:nvSpPr>
-          <p:cNvPr id="27" name="TextBox 26"/>
-          <p:cNvSpPr txBox="1"/>
-          <p:nvPr/>
-        </p:nvSpPr>
-        <p:spPr>
-          <a:xfrm>
-            <a:off x="864107" y="3913631"/>
-            <a:ext cx="2377440" cy="320040"/>
-          </a:xfrm>
-          <a:prstGeom prst="rect">
-            <a:avLst/>
-          </a:prstGeom>
-          <a:noFill/>
-        </p:spPr>
-        <p:txBody>
-          <a:bodyPr wrap="square" anchor="t" lIns="45720" rIns="45720">
+          <a:bodyPr wrap="square" lIns="45720" rIns="45720" anchor="ctr">
             <a:spAutoFit/>
           </a:bodyPr>
           <a:lstStyle/>
@@ -16214,27 +18770,61 @@
               </a:spcAft>
             </a:pPr>
             <a:r>
-              <a:rPr sz="1300" b="0">
-                <a:solidFill>
-                  <a:srgbClr val="FFFFFF"/>
-                </a:solidFill>
-                <a:latin typeface="Segoe UI"/>
-              </a:rPr>
-              <a:t>◀  memory carries it up</a:t>
-            </a:r>
-          </a:p>
-        </p:txBody>
-      </p:sp>
-      <p:sp>
-        <p:nvSpPr>
-          <p:cNvPr id="28" name="TextBox 27"/>
+              <a:rPr sz="1600" b="1">
+                <a:solidFill>
+                  <a:srgbClr val="E8EAF2"/>
+                </a:solidFill>
+                <a:latin typeface="Segoe UI"/>
+              </a:rPr>
+              <a:t>The problem (test): </a:t>
+            </a:r>
+            <a:r>
+              <a:rPr sz="1600" b="0">
+                <a:solidFill>
+                  <a:srgbClr val="E8EAF2"/>
+                </a:solidFill>
+                <a:latin typeface="Segoe UI"/>
+              </a:rPr>
+              <a:t>672 of 21,910 tumour slices missed (3.1%) · 815 of 22,663 empty slices drawn on (3.6%).</a:t>
+            </a:r>
+          </a:p>
+        </p:txBody>
+      </p:sp>
+    </p:spTree>
+  </p:cSld>
+  <p:clrMapOvr>
+    <a:masterClrMapping/>
+  </p:clrMapOvr>
+</p:sld>
+</file>
+
+<file path=ppt/slides/slide19.xml><?xml version="1.0" encoding="utf-8"?>
+<p:sld xmlns:a="http://schemas.openxmlformats.org/drawingml/2006/main" xmlns:r="http://schemas.openxmlformats.org/officeDocument/2006/relationships" xmlns:p="http://schemas.openxmlformats.org/presentationml/2006/main">
+  <p:cSld>
+    <p:spTree>
+      <p:nvGrpSpPr>
+        <p:cNvPr id="1" name=""/>
+        <p:cNvGrpSpPr/>
+        <p:nvPr/>
+      </p:nvGrpSpPr>
+      <p:grpSpPr>
+        <a:xfrm>
+          <a:off x="0" y="0"/>
+          <a:ext cx="0" cy="0"/>
+          <a:chOff x="0" y="0"/>
+          <a:chExt cx="0" cy="0"/>
+        </a:xfrm>
+      </p:grpSpPr>
+      <p:sp>
+        <p:nvSpPr>
+          <p:cNvPr id="2" name="TextBox 1"/>
           <p:cNvSpPr txBox="1"/>
           <p:nvPr/>
         </p:nvSpPr>
         <p:spPr>
           <a:xfrm>
-            <a:off x="3890771" y="3913631"/>
-            <a:ext cx="2377440" cy="320040"/>
+            <a:off x="640080" y="914400"/>
+            <a:ext cx="7315200" cy="292388"/>
           </a:xfrm>
           <a:prstGeom prst="rect">
             <a:avLst/>
@@ -16242,90 +18832,46 @@
           <a:noFill/>
         </p:spPr>
         <p:txBody>
-          <a:bodyPr wrap="square" anchor="t" lIns="45720" rIns="45720">
+          <a:bodyPr wrap="square" lIns="45720" rIns="45720" anchor="t">
             <a:spAutoFit/>
           </a:bodyPr>
           <a:lstStyle/>
           <a:p>
-            <a:pPr algn="r">
+            <a:pPr algn="l">
               <a:spcAft>
-                <a:spcPts val="0"/>
+                <a:spcPts val="600"/>
               </a:spcAft>
             </a:pPr>
             <a:r>
               <a:rPr sz="1300" b="0">
                 <a:solidFill>
-                  <a:srgbClr val="FFFFFF"/>
-                </a:solidFill>
-                <a:latin typeface="Segoe UI"/>
-              </a:rPr>
-              <a:t>and down  ▶</a:t>
-            </a:r>
-          </a:p>
-        </p:txBody>
-      </p:sp>
-      <p:sp>
-        <p:nvSpPr>
-          <p:cNvPr id="29" name="Rectangle 28"/>
-          <p:cNvSpPr/>
-          <p:nvPr/>
-        </p:nvSpPr>
-        <p:spPr>
-          <a:xfrm>
-            <a:off x="777240" y="4434840"/>
-            <a:ext cx="182880" cy="182880"/>
+                  <a:schemeClr val="bg1"/>
+                </a:solidFill>
+                <a:latin typeface="Segoe UI"/>
+              </a:rPr>
+              <a:t>BRAIN TUMOUR SEGMENTATION · YOLO + MEDSAM2</a:t>
+            </a:r>
+          </a:p>
+        </p:txBody>
+      </p:sp>
+      <p:sp>
+        <p:nvSpPr>
+          <p:cNvPr id="3" name="TextBox 2"/>
+          <p:cNvSpPr txBox="1"/>
+          <p:nvPr/>
+        </p:nvSpPr>
+        <p:spPr>
+          <a:xfrm>
+            <a:off x="640080" y="1371600"/>
+            <a:ext cx="6583680" cy="1015663"/>
           </a:xfrm>
           <a:prstGeom prst="rect">
             <a:avLst/>
           </a:prstGeom>
-          <a:solidFill>
-            <a:srgbClr val="2FB35C"/>
-          </a:solidFill>
-          <a:ln>
-            <a:noFill/>
-          </a:ln>
-          <a:effectLst/>
-        </p:spPr>
-        <p:style>
-          <a:lnRef idx="1">
-            <a:schemeClr val="accent1"/>
-          </a:lnRef>
-          <a:fillRef idx="3">
-            <a:schemeClr val="accent1"/>
-          </a:fillRef>
-          <a:effectRef idx="2">
-            <a:schemeClr val="accent1"/>
-          </a:effectRef>
-          <a:fontRef idx="minor">
-            <a:schemeClr val="lt1"/>
-          </a:fontRef>
-        </p:style>
-        <p:txBody>
-          <a:bodyPr rtlCol="0" anchor="ctr"/>
-          <a:lstStyle/>
-          <a:p>
-            <a:pPr algn="ctr"/>
-          </a:p>
-        </p:txBody>
-      </p:sp>
-      <p:sp>
-        <p:nvSpPr>
-          <p:cNvPr id="30" name="TextBox 29"/>
-          <p:cNvSpPr txBox="1"/>
-          <p:nvPr/>
-        </p:nvSpPr>
-        <p:spPr>
-          <a:xfrm>
-            <a:off x="1051560" y="4370832"/>
-            <a:ext cx="5303520" cy="320040"/>
-          </a:xfrm>
-          <a:prstGeom prst="rect">
-            <a:avLst/>
-          </a:prstGeom>
           <a:noFill/>
         </p:spPr>
         <p:txBody>
-          <a:bodyPr wrap="square" anchor="t" lIns="45720" rIns="45720">
+          <a:bodyPr wrap="square" lIns="45720" rIns="45720" anchor="t">
             <a:spAutoFit/>
           </a:bodyPr>
           <a:lstStyle/>
@@ -16336,97 +18882,35 @@
               </a:spcAft>
             </a:pPr>
             <a:r>
-              <a:rPr sz="1300" b="0">
-                <a:solidFill>
-                  <a:srgbClr val="E8EAF2"/>
-                </a:solidFill>
-                <a:latin typeface="Segoe UI"/>
-              </a:rPr>
-              <a:t>Start slice: </a:t>
-            </a:r>
-            <a:r>
-              <a:rPr sz="1300" b="1">
-                <a:solidFill>
-                  <a:srgbClr val="E8EAF2"/>
-                </a:solidFill>
-                <a:latin typeface="Segoe UI"/>
-              </a:rPr>
-              <a:t>the expert mask</a:t>
-            </a:r>
-            <a:r>
-              <a:rPr sz="1300" b="0">
-                <a:solidFill>
-                  <a:srgbClr val="E8EAF2"/>
-                </a:solidFill>
-                <a:latin typeface="Segoe UI"/>
-              </a:rPr>
-              <a:t> (fully sure)</a:t>
-            </a:r>
-          </a:p>
-        </p:txBody>
-      </p:sp>
-      <p:sp>
-        <p:nvSpPr>
-          <p:cNvPr id="31" name="Rectangle 30"/>
-          <p:cNvSpPr/>
-          <p:nvPr/>
-        </p:nvSpPr>
-        <p:spPr>
-          <a:xfrm>
-            <a:off x="777240" y="4800600"/>
-            <a:ext cx="182880" cy="182880"/>
+              <a:rPr sz="6000" b="0">
+                <a:solidFill>
+                  <a:schemeClr val="bg1"/>
+                </a:solidFill>
+                <a:latin typeface="Segoe UI"/>
+              </a:rPr>
+              <a:t>Thank you</a:t>
+            </a:r>
+          </a:p>
+        </p:txBody>
+      </p:sp>
+      <p:sp>
+        <p:nvSpPr>
+          <p:cNvPr id="4" name="TextBox 3"/>
+          <p:cNvSpPr txBox="1"/>
+          <p:nvPr/>
+        </p:nvSpPr>
+        <p:spPr>
+          <a:xfrm>
+            <a:off x="640080" y="2514600"/>
+            <a:ext cx="6583680" cy="553998"/>
           </a:xfrm>
           <a:prstGeom prst="rect">
             <a:avLst/>
           </a:prstGeom>
-          <a:solidFill>
-            <a:srgbClr val="3987E5"/>
-          </a:solidFill>
-          <a:ln>
-            <a:noFill/>
-          </a:ln>
-          <a:effectLst/>
-        </p:spPr>
-        <p:style>
-          <a:lnRef idx="1">
-            <a:schemeClr val="accent1"/>
-          </a:lnRef>
-          <a:fillRef idx="3">
-            <a:schemeClr val="accent1"/>
-          </a:fillRef>
-          <a:effectRef idx="2">
-            <a:schemeClr val="accent1"/>
-          </a:effectRef>
-          <a:fontRef idx="minor">
-            <a:schemeClr val="lt1"/>
-          </a:fontRef>
-        </p:style>
-        <p:txBody>
-          <a:bodyPr rtlCol="0" anchor="ctr"/>
-          <a:lstStyle/>
-          <a:p>
-            <a:pPr algn="ctr"/>
-          </a:p>
-        </p:txBody>
-      </p:sp>
-      <p:sp>
-        <p:nvSpPr>
-          <p:cNvPr id="32" name="TextBox 31"/>
-          <p:cNvSpPr txBox="1"/>
-          <p:nvPr/>
-        </p:nvSpPr>
-        <p:spPr>
-          <a:xfrm>
-            <a:off x="1051560" y="4736592"/>
-            <a:ext cx="5303520" cy="320040"/>
-          </a:xfrm>
-          <a:prstGeom prst="rect">
-            <a:avLst/>
-          </a:prstGeom>
           <a:noFill/>
         </p:spPr>
         <p:txBody>
-          <a:bodyPr wrap="square" anchor="t" lIns="45720" rIns="45720">
+          <a:bodyPr wrap="square" lIns="45720" rIns="45720" anchor="t">
             <a:spAutoFit/>
           </a:bodyPr>
           <a:lstStyle/>
@@ -16437,653 +18921,46 @@
               </a:spcAft>
             </a:pPr>
             <a:r>
-              <a:rPr sz="1300" b="0">
-                <a:solidFill>
-                  <a:srgbClr val="E8EAF2"/>
-                </a:solidFill>
-                <a:latin typeface="Segoe UI"/>
-              </a:rPr>
-              <a:t>All other slices: </a:t>
-            </a:r>
-            <a:r>
-              <a:rPr sz="1300" b="1">
-                <a:solidFill>
-                  <a:srgbClr val="E8EAF2"/>
-                </a:solidFill>
-                <a:latin typeface="Segoe UI"/>
-              </a:rPr>
-              <a:t>YOLO's hint</a:t>
-            </a:r>
-            <a:r>
-              <a:rPr sz="1300" b="0">
-                <a:solidFill>
-                  <a:srgbClr val="E8EAF2"/>
-                </a:solidFill>
-                <a:latin typeface="Segoe UI"/>
-              </a:rPr>
-              <a:t>, as usual</a:t>
-            </a:r>
-          </a:p>
-        </p:txBody>
-      </p:sp>
-      <p:sp>
-        <p:nvSpPr>
-          <p:cNvPr id="33" name="TextBox 32"/>
-          <p:cNvSpPr txBox="1"/>
-          <p:nvPr/>
-        </p:nvSpPr>
-        <p:spPr>
-          <a:xfrm>
-            <a:off x="731520" y="5166360"/>
-            <a:ext cx="5669280" cy="320040"/>
+              <a:rPr sz="3000" b="0">
+                <a:solidFill>
+                  <a:schemeClr val="bg1"/>
+                </a:solidFill>
+                <a:latin typeface="Segoe UI"/>
+              </a:rPr>
+              <a:t>Questions?</a:t>
+            </a:r>
+          </a:p>
+        </p:txBody>
+      </p:sp>
+      <p:pic>
+        <p:nvPicPr>
+          <p:cNvPr id="14" name="Picture 13" descr="mod_labels.png"/>
+          <p:cNvPicPr>
+            <a:picLocks noChangeAspect="1"/>
+          </p:cNvPicPr>
+          <p:nvPr/>
+        </p:nvPicPr>
+        <p:blipFill>
+          <a:blip r:embed="rId3"/>
+          <a:stretch>
+            <a:fillRect/>
+          </a:stretch>
+        </p:blipFill>
+        <p:spPr>
+          <a:xfrm>
+            <a:off x="8011223" y="914400"/>
+            <a:ext cx="3271393" cy="4937760"/>
           </a:xfrm>
           <a:prstGeom prst="rect">
             <a:avLst/>
           </a:prstGeom>
-          <a:noFill/>
-        </p:spPr>
-        <p:txBody>
-          <a:bodyPr wrap="square" anchor="t" lIns="45720" rIns="45720">
-            <a:spAutoFit/>
-          </a:bodyPr>
-          <a:lstStyle/>
-          <a:p>
-            <a:pPr algn="l">
-              <a:spcAft>
-                <a:spcPts val="0"/>
-              </a:spcAft>
-            </a:pPr>
-            <a:r>
-              <a:rPr sz="1200" b="0">
-                <a:solidFill>
-                  <a:srgbClr val="B8BED3"/>
-                </a:solidFill>
-                <a:latin typeface="Segoe UI"/>
-              </a:rPr>
-              <a:t>A what-if only: the expert mask is never available when predicting.</a:t>
-            </a:r>
-          </a:p>
-        </p:txBody>
-      </p:sp>
-      <p:sp>
-        <p:nvSpPr>
-          <p:cNvPr id="34" name="Rectangle 33"/>
-          <p:cNvSpPr/>
-          <p:nvPr/>
-        </p:nvSpPr>
-        <p:spPr>
-          <a:xfrm>
-            <a:off x="6766560" y="2103120"/>
-            <a:ext cx="4846320" cy="3520440"/>
-          </a:xfrm>
-          <a:prstGeom prst="rect">
-            <a:avLst/>
-          </a:prstGeom>
-          <a:solidFill>
-            <a:srgbClr val="1A1F33"/>
-          </a:solidFill>
-          <a:ln>
-            <a:noFill/>
+          <a:ln w="9525">
+            <a:solidFill>
+              <a:srgbClr val="2A2F47"/>
+            </a:solidFill>
           </a:ln>
-          <a:effectLst/>
-        </p:spPr>
-        <p:style>
-          <a:lnRef idx="1">
-            <a:schemeClr val="accent1"/>
-          </a:lnRef>
-          <a:fillRef idx="3">
-            <a:schemeClr val="accent1"/>
-          </a:fillRef>
-          <a:effectRef idx="2">
-            <a:schemeClr val="accent1"/>
-          </a:effectRef>
-          <a:fontRef idx="minor">
-            <a:schemeClr val="lt1"/>
-          </a:fontRef>
-        </p:style>
-        <p:txBody>
-          <a:bodyPr rtlCol="0" anchor="ctr"/>
-          <a:lstStyle/>
-          <a:p>
-            <a:pPr algn="ctr"/>
-          </a:p>
-        </p:txBody>
-      </p:sp>
-      <p:sp>
-        <p:nvSpPr>
-          <p:cNvPr id="35" name="TextBox 34"/>
-          <p:cNvSpPr txBox="1"/>
-          <p:nvPr/>
-        </p:nvSpPr>
-        <p:spPr>
-          <a:xfrm>
-            <a:off x="6903720" y="2212848"/>
-            <a:ext cx="2240280" cy="685800"/>
-          </a:xfrm>
-          <a:prstGeom prst="rect">
-            <a:avLst/>
-          </a:prstGeom>
-          <a:noFill/>
-        </p:spPr>
-        <p:txBody>
-          <a:bodyPr wrap="square" anchor="t" lIns="45720" rIns="45720">
-            <a:spAutoFit/>
-          </a:bodyPr>
-          <a:lstStyle/>
-          <a:p>
-            <a:pPr algn="ctr">
-              <a:spcAft>
-                <a:spcPts val="0"/>
-              </a:spcAft>
-            </a:pPr>
-            <a:r>
-              <a:rPr sz="3600" b="1">
-                <a:solidFill>
-                  <a:srgbClr val="2FB35C"/>
-                </a:solidFill>
-                <a:latin typeface="Segoe UI"/>
-              </a:rPr>
-              <a:t>+0.0047</a:t>
-            </a:r>
-          </a:p>
-        </p:txBody>
-      </p:sp>
-      <p:sp>
-        <p:nvSpPr>
-          <p:cNvPr id="36" name="TextBox 35"/>
-          <p:cNvSpPr txBox="1"/>
-          <p:nvPr/>
-        </p:nvSpPr>
-        <p:spPr>
-          <a:xfrm>
-            <a:off x="6903720" y="2898648"/>
-            <a:ext cx="2240280" cy="548640"/>
-          </a:xfrm>
-          <a:prstGeom prst="rect">
-            <a:avLst/>
-          </a:prstGeom>
-          <a:noFill/>
-        </p:spPr>
-        <p:txBody>
-          <a:bodyPr wrap="square" anchor="t" lIns="45720" rIns="45720">
-            <a:spAutoFit/>
-          </a:bodyPr>
-          <a:lstStyle/>
-          <a:p>
-            <a:pPr algn="ctr">
-              <a:spcAft>
-                <a:spcPts val="0"/>
-              </a:spcAft>
-            </a:pPr>
-            <a:r>
-              <a:rPr sz="1200" b="0">
-                <a:solidFill>
-                  <a:srgbClr val="B8BED3"/>
-                </a:solidFill>
-                <a:latin typeface="Segoe UI"/>
-              </a:rPr>
-              <a:t>val 3D Dice
-0.8928 → 0.8975</a:t>
-            </a:r>
-          </a:p>
-        </p:txBody>
-      </p:sp>
-      <p:sp>
-        <p:nvSpPr>
-          <p:cNvPr id="37" name="TextBox 36"/>
-          <p:cNvSpPr txBox="1"/>
-          <p:nvPr/>
-        </p:nvSpPr>
-        <p:spPr>
-          <a:xfrm>
-            <a:off x="9235440" y="2212848"/>
-            <a:ext cx="2240280" cy="685800"/>
-          </a:xfrm>
-          <a:prstGeom prst="rect">
-            <a:avLst/>
-          </a:prstGeom>
-          <a:noFill/>
-        </p:spPr>
-        <p:txBody>
-          <a:bodyPr wrap="square" anchor="t" lIns="45720" rIns="45720">
-            <a:spAutoFit/>
-          </a:bodyPr>
-          <a:lstStyle/>
-          <a:p>
-            <a:pPr algn="ctr">
-              <a:spcAft>
-                <a:spcPts val="0"/>
-              </a:spcAft>
-            </a:pPr>
-            <a:r>
-              <a:rPr sz="3600" b="1">
-                <a:solidFill>
-                  <a:srgbClr val="3987E5"/>
-                </a:solidFill>
-                <a:latin typeface="Segoe UI"/>
-              </a:rPr>
-              <a:t>173 / 1</a:t>
-            </a:r>
-          </a:p>
-        </p:txBody>
-      </p:sp>
-      <p:sp>
-        <p:nvSpPr>
-          <p:cNvPr id="38" name="TextBox 37"/>
-          <p:cNvSpPr txBox="1"/>
-          <p:nvPr/>
-        </p:nvSpPr>
-        <p:spPr>
-          <a:xfrm>
-            <a:off x="9235440" y="2898648"/>
-            <a:ext cx="2240280" cy="548640"/>
-          </a:xfrm>
-          <a:prstGeom prst="rect">
-            <a:avLst/>
-          </a:prstGeom>
-          <a:noFill/>
-        </p:spPr>
-        <p:txBody>
-          <a:bodyPr wrap="square" anchor="t" lIns="45720" rIns="45720">
-            <a:spAutoFit/>
-          </a:bodyPr>
-          <a:lstStyle/>
-          <a:p>
-            <a:pPr algn="ctr">
-              <a:spcAft>
-                <a:spcPts val="0"/>
-              </a:spcAft>
-            </a:pPr>
-            <a:r>
-              <a:rPr sz="1200" b="0">
-                <a:solidFill>
-                  <a:srgbClr val="B8BED3"/>
-                </a:solidFill>
-                <a:latin typeface="Segoe UI"/>
-              </a:rPr>
-              <a:t>patients
-better / worse</a:t>
-            </a:r>
-          </a:p>
-        </p:txBody>
-      </p:sp>
-      <p:sp>
-        <p:nvSpPr>
-          <p:cNvPr id="39" name="TextBox 38"/>
-          <p:cNvSpPr txBox="1"/>
-          <p:nvPr/>
-        </p:nvSpPr>
-        <p:spPr>
-          <a:xfrm>
-            <a:off x="6949440" y="3639312"/>
-            <a:ext cx="4480560" cy="320040"/>
-          </a:xfrm>
-          <a:prstGeom prst="rect">
-            <a:avLst/>
-          </a:prstGeom>
-          <a:noFill/>
-        </p:spPr>
-        <p:txBody>
-          <a:bodyPr wrap="square" anchor="t" lIns="45720" rIns="45720">
-            <a:spAutoFit/>
-          </a:bodyPr>
-          <a:lstStyle/>
-          <a:p>
-            <a:pPr algn="l">
-              <a:spcAft>
-                <a:spcPts val="0"/>
-              </a:spcAft>
-            </a:pPr>
-            <a:r>
-              <a:rPr sz="1300" b="1">
-                <a:solidFill>
-                  <a:srgbClr val="E8EAF2"/>
-                </a:solidFill>
-                <a:latin typeface="Segoe UI"/>
-              </a:rPr>
-              <a:t>Gain over today's pipeline (val)</a:t>
-            </a:r>
-          </a:p>
-        </p:txBody>
-      </p:sp>
-      <p:sp>
-        <p:nvSpPr>
-          <p:cNvPr id="40" name="TextBox 39"/>
-          <p:cNvSpPr txBox="1"/>
-          <p:nvPr/>
-        </p:nvSpPr>
-        <p:spPr>
-          <a:xfrm>
-            <a:off x="6949440" y="4023360"/>
-            <a:ext cx="4480560" cy="274320"/>
-          </a:xfrm>
-          <a:prstGeom prst="rect">
-            <a:avLst/>
-          </a:prstGeom>
-          <a:noFill/>
-        </p:spPr>
-        <p:txBody>
-          <a:bodyPr wrap="square" anchor="t" lIns="45720" rIns="45720">
-            <a:spAutoFit/>
-          </a:bodyPr>
-          <a:lstStyle/>
-          <a:p>
-            <a:pPr algn="l">
-              <a:spcAft>
-                <a:spcPts val="0"/>
-              </a:spcAft>
-            </a:pPr>
-            <a:r>
-              <a:rPr sz="1200" b="0">
-                <a:solidFill>
-                  <a:srgbClr val="B8BED3"/>
-                </a:solidFill>
-                <a:latin typeface="Segoe UI"/>
-              </a:rPr>
-              <a:t>Best confidence idea (blob → 'don't know')</a:t>
-            </a:r>
-          </a:p>
-        </p:txBody>
-      </p:sp>
-      <p:sp>
-        <p:nvSpPr>
-          <p:cNvPr id="41" name="Rectangle 40"/>
-          <p:cNvSpPr/>
-          <p:nvPr/>
-        </p:nvSpPr>
-        <p:spPr>
-          <a:xfrm>
-            <a:off x="6995160" y="4315968"/>
-            <a:ext cx="768096" cy="256032"/>
-          </a:xfrm>
-          <a:prstGeom prst="rect">
-            <a:avLst/>
-          </a:prstGeom>
-          <a:solidFill>
-            <a:srgbClr val="3987E5"/>
-          </a:solidFill>
-          <a:ln>
-            <a:noFill/>
-          </a:ln>
-          <a:effectLst/>
-        </p:spPr>
-        <p:style>
-          <a:lnRef idx="1">
-            <a:schemeClr val="accent1"/>
-          </a:lnRef>
-          <a:fillRef idx="3">
-            <a:schemeClr val="accent1"/>
-          </a:fillRef>
-          <a:effectRef idx="2">
-            <a:schemeClr val="accent1"/>
-          </a:effectRef>
-          <a:fontRef idx="minor">
-            <a:schemeClr val="lt1"/>
-          </a:fontRef>
-        </p:style>
-        <p:txBody>
-          <a:bodyPr rtlCol="0" anchor="ctr"/>
-          <a:lstStyle/>
-          <a:p>
-            <a:pPr algn="ctr"/>
-          </a:p>
-        </p:txBody>
-      </p:sp>
-      <p:sp>
-        <p:nvSpPr>
-          <p:cNvPr id="42" name="TextBox 41"/>
-          <p:cNvSpPr txBox="1"/>
-          <p:nvPr/>
-        </p:nvSpPr>
-        <p:spPr>
-          <a:xfrm>
-            <a:off x="7836408" y="4279392"/>
-            <a:ext cx="914400" cy="320040"/>
-          </a:xfrm>
-          <a:prstGeom prst="rect">
-            <a:avLst/>
-          </a:prstGeom>
-          <a:noFill/>
-        </p:spPr>
-        <p:txBody>
-          <a:bodyPr wrap="square" anchor="t" lIns="45720" rIns="45720">
-            <a:spAutoFit/>
-          </a:bodyPr>
-          <a:lstStyle/>
-          <a:p>
-            <a:pPr algn="l">
-              <a:spcAft>
-                <a:spcPts val="0"/>
-              </a:spcAft>
-            </a:pPr>
-            <a:r>
-              <a:rPr sz="1300" b="1">
-                <a:solidFill>
-                  <a:srgbClr val="E8EAF2"/>
-                </a:solidFill>
-                <a:latin typeface="Segoe UI"/>
-              </a:rPr>
-              <a:t>+0.0012</a:t>
-            </a:r>
-          </a:p>
-        </p:txBody>
-      </p:sp>
-      <p:sp>
-        <p:nvSpPr>
-          <p:cNvPr id="43" name="TextBox 42"/>
-          <p:cNvSpPr txBox="1"/>
-          <p:nvPr/>
-        </p:nvSpPr>
-        <p:spPr>
-          <a:xfrm>
-            <a:off x="6949440" y="4736592"/>
-            <a:ext cx="4480560" cy="274320"/>
-          </a:xfrm>
-          <a:prstGeom prst="rect">
-            <a:avLst/>
-          </a:prstGeom>
-          <a:noFill/>
-        </p:spPr>
-        <p:txBody>
-          <a:bodyPr wrap="square" anchor="t" lIns="45720" rIns="45720">
-            <a:spAutoFit/>
-          </a:bodyPr>
-          <a:lstStyle/>
-          <a:p>
-            <a:pPr algn="l">
-              <a:spcAft>
-                <a:spcPts val="0"/>
-              </a:spcAft>
-            </a:pPr>
-            <a:r>
-              <a:rPr sz="1200" b="0">
-                <a:solidFill>
-                  <a:srgbClr val="B8BED3"/>
-                </a:solidFill>
-                <a:latin typeface="Segoe UI"/>
-              </a:rPr>
-              <a:t>Expert mask on the start slice</a:t>
-            </a:r>
-          </a:p>
-        </p:txBody>
-      </p:sp>
-      <p:sp>
-        <p:nvSpPr>
-          <p:cNvPr id="44" name="Rectangle 43"/>
-          <p:cNvSpPr/>
-          <p:nvPr/>
-        </p:nvSpPr>
-        <p:spPr>
-          <a:xfrm>
-            <a:off x="6995160" y="5029200"/>
-            <a:ext cx="3008376" cy="256032"/>
-          </a:xfrm>
-          <a:prstGeom prst="rect">
-            <a:avLst/>
-          </a:prstGeom>
-          <a:solidFill>
-            <a:srgbClr val="2FB35C"/>
-          </a:solidFill>
-          <a:ln>
-            <a:noFill/>
-          </a:ln>
-          <a:effectLst/>
-        </p:spPr>
-        <p:style>
-          <a:lnRef idx="1">
-            <a:schemeClr val="accent1"/>
-          </a:lnRef>
-          <a:fillRef idx="3">
-            <a:schemeClr val="accent1"/>
-          </a:fillRef>
-          <a:effectRef idx="2">
-            <a:schemeClr val="accent1"/>
-          </a:effectRef>
-          <a:fontRef idx="minor">
-            <a:schemeClr val="lt1"/>
-          </a:fontRef>
-        </p:style>
-        <p:txBody>
-          <a:bodyPr rtlCol="0" anchor="ctr"/>
-          <a:lstStyle/>
-          <a:p>
-            <a:pPr algn="ctr"/>
-          </a:p>
-        </p:txBody>
-      </p:sp>
-      <p:sp>
-        <p:nvSpPr>
-          <p:cNvPr id="45" name="TextBox 44"/>
-          <p:cNvSpPr txBox="1"/>
-          <p:nvPr/>
-        </p:nvSpPr>
-        <p:spPr>
-          <a:xfrm>
-            <a:off x="10076688" y="4992624"/>
-            <a:ext cx="914400" cy="320040"/>
-          </a:xfrm>
-          <a:prstGeom prst="rect">
-            <a:avLst/>
-          </a:prstGeom>
-          <a:noFill/>
-        </p:spPr>
-        <p:txBody>
-          <a:bodyPr wrap="square" anchor="t" lIns="45720" rIns="45720">
-            <a:spAutoFit/>
-          </a:bodyPr>
-          <a:lstStyle/>
-          <a:p>
-            <a:pPr algn="l">
-              <a:spcAft>
-                <a:spcPts val="0"/>
-              </a:spcAft>
-            </a:pPr>
-            <a:r>
-              <a:rPr sz="1300" b="1">
-                <a:solidFill>
-                  <a:srgbClr val="E8EAF2"/>
-                </a:solidFill>
-                <a:latin typeface="Segoe UI"/>
-              </a:rPr>
-              <a:t>+0.0047</a:t>
-            </a:r>
-          </a:p>
-        </p:txBody>
-      </p:sp>
-      <p:sp>
-        <p:nvSpPr>
-          <p:cNvPr id="46" name="Rounded Rectangle 45"/>
-          <p:cNvSpPr/>
-          <p:nvPr/>
-        </p:nvSpPr>
-        <p:spPr>
-          <a:xfrm>
-            <a:off x="548640" y="5806440"/>
-            <a:ext cx="11064240" cy="566928"/>
-          </a:xfrm>
-          <a:prstGeom prst="roundRect">
-            <a:avLst>
-              <a:gd name="adj" fmla="val 15000"/>
-            </a:avLst>
-          </a:prstGeom>
-          <a:solidFill>
-            <a:srgbClr val="1A1F33"/>
-          </a:solidFill>
-          <a:ln>
-            <a:noFill/>
-          </a:ln>
-          <a:effectLst/>
-        </p:spPr>
-        <p:style>
-          <a:lnRef idx="1">
-            <a:schemeClr val="accent1"/>
-          </a:lnRef>
-          <a:fillRef idx="3">
-            <a:schemeClr val="accent1"/>
-          </a:fillRef>
-          <a:effectRef idx="2">
-            <a:schemeClr val="accent1"/>
-          </a:effectRef>
-          <a:fontRef idx="minor">
-            <a:schemeClr val="lt1"/>
-          </a:fontRef>
-        </p:style>
-        <p:txBody>
-          <a:bodyPr rtlCol="0" anchor="ctr"/>
-          <a:lstStyle/>
-          <a:p>
-            <a:pPr algn="ctr"/>
-          </a:p>
-        </p:txBody>
-      </p:sp>
-      <p:sp>
-        <p:nvSpPr>
-          <p:cNvPr id="47" name="TextBox 46"/>
-          <p:cNvSpPr txBox="1"/>
-          <p:nvPr/>
-        </p:nvSpPr>
-        <p:spPr>
-          <a:xfrm>
-            <a:off x="777240" y="5806440"/>
-            <a:ext cx="10744200" cy="566928"/>
-          </a:xfrm>
-          <a:prstGeom prst="rect">
-            <a:avLst/>
-          </a:prstGeom>
-          <a:noFill/>
-        </p:spPr>
-        <p:txBody>
-          <a:bodyPr wrap="square" anchor="ctr" lIns="45720" rIns="45720">
-            <a:spAutoFit/>
-          </a:bodyPr>
-          <a:lstStyle/>
-          <a:p>
-            <a:pPr algn="l">
-              <a:spcAft>
-                <a:spcPts val="0"/>
-              </a:spcAft>
-            </a:pPr>
-            <a:r>
-              <a:rPr sz="1600" b="1">
-                <a:solidFill>
-                  <a:srgbClr val="E8EAF2"/>
-                </a:solidFill>
-                <a:latin typeface="Segoe UI"/>
-              </a:rPr>
-              <a:t>Key takeaway:</a:t>
-            </a:r>
-            <a:r>
-              <a:rPr sz="1600" b="0">
-                <a:solidFill>
-                  <a:srgbClr val="E8EAF2"/>
-                </a:solidFill>
-                <a:latin typeface="Segoe UI"/>
-              </a:rPr>
-              <a:t> one correct slice, carried by memory, adds +0.005 Dice: 4× the best confidence idea.</a:t>
-            </a:r>
-          </a:p>
-        </p:txBody>
-      </p:sp>
+        </p:spPr>
+      </p:pic>
     </p:spTree>
   </p:cSld>
   <p:clrMapOvr>
@@ -17606,6 +19483,618 @@
                 <a:latin typeface="Segoe UI"/>
               </a:rPr>
               <a:t> Automatic 3D segmentation saves expert time and makes tumour measurements consistent.</a:t>
+            </a:r>
+          </a:p>
+        </p:txBody>
+      </p:sp>
+    </p:spTree>
+  </p:cSld>
+  <p:clrMapOvr>
+    <a:masterClrMapping/>
+  </p:clrMapOvr>
+</p:sld>
+</file>
+
+<file path=ppt/slides/slide20.xml><?xml version="1.0" encoding="utf-8"?>
+<p:sld xmlns:a="http://schemas.openxmlformats.org/drawingml/2006/main" xmlns:p="http://schemas.openxmlformats.org/presentationml/2006/main" xmlns:r="http://schemas.openxmlformats.org/officeDocument/2006/relationships">
+  <p:cSld>
+    <p:spTree>
+      <p:nvGrpSpPr>
+        <p:cNvPr id="1" name=""/>
+        <p:cNvGrpSpPr/>
+        <p:nvPr/>
+      </p:nvGrpSpPr>
+      <p:grpSpPr/>
+      <p:sp>
+        <p:nvSpPr>
+          <p:cNvPr id="2" name="TextBox 1"/>
+          <p:cNvSpPr txBox="1"/>
+          <p:nvPr/>
+        </p:nvSpPr>
+        <p:spPr>
+          <a:xfrm>
+            <a:off x="548640" y="256032"/>
+            <a:ext cx="10058400" cy="274320"/>
+          </a:xfrm>
+          <a:prstGeom prst="rect">
+            <a:avLst/>
+          </a:prstGeom>
+          <a:noFill/>
+        </p:spPr>
+        <p:txBody>
+          <a:bodyPr wrap="square" anchor="t" lIns="45720" rIns="45720">
+            <a:spAutoFit/>
+          </a:bodyPr>
+          <a:lstStyle/>
+          <a:p>
+            <a:pPr algn="l">
+              <a:spcAft>
+                <a:spcPts val="600"/>
+              </a:spcAft>
+            </a:pPr>
+            <a:r>
+              <a:rPr sz="1200" b="0">
+                <a:solidFill>
+                  <a:srgbClr val="FFFFFF"/>
+                </a:solidFill>
+                <a:latin typeface="Segoe UI"/>
+              </a:rPr>
+              <a:t>METHOD · HINT STYLES · TEST, 324 PATIENTS, 38 M BLOB PIXELS</a:t>
+            </a:r>
+          </a:p>
+        </p:txBody>
+      </p:sp>
+      <p:sp>
+        <p:nvSpPr>
+          <p:cNvPr id="3" name="TextBox 2"/>
+          <p:cNvSpPr txBox="1"/>
+          <p:nvPr/>
+        </p:nvSpPr>
+        <p:spPr>
+          <a:xfrm>
+            <a:off x="548640" y="475488"/>
+            <a:ext cx="11064240" cy="585216"/>
+          </a:xfrm>
+          <a:prstGeom prst="rect">
+            <a:avLst/>
+          </a:prstGeom>
+          <a:noFill/>
+        </p:spPr>
+        <p:txBody>
+          <a:bodyPr wrap="square" anchor="t" lIns="45720" rIns="45720">
+            <a:spAutoFit/>
+          </a:bodyPr>
+          <a:lstStyle/>
+          <a:p>
+            <a:pPr algn="l">
+              <a:spcAft>
+                <a:spcPts val="0"/>
+              </a:spcAft>
+            </a:pPr>
+            <a:r>
+              <a:rPr sz="3200" b="0">
+                <a:solidFill>
+                  <a:srgbClr val="FFFFFF"/>
+                </a:solidFill>
+                <a:latin typeface="Segoe UI"/>
+              </a:rPr>
+              <a:t>Two hint styles: 'max' vs 'max_weighted'</a:t>
+            </a:r>
+          </a:p>
+        </p:txBody>
+      </p:sp>
+      <p:sp>
+        <p:nvSpPr>
+          <p:cNvPr id="4" name="TextBox 3"/>
+          <p:cNvSpPr txBox="1"/>
+          <p:nvPr/>
+        </p:nvSpPr>
+        <p:spPr>
+          <a:xfrm>
+            <a:off x="10972800" y="6446520"/>
+            <a:ext cx="914400" cy="265176"/>
+          </a:xfrm>
+          <a:prstGeom prst="rect">
+            <a:avLst/>
+          </a:prstGeom>
+          <a:noFill/>
+        </p:spPr>
+        <p:txBody>
+          <a:bodyPr wrap="square" anchor="t" lIns="45720" rIns="45720">
+            <a:spAutoFit/>
+          </a:bodyPr>
+          <a:lstStyle/>
+          <a:p>
+            <a:pPr algn="r">
+              <a:spcAft>
+                <a:spcPts val="600"/>
+              </a:spcAft>
+            </a:pPr>
+            <a:r>
+              <a:rPr sz="1100" b="0">
+                <a:solidFill>
+                  <a:srgbClr val="FFFFFF"/>
+                </a:solidFill>
+                <a:latin typeface="Segoe UI"/>
+              </a:rPr>
+              <a:t>11</a:t>
+            </a:r>
+          </a:p>
+        </p:txBody>
+      </p:sp>
+      <p:sp>
+        <p:nvSpPr>
+          <p:cNvPr id="5" name="Rectangle 4"/>
+          <p:cNvSpPr/>
+          <p:nvPr/>
+        </p:nvSpPr>
+        <p:spPr>
+          <a:xfrm>
+            <a:off x="548640" y="1325880"/>
+            <a:ext cx="5577840" cy="4343400"/>
+          </a:xfrm>
+          <a:prstGeom prst="rect">
+            <a:avLst/>
+          </a:prstGeom>
+          <a:solidFill>
+            <a:srgbClr val="1A1F33"/>
+          </a:solidFill>
+          <a:ln>
+            <a:noFill/>
+          </a:ln>
+          <a:effectLst/>
+        </p:spPr>
+        <p:style>
+          <a:lnRef idx="1">
+            <a:schemeClr val="accent1"/>
+          </a:lnRef>
+          <a:fillRef idx="3">
+            <a:schemeClr val="accent1"/>
+          </a:fillRef>
+          <a:effectRef idx="2">
+            <a:schemeClr val="accent1"/>
+          </a:effectRef>
+          <a:fontRef idx="minor">
+            <a:schemeClr val="lt1"/>
+          </a:fontRef>
+        </p:style>
+        <p:txBody>
+          <a:bodyPr rtlCol="0" anchor="ctr"/>
+          <a:lstStyle/>
+          <a:p>
+            <a:pPr algn="ctr"/>
+          </a:p>
+        </p:txBody>
+      </p:sp>
+      <p:pic>
+        <p:nvPicPr>
+          <p:cNvPr id="6" name="Picture 5" descr="hv_example.png"/>
+          <p:cNvPicPr>
+            <a:picLocks noChangeAspect="1"/>
+          </p:cNvPicPr>
+          <p:nvPr/>
+        </p:nvPicPr>
+        <p:blipFill>
+          <a:blip r:embed="rId2"/>
+          <a:stretch>
+            <a:fillRect/>
+          </a:stretch>
+        </p:blipFill>
+        <p:spPr>
+          <a:xfrm>
+            <a:off x="795318" y="1463040"/>
+            <a:ext cx="5084484" cy="2606040"/>
+          </a:xfrm>
+          <a:prstGeom prst="rect">
+            <a:avLst/>
+          </a:prstGeom>
+          <a:ln w="9525">
+            <a:solidFill>
+              <a:srgbClr val="2A2F47"/>
+            </a:solidFill>
+          </a:ln>
+        </p:spPr>
+      </p:pic>
+      <p:sp>
+        <p:nvSpPr>
+          <p:cNvPr id="7" name="TextBox 6"/>
+          <p:cNvSpPr txBox="1"/>
+          <p:nvPr/>
+        </p:nvSpPr>
+        <p:spPr>
+          <a:xfrm>
+            <a:off x="685800" y="4069080"/>
+            <a:ext cx="5303520" cy="274320"/>
+          </a:xfrm>
+          <a:prstGeom prst="rect">
+            <a:avLst/>
+          </a:prstGeom>
+          <a:noFill/>
+        </p:spPr>
+        <p:txBody>
+          <a:bodyPr wrap="square" anchor="t" lIns="45720" rIns="45720">
+            <a:spAutoFit/>
+          </a:bodyPr>
+          <a:lstStyle/>
+          <a:p>
+            <a:pPr algn="ctr">
+              <a:spcAft>
+                <a:spcPts val="0"/>
+              </a:spcAft>
+            </a:pPr>
+            <a:r>
+              <a:rPr sz="1100" b="0">
+                <a:solidFill>
+                  <a:srgbClr val="B8BED3"/>
+                </a:solidFill>
+                <a:latin typeface="Segoe UI"/>
+              </a:rPr>
+              <a:t>Patient BraTS-GLI-00046-101, slice 120: 7 YOLO shapes, confidence 0.06–0.90</a:t>
+            </a:r>
+          </a:p>
+        </p:txBody>
+      </p:sp>
+      <p:sp>
+        <p:nvSpPr>
+          <p:cNvPr id="8" name="TextBox 7"/>
+          <p:cNvSpPr txBox="1"/>
+          <p:nvPr/>
+        </p:nvSpPr>
+        <p:spPr>
+          <a:xfrm>
+            <a:off x="731520" y="4434840"/>
+            <a:ext cx="5212080" cy="1188720"/>
+          </a:xfrm>
+          <a:prstGeom prst="rect">
+            <a:avLst/>
+          </a:prstGeom>
+          <a:noFill/>
+        </p:spPr>
+        <p:txBody>
+          <a:bodyPr wrap="square" anchor="t" lIns="45720" rIns="45720">
+            <a:spAutoFit/>
+          </a:bodyPr>
+          <a:lstStyle/>
+          <a:p>
+            <a:pPr algn="l">
+              <a:spcAft>
+                <a:spcPts val="500"/>
+              </a:spcAft>
+            </a:pPr>
+            <a:r>
+              <a:rPr sz="1300" b="0">
+                <a:solidFill>
+                  <a:srgbClr val="E8EAF2"/>
+                </a:solidFill>
+                <a:latin typeface="Segoe UI"/>
+              </a:rPr>
+              <a:t>•  </a:t>
+            </a:r>
+            <a:r>
+              <a:rPr sz="1300" b="1">
+                <a:solidFill>
+                  <a:srgbClr val="E8EAF2"/>
+                </a:solidFill>
+                <a:latin typeface="Segoe UI"/>
+              </a:rPr>
+              <a:t>max</a:t>
+            </a:r>
+            <a:r>
+              <a:rPr sz="1300" b="0">
+                <a:solidFill>
+                  <a:srgbClr val="E8EAF2"/>
+                </a:solidFill>
+                <a:latin typeface="Segoe UI"/>
+              </a:rPr>
+              <a:t> (all our runs): YOLO's probability per pixel; the shape's confidence is ignored.</a:t>
+            </a:r>
+          </a:p>
+          <a:p>
+            <a:pPr algn="l">
+              <a:spcAft>
+                <a:spcPts val="500"/>
+              </a:spcAft>
+            </a:pPr>
+            <a:r>
+              <a:rPr sz="1300" b="0">
+                <a:solidFill>
+                  <a:srgbClr val="E8EAF2"/>
+                </a:solidFill>
+                <a:latin typeface="Segoe UI"/>
+              </a:rPr>
+              <a:t>•  </a:t>
+            </a:r>
+            <a:r>
+              <a:rPr sz="1300" b="1">
+                <a:solidFill>
+                  <a:srgbClr val="E8EAF2"/>
+                </a:solidFill>
+                <a:latin typeface="Segoe UI"/>
+              </a:rPr>
+              <a:t>max_weighted:</a:t>
+            </a:r>
+            <a:r>
+              <a:rPr sz="1300" b="0">
+                <a:solidFill>
+                  <a:srgbClr val="E8EAF2"/>
+                </a:solidFill>
+                <a:latin typeface="Segoe UI"/>
+              </a:rPr>
+              <a:t> probability × the shape's confidence, then the same logit × 8.</a:t>
+            </a:r>
+          </a:p>
+        </p:txBody>
+      </p:sp>
+      <p:sp>
+        <p:nvSpPr>
+          <p:cNvPr id="9" name="Rectangle 8"/>
+          <p:cNvSpPr/>
+          <p:nvPr/>
+        </p:nvSpPr>
+        <p:spPr>
+          <a:xfrm>
+            <a:off x="6309360" y="1325880"/>
+            <a:ext cx="5303520" cy="4343400"/>
+          </a:xfrm>
+          <a:prstGeom prst="rect">
+            <a:avLst/>
+          </a:prstGeom>
+          <a:solidFill>
+            <a:srgbClr val="1A1F33"/>
+          </a:solidFill>
+          <a:ln>
+            <a:noFill/>
+          </a:ln>
+          <a:effectLst/>
+        </p:spPr>
+        <p:style>
+          <a:lnRef idx="1">
+            <a:schemeClr val="accent1"/>
+          </a:lnRef>
+          <a:fillRef idx="3">
+            <a:schemeClr val="accent1"/>
+          </a:fillRef>
+          <a:effectRef idx="2">
+            <a:schemeClr val="accent1"/>
+          </a:effectRef>
+          <a:fontRef idx="minor">
+            <a:schemeClr val="lt1"/>
+          </a:fontRef>
+        </p:style>
+        <p:txBody>
+          <a:bodyPr rtlCol="0" anchor="ctr"/>
+          <a:lstStyle/>
+          <a:p>
+            <a:pPr algn="ctr"/>
+          </a:p>
+        </p:txBody>
+      </p:sp>
+      <p:sp>
+        <p:nvSpPr>
+          <p:cNvPr id="10" name="TextBox 9"/>
+          <p:cNvSpPr txBox="1"/>
+          <p:nvPr/>
+        </p:nvSpPr>
+        <p:spPr>
+          <a:xfrm>
+            <a:off x="6446520" y="1389888"/>
+            <a:ext cx="5029200" cy="274320"/>
+          </a:xfrm>
+          <a:prstGeom prst="rect">
+            <a:avLst/>
+          </a:prstGeom>
+          <a:noFill/>
+        </p:spPr>
+        <p:txBody>
+          <a:bodyPr wrap="square" anchor="t" lIns="45720" rIns="45720">
+            <a:spAutoFit/>
+          </a:bodyPr>
+          <a:lstStyle/>
+          <a:p>
+            <a:pPr algn="l">
+              <a:spcAft>
+                <a:spcPts val="0"/>
+              </a:spcAft>
+            </a:pPr>
+            <a:r>
+              <a:rPr sz="1300" b="1">
+                <a:solidFill>
+                  <a:srgbClr val="FFFFFF"/>
+                </a:solidFill>
+                <a:latin typeface="Segoe UI"/>
+              </a:rPr>
+              <a:t>Spread of every hint value on a YOLO shape</a:t>
+            </a:r>
+          </a:p>
+        </p:txBody>
+      </p:sp>
+      <p:pic>
+        <p:nvPicPr>
+          <p:cNvPr id="11" name="Picture 10" descr="hv_hist.png"/>
+          <p:cNvPicPr>
+            <a:picLocks noChangeAspect="1"/>
+          </p:cNvPicPr>
+          <p:nvPr/>
+        </p:nvPicPr>
+        <p:blipFill>
+          <a:blip r:embed="rId3"/>
+          <a:stretch>
+            <a:fillRect/>
+          </a:stretch>
+        </p:blipFill>
+        <p:spPr>
+          <a:xfrm>
+            <a:off x="6790145" y="1691640"/>
+            <a:ext cx="4341950" cy="1828800"/>
+          </a:xfrm>
+          <a:prstGeom prst="rect">
+            <a:avLst/>
+          </a:prstGeom>
+          <a:ln w="9525">
+            <a:solidFill>
+              <a:srgbClr val="2A2F47"/>
+            </a:solidFill>
+          </a:ln>
+        </p:spPr>
+      </p:pic>
+      <p:sp>
+        <p:nvSpPr>
+          <p:cNvPr id="12" name="TextBox 11"/>
+          <p:cNvSpPr txBox="1"/>
+          <p:nvPr/>
+        </p:nvSpPr>
+        <p:spPr>
+          <a:xfrm>
+            <a:off x="6446520" y="3547872"/>
+            <a:ext cx="5029200" cy="274320"/>
+          </a:xfrm>
+          <a:prstGeom prst="rect">
+            <a:avLst/>
+          </a:prstGeom>
+          <a:noFill/>
+        </p:spPr>
+        <p:txBody>
+          <a:bodyPr wrap="square" anchor="t" lIns="45720" rIns="45720">
+            <a:spAutoFit/>
+          </a:bodyPr>
+          <a:lstStyle/>
+          <a:p>
+            <a:pPr algn="l">
+              <a:spcAft>
+                <a:spcPts val="0"/>
+              </a:spcAft>
+            </a:pPr>
+            <a:r>
+              <a:rPr sz="1300" b="1">
+                <a:solidFill>
+                  <a:srgbClr val="FFFFFF"/>
+                </a:solidFill>
+                <a:latin typeface="Segoe UI"/>
+              </a:rPr>
+              <a:t>Share of a shape saying 'tumour', by its confidence</a:t>
+            </a:r>
+          </a:p>
+        </p:txBody>
+      </p:sp>
+      <p:pic>
+        <p:nvPicPr>
+          <p:cNvPr id="13" name="Picture 12" descr="hv_bins.png"/>
+          <p:cNvPicPr>
+            <a:picLocks noChangeAspect="1"/>
+          </p:cNvPicPr>
+          <p:nvPr/>
+        </p:nvPicPr>
+        <p:blipFill>
+          <a:blip r:embed="rId4"/>
+          <a:stretch>
+            <a:fillRect/>
+          </a:stretch>
+        </p:blipFill>
+        <p:spPr>
+          <a:xfrm>
+            <a:off x="6798862" y="3840480"/>
+            <a:ext cx="4324515" cy="1737360"/>
+          </a:xfrm>
+          <a:prstGeom prst="rect">
+            <a:avLst/>
+          </a:prstGeom>
+          <a:ln w="9525">
+            <a:solidFill>
+              <a:srgbClr val="2A2F47"/>
+            </a:solidFill>
+          </a:ln>
+        </p:spPr>
+      </p:pic>
+      <p:sp>
+        <p:nvSpPr>
+          <p:cNvPr id="14" name="Rounded Rectangle 13"/>
+          <p:cNvSpPr/>
+          <p:nvPr/>
+        </p:nvSpPr>
+        <p:spPr>
+          <a:xfrm>
+            <a:off x="548640" y="5806440"/>
+            <a:ext cx="11064240" cy="566928"/>
+          </a:xfrm>
+          <a:prstGeom prst="roundRect">
+            <a:avLst>
+              <a:gd name="adj" fmla="val 15000"/>
+            </a:avLst>
+          </a:prstGeom>
+          <a:solidFill>
+            <a:srgbClr val="1A1F33"/>
+          </a:solidFill>
+          <a:ln>
+            <a:noFill/>
+          </a:ln>
+          <a:effectLst/>
+        </p:spPr>
+        <p:style>
+          <a:lnRef idx="1">
+            <a:schemeClr val="accent1"/>
+          </a:lnRef>
+          <a:fillRef idx="3">
+            <a:schemeClr val="accent1"/>
+          </a:fillRef>
+          <a:effectRef idx="2">
+            <a:schemeClr val="accent1"/>
+          </a:effectRef>
+          <a:fontRef idx="minor">
+            <a:schemeClr val="lt1"/>
+          </a:fontRef>
+        </p:style>
+        <p:txBody>
+          <a:bodyPr rtlCol="0" anchor="ctr"/>
+          <a:lstStyle/>
+          <a:p>
+            <a:pPr algn="ctr"/>
+          </a:p>
+        </p:txBody>
+      </p:sp>
+      <p:sp>
+        <p:nvSpPr>
+          <p:cNvPr id="15" name="TextBox 14"/>
+          <p:cNvSpPr txBox="1"/>
+          <p:nvPr/>
+        </p:nvSpPr>
+        <p:spPr>
+          <a:xfrm>
+            <a:off x="777240" y="5806440"/>
+            <a:ext cx="10744200" cy="566928"/>
+          </a:xfrm>
+          <a:prstGeom prst="rect">
+            <a:avLst/>
+          </a:prstGeom>
+          <a:noFill/>
+        </p:spPr>
+        <p:txBody>
+          <a:bodyPr wrap="square" anchor="ctr" lIns="45720" rIns="45720">
+            <a:spAutoFit/>
+          </a:bodyPr>
+          <a:lstStyle/>
+          <a:p>
+            <a:pPr algn="l">
+              <a:spcAft>
+                <a:spcPts val="0"/>
+              </a:spcAft>
+            </a:pPr>
+            <a:r>
+              <a:rPr sz="1600" b="1">
+                <a:solidFill>
+                  <a:srgbClr val="E8EAF2"/>
+                </a:solidFill>
+                <a:latin typeface="Segoe UI"/>
+              </a:rPr>
+              <a:t>Key takeaway:</a:t>
+            </a:r>
+            <a:r>
+              <a:rPr sz="1600" b="0">
+                <a:solidFill>
+                  <a:srgbClr val="E8EAF2"/>
+                </a:solidFill>
+                <a:latin typeface="Segoe UI"/>
+              </a:rPr>
+              <a:t> max_weighted silences every shape under 0.5 confidence and caps the rest near +24.</a:t>
             </a:r>
           </a:p>
         </p:txBody>
